--- a/ppt/YashaswiniPenumarthi_X24262404_beehive-apiary-monitoring.pptx
+++ b/ppt/YashaswiniPenumarthi_X24262404_beehive-apiary-monitoring.pptx
@@ -1150,20 +1150,20 @@
         </p:nvSpPr>
         <p:spPr>
           <a:xfrm>
-            <a:off x="640080" y="914400"/>
-            <a:ext cx="10972800" cy="1280160"/>
-          </a:xfrm>
-          <a:prstGeom prst="rect">
-            <a:avLst/>
-          </a:prstGeom>
-          <a:noFill/>
-          <a:ln/>
-        </p:spPr>
-        <p:txBody>
-          <a:bodyPr wrap="square" rtlCol="0" anchor="t"/>
-          <a:lstStyle/>
-          <a:p>
-            <a:pPr algn="l" indent="0" marL="0">
+            <a:off x="548640" y="1051560"/>
+            <a:ext cx="11064240" cy="1188720"/>
+          </a:xfrm>
+          <a:prstGeom prst="rect">
+            <a:avLst/>
+          </a:prstGeom>
+          <a:noFill/>
+          <a:ln/>
+        </p:spPr>
+        <p:txBody>
+          <a:bodyPr wrap="square" rtlCol="0" anchor="ctr"/>
+          <a:lstStyle/>
+          <a:p>
+            <a:pPr algn="ctr" indent="0" marL="0">
               <a:buNone/>
             </a:pPr>
             <a:r>
@@ -1189,8 +1189,8 @@
         </p:nvSpPr>
         <p:spPr>
           <a:xfrm>
-            <a:off x="658368" y="2148840"/>
-            <a:ext cx="10972800" cy="365760"/>
+            <a:off x="548640" y="2286000"/>
+            <a:ext cx="11064240" cy="365760"/>
           </a:xfrm>
           <a:prstGeom prst="rect">
             <a:avLst/>
@@ -1202,7 +1202,7 @@
           <a:bodyPr wrap="square" rtlCol="0" anchor="ctr"/>
           <a:lstStyle/>
           <a:p>
-            <a:pPr indent="0" marL="0">
+            <a:pPr algn="ctr" indent="0" marL="0">
               <a:buNone/>
             </a:pPr>
             <a:r>
@@ -1228,8 +1228,8 @@
         </p:nvSpPr>
         <p:spPr>
           <a:xfrm>
-            <a:off x="658368" y="2697480"/>
-            <a:ext cx="10424160" cy="1371600"/>
+            <a:off x="1463040" y="2926080"/>
+            <a:ext cx="9235440" cy="1371600"/>
           </a:xfrm>
           <a:prstGeom prst="rect">
             <a:avLst/>
@@ -1241,7 +1241,7 @@
           <a:bodyPr wrap="square" rtlCol="0" anchor="ctr"/>
           <a:lstStyle/>
           <a:p>
-            <a:pPr indent="0" marL="0">
+            <a:pPr algn="ctr" indent="0" marL="0">
               <a:lnSpc>
                 <a:spcPct val="110000"/>
               </a:lnSpc>
@@ -1270,7 +1270,7 @@
         </p:nvSpPr>
         <p:spPr>
           <a:xfrm>
-            <a:off x="658368" y="4206240"/>
+            <a:off x="1889608" y="4526280"/>
             <a:ext cx="2651760" cy="566928"/>
           </a:xfrm>
           <a:prstGeom prst="roundRect">
@@ -1297,7 +1297,7 @@
         </p:nvSpPr>
         <p:spPr>
           <a:xfrm>
-            <a:off x="658368" y="4206240"/>
+            <a:off x="1889608" y="4526280"/>
             <a:ext cx="2651760" cy="566928"/>
           </a:xfrm>
           <a:prstGeom prst="rect">
@@ -1314,7 +1314,7 @@
               <a:buNone/>
             </a:pPr>
             <a:r>
-              <a:rPr lang="en-US" sz="1400" b="1" dirty="0">
+              <a:rPr lang="en-US" sz="1350" b="1" dirty="0">
                 <a:solidFill>
                   <a:srgbClr val="E7C24A"/>
                 </a:solidFill>
@@ -1324,7 +1324,7 @@
               </a:rPr>
               <a:t>Brood 32–36 °C band</a:t>
             </a:r>
-            <a:endParaRPr lang="en-US" sz="1400" dirty="0"/>
+            <a:endParaRPr lang="en-US" sz="1350" dirty="0"/>
           </a:p>
         </p:txBody>
       </p:sp>
@@ -1336,7 +1336,7 @@
         </p:nvSpPr>
         <p:spPr>
           <a:xfrm>
-            <a:off x="3538728" y="4206240"/>
+            <a:off x="4769968" y="4526280"/>
             <a:ext cx="2651760" cy="566928"/>
           </a:xfrm>
           <a:prstGeom prst="roundRect">
@@ -1363,7 +1363,7 @@
         </p:nvSpPr>
         <p:spPr>
           <a:xfrm>
-            <a:off x="3538728" y="4206240"/>
+            <a:off x="4769968" y="4526280"/>
             <a:ext cx="2651760" cy="566928"/>
           </a:xfrm>
           <a:prstGeom prst="rect">
@@ -1380,7 +1380,7 @@
               <a:buNone/>
             </a:pPr>
             <a:r>
-              <a:rPr lang="en-US" sz="1400" b="1" dirty="0">
+              <a:rPr lang="en-US" sz="1350" b="1" dirty="0">
                 <a:solidFill>
                   <a:srgbClr val="E7C24A"/>
                 </a:solidFill>
@@ -1390,7 +1390,7 @@
               </a:rPr>
               <a:t>Starvation &lt; 20 kg</a:t>
             </a:r>
-            <a:endParaRPr lang="en-US" sz="1400" dirty="0"/>
+            <a:endParaRPr lang="en-US" sz="1350" dirty="0"/>
           </a:p>
         </p:txBody>
       </p:sp>
@@ -1402,7 +1402,7 @@
         </p:nvSpPr>
         <p:spPr>
           <a:xfrm>
-            <a:off x="6419088" y="4206240"/>
+            <a:off x="7650328" y="4526280"/>
             <a:ext cx="2651760" cy="566928"/>
           </a:xfrm>
           <a:prstGeom prst="roundRect">
@@ -1429,7 +1429,7 @@
         </p:nvSpPr>
         <p:spPr>
           <a:xfrm>
-            <a:off x="6419088" y="4206240"/>
+            <a:off x="7650328" y="4526280"/>
             <a:ext cx="2651760" cy="566928"/>
           </a:xfrm>
           <a:prstGeom prst="rect">
@@ -1446,7 +1446,7 @@
               <a:buNone/>
             </a:pPr>
             <a:r>
-              <a:rPr lang="en-US" sz="1400" b="1" dirty="0">
+              <a:rPr lang="en-US" sz="1350" b="1" dirty="0">
                 <a:solidFill>
                   <a:srgbClr val="E7C24A"/>
                 </a:solidFill>
@@ -1456,7 +1456,7 @@
               </a:rPr>
               <a:t>Swarm buzz &gt; 350 Hz</a:t>
             </a:r>
-            <a:endParaRPr lang="en-US" sz="1400" dirty="0"/>
+            <a:endParaRPr lang="en-US" sz="1350" dirty="0"/>
           </a:p>
         </p:txBody>
       </p:sp>
@@ -1468,8 +1468,8 @@
         </p:nvSpPr>
         <p:spPr>
           <a:xfrm>
-            <a:off x="658368" y="6126480"/>
-            <a:ext cx="10972800" cy="365760"/>
+            <a:off x="548640" y="6126480"/>
+            <a:ext cx="11064240" cy="365760"/>
           </a:xfrm>
           <a:prstGeom prst="rect">
             <a:avLst/>
@@ -1481,7 +1481,7 @@
           <a:bodyPr wrap="square" rtlCol="0" anchor="ctr"/>
           <a:lstStyle/>
           <a:p>
-            <a:pPr indent="0" marL="0">
+            <a:pPr algn="ctr" indent="0" marL="0">
               <a:buNone/>
             </a:pPr>
             <a:r>
@@ -1578,12 +1578,12 @@
         </p:nvSpPr>
         <p:spPr>
           <a:xfrm>
-            <a:off x="640080" y="2468880"/>
-            <a:ext cx="1572768" cy="1371600"/>
+            <a:off x="640080" y="1554480"/>
+            <a:ext cx="3200400" cy="3383280"/>
           </a:xfrm>
           <a:prstGeom prst="roundRect">
             <a:avLst>
-              <a:gd name="adj" fmla="val 6667"/>
+              <a:gd name="adj" fmla="val 2857"/>
             </a:avLst>
           </a:prstGeom>
           <a:solidFill>
@@ -1599,62 +1599,69 @@
       </p:sp>
       <p:sp>
         <p:nvSpPr>
-          <p:cNvPr id="4" name="Shape 2"/>
-          <p:cNvSpPr/>
-          <p:nvPr/>
-        </p:nvSpPr>
-        <p:spPr>
-          <a:xfrm>
-            <a:off x="1325880" y="2670048"/>
-            <a:ext cx="201168" cy="201168"/>
-          </a:xfrm>
-          <a:prstGeom prst="ellipse">
-            <a:avLst/>
-          </a:prstGeom>
-          <a:solidFill>
-            <a:srgbClr val="D8AE3E"/>
-          </a:solidFill>
-          <a:ln/>
-        </p:spPr>
-      </p:sp>
-      <p:sp>
-        <p:nvSpPr>
-          <p:cNvPr id="5" name="Text 3"/>
-          <p:cNvSpPr/>
-          <p:nvPr/>
-        </p:nvSpPr>
-        <p:spPr>
-          <a:xfrm>
-            <a:off x="594360" y="2926080"/>
-            <a:ext cx="1664208" cy="411480"/>
-          </a:xfrm>
-          <a:prstGeom prst="rect">
-            <a:avLst/>
-          </a:prstGeom>
-          <a:noFill/>
-          <a:ln/>
-        </p:spPr>
-        <p:txBody>
-          <a:bodyPr wrap="square" lIns="0" tIns="0" rIns="0" bIns="0" rtlCol="0" anchor="ctr"/>
+          <p:cNvPr id="4" name="Text 2"/>
+          <p:cNvSpPr/>
+          <p:nvPr/>
+        </p:nvSpPr>
+        <p:spPr>
+          <a:xfrm>
+            <a:off x="640080" y="1691640"/>
+            <a:ext cx="3200400" cy="365760"/>
+          </a:xfrm>
+          <a:prstGeom prst="rect">
+            <a:avLst/>
+          </a:prstGeom>
+          <a:noFill/>
+          <a:ln/>
+        </p:spPr>
+        <p:txBody>
+          <a:bodyPr wrap="square" rtlCol="0" anchor="ctr"/>
           <a:lstStyle/>
           <a:p>
             <a:pPr algn="ctr" indent="0" marL="0">
               <a:buNone/>
             </a:pPr>
             <a:r>
-              <a:rPr lang="en-US" sz="1450" b="1" dirty="0">
-                <a:solidFill>
-                  <a:srgbClr val="281F0F"/>
+              <a:rPr lang="en-US" sz="1200" b="1" spc="300" kern="0" dirty="0">
+                <a:solidFill>
+                  <a:srgbClr val="D8AE3E"/>
                 </a:solidFill>
                 <a:latin typeface="Calibri" pitchFamily="34" charset="0"/>
                 <a:ea typeface="Calibri" pitchFamily="34" charset="-122"/>
                 <a:cs typeface="Calibri" pitchFamily="34" charset="-120"/>
               </a:rPr>
-              <a:t>Hive sensors</a:t>
-            </a:r>
-            <a:endParaRPr lang="en-US" sz="1450" dirty="0"/>
-          </a:p>
-        </p:txBody>
+              <a:t>EDGE</a:t>
+            </a:r>
+            <a:endParaRPr lang="en-US" sz="1200" dirty="0"/>
+          </a:p>
+        </p:txBody>
+      </p:sp>
+      <p:sp>
+        <p:nvSpPr>
+          <p:cNvPr id="5" name="Shape 3"/>
+          <p:cNvSpPr/>
+          <p:nvPr/>
+        </p:nvSpPr>
+        <p:spPr>
+          <a:xfrm>
+            <a:off x="914400" y="2286000"/>
+            <a:ext cx="2651760" cy="1005840"/>
+          </a:xfrm>
+          <a:prstGeom prst="roundRect">
+            <a:avLst>
+              <a:gd name="adj" fmla="val 7273"/>
+            </a:avLst>
+          </a:prstGeom>
+          <a:solidFill>
+            <a:srgbClr val="FFFFFF"/>
+          </a:solidFill>
+          <a:ln w="15240">
+            <a:solidFill>
+              <a:srgbClr val="D8AE3E"/>
+            </a:solidFill>
+            <a:prstDash val="solid"/>
+          </a:ln>
+        </p:spPr>
       </p:sp>
       <p:sp>
         <p:nvSpPr>
@@ -1664,53 +1671,392 @@
         </p:nvSpPr>
         <p:spPr>
           <a:xfrm>
-            <a:off x="621792" y="3310128"/>
-            <a:ext cx="1609344" cy="457200"/>
-          </a:xfrm>
-          <a:prstGeom prst="rect">
-            <a:avLst/>
-          </a:prstGeom>
-          <a:noFill/>
-          <a:ln/>
-        </p:spPr>
-        <p:txBody>
-          <a:bodyPr wrap="square" lIns="0" tIns="0" rIns="0" bIns="0" rtlCol="0" anchor="t"/>
+            <a:off x="914400" y="2432304"/>
+            <a:ext cx="2651760" cy="365760"/>
+          </a:xfrm>
+          <a:prstGeom prst="rect">
+            <a:avLst/>
+          </a:prstGeom>
+          <a:noFill/>
+          <a:ln/>
+        </p:spPr>
+        <p:txBody>
+          <a:bodyPr wrap="square" lIns="0" tIns="0" rIns="0" bIns="0" rtlCol="0" anchor="ctr"/>
           <a:lstStyle/>
           <a:p>
             <a:pPr algn="ctr" indent="0" marL="0">
               <a:buNone/>
             </a:pPr>
             <a:r>
-              <a:rPr lang="en-US" sz="1050" dirty="0">
-                <a:solidFill>
-                  <a:srgbClr val="6E6144"/>
+              <a:rPr lang="en-US" sz="1400" b="1" dirty="0">
+                <a:solidFill>
+                  <a:srgbClr val="281F0F"/>
                 </a:solidFill>
                 <a:latin typeface="Calibri" pitchFamily="34" charset="0"/>
                 <a:ea typeface="Calibri" pitchFamily="34" charset="-122"/>
                 <a:cs typeface="Calibri" pitchFamily="34" charset="-120"/>
               </a:rPr>
+              <a:t>Hive sensors</a:t>
+            </a:r>
+            <a:endParaRPr lang="en-US" sz="1400" dirty="0"/>
+          </a:p>
+        </p:txBody>
+      </p:sp>
+      <p:sp>
+        <p:nvSpPr>
+          <p:cNvPr id="7" name="Text 5"/>
+          <p:cNvSpPr/>
+          <p:nvPr/>
+        </p:nvSpPr>
+        <p:spPr>
+          <a:xfrm>
+            <a:off x="914400" y="2816352"/>
+            <a:ext cx="2651760" cy="365760"/>
+          </a:xfrm>
+          <a:prstGeom prst="rect">
+            <a:avLst/>
+          </a:prstGeom>
+          <a:noFill/>
+          <a:ln/>
+        </p:spPr>
+        <p:txBody>
+          <a:bodyPr wrap="square" lIns="0" tIns="0" rIns="0" bIns="0" rtlCol="0" anchor="ctr"/>
+          <a:lstStyle/>
+          <a:p>
+            <a:pPr algn="ctr" indent="0" marL="0">
+              <a:buNone/>
+            </a:pPr>
+            <a:r>
+              <a:rPr lang="en-US" sz="1000" dirty="0">
+                <a:solidFill>
+                  <a:srgbClr val="6E6144"/>
+                </a:solidFill>
+                <a:latin typeface="Calibri" pitchFamily="34" charset="0"/>
+                <a:ea typeface="Calibri" pitchFamily="34" charset="-122"/>
+                <a:cs typeface="Calibri" pitchFamily="34" charset="-120"/>
+              </a:rPr>
               <a:t>10 · 2 apiaries</a:t>
             </a:r>
-            <a:endParaRPr lang="en-US" sz="1050" dirty="0"/>
-          </a:p>
-        </p:txBody>
-      </p:sp>
-      <p:sp>
-        <p:nvSpPr>
-          <p:cNvPr id="7" name="Shape 5"/>
-          <p:cNvSpPr/>
-          <p:nvPr/>
-        </p:nvSpPr>
-        <p:spPr>
-          <a:xfrm>
-            <a:off x="2231136" y="3154680"/>
-            <a:ext cx="258409" cy="0"/>
+            <a:endParaRPr lang="en-US" sz="1000" dirty="0"/>
+          </a:p>
+        </p:txBody>
+      </p:sp>
+      <p:sp>
+        <p:nvSpPr>
+          <p:cNvPr id="8" name="Shape 6"/>
+          <p:cNvSpPr/>
+          <p:nvPr/>
+        </p:nvSpPr>
+        <p:spPr>
+          <a:xfrm>
+            <a:off x="914400" y="3520440"/>
+            <a:ext cx="2651760" cy="1005840"/>
+          </a:xfrm>
+          <a:prstGeom prst="roundRect">
+            <a:avLst>
+              <a:gd name="adj" fmla="val 7273"/>
+            </a:avLst>
+          </a:prstGeom>
+          <a:solidFill>
+            <a:srgbClr val="FFFFFF"/>
+          </a:solidFill>
+          <a:ln w="15240">
+            <a:solidFill>
+              <a:srgbClr val="D8AE3E"/>
+            </a:solidFill>
+            <a:prstDash val="solid"/>
+          </a:ln>
+        </p:spPr>
+      </p:sp>
+      <p:sp>
+        <p:nvSpPr>
+          <p:cNvPr id="9" name="Text 7"/>
+          <p:cNvSpPr/>
+          <p:nvPr/>
+        </p:nvSpPr>
+        <p:spPr>
+          <a:xfrm>
+            <a:off x="914400" y="3666744"/>
+            <a:ext cx="2651760" cy="365760"/>
+          </a:xfrm>
+          <a:prstGeom prst="rect">
+            <a:avLst/>
+          </a:prstGeom>
+          <a:noFill/>
+          <a:ln/>
+        </p:spPr>
+        <p:txBody>
+          <a:bodyPr wrap="square" lIns="0" tIns="0" rIns="0" bIns="0" rtlCol="0" anchor="ctr"/>
+          <a:lstStyle/>
+          <a:p>
+            <a:pPr algn="ctr" indent="0" marL="0">
+              <a:buNone/>
+            </a:pPr>
+            <a:r>
+              <a:rPr lang="en-US" sz="1400" b="1" dirty="0">
+                <a:solidFill>
+                  <a:srgbClr val="281F0F"/>
+                </a:solidFill>
+                <a:latin typeface="Calibri" pitchFamily="34" charset="0"/>
+                <a:ea typeface="Calibri" pitchFamily="34" charset="-122"/>
+                <a:cs typeface="Calibri" pitchFamily="34" charset="-120"/>
+              </a:rPr>
+              <a:t>Fog node</a:t>
+            </a:r>
+            <a:endParaRPr lang="en-US" sz="1400" dirty="0"/>
+          </a:p>
+        </p:txBody>
+      </p:sp>
+      <p:sp>
+        <p:nvSpPr>
+          <p:cNvPr id="10" name="Text 8"/>
+          <p:cNvSpPr/>
+          <p:nvPr/>
+        </p:nvSpPr>
+        <p:spPr>
+          <a:xfrm>
+            <a:off x="914400" y="4050792"/>
+            <a:ext cx="2651760" cy="365760"/>
+          </a:xfrm>
+          <a:prstGeom prst="rect">
+            <a:avLst/>
+          </a:prstGeom>
+          <a:noFill/>
+          <a:ln/>
+        </p:spPr>
+        <p:txBody>
+          <a:bodyPr wrap="square" lIns="0" tIns="0" rIns="0" bIns="0" rtlCol="0" anchor="ctr"/>
+          <a:lstStyle/>
+          <a:p>
+            <a:pPr algn="ctr" indent="0" marL="0">
+              <a:buNone/>
+            </a:pPr>
+            <a:r>
+              <a:rPr lang="en-US" sz="1000" dirty="0">
+                <a:solidFill>
+                  <a:srgbClr val="6E6144"/>
+                </a:solidFill>
+                <a:latin typeface="Calibri" pitchFamily="34" charset="0"/>
+                <a:ea typeface="Calibri" pitchFamily="34" charset="-122"/>
+                <a:cs typeface="Calibri" pitchFamily="34" charset="-120"/>
+              </a:rPr>
+              <a:t>10 s windows · colony rules</a:t>
+            </a:r>
+            <a:endParaRPr lang="en-US" sz="1000" dirty="0"/>
+          </a:p>
+        </p:txBody>
+      </p:sp>
+      <p:sp>
+        <p:nvSpPr>
+          <p:cNvPr id="11" name="Shape 9"/>
+          <p:cNvSpPr/>
+          <p:nvPr/>
+        </p:nvSpPr>
+        <p:spPr>
+          <a:xfrm>
+            <a:off x="3886200" y="3246120"/>
+            <a:ext cx="502920" cy="0"/>
           </a:xfrm>
           <a:prstGeom prst="line">
             <a:avLst/>
           </a:prstGeom>
           <a:noFill/>
-          <a:ln w="25400">
+          <a:ln w="31750">
+            <a:solidFill>
+              <a:srgbClr val="8A6516"/>
+            </a:solidFill>
+            <a:prstDash val="solid"/>
+            <a:tailEnd type="triangle"/>
+          </a:ln>
+        </p:spPr>
+      </p:sp>
+      <p:sp>
+        <p:nvSpPr>
+          <p:cNvPr id="12" name="Shape 10"/>
+          <p:cNvSpPr/>
+          <p:nvPr/>
+        </p:nvSpPr>
+        <p:spPr>
+          <a:xfrm>
+            <a:off x="4572000" y="1554480"/>
+            <a:ext cx="6949440" cy="3383280"/>
+          </a:xfrm>
+          <a:prstGeom prst="roundRect">
+            <a:avLst>
+              <a:gd name="adj" fmla="val 2703"/>
+            </a:avLst>
+          </a:prstGeom>
+          <a:solidFill>
+            <a:srgbClr val="F7F2E3"/>
+          </a:solidFill>
+          <a:ln w="19050">
+            <a:solidFill>
+              <a:srgbClr val="8A6516"/>
+            </a:solidFill>
+            <a:prstDash val="solid"/>
+          </a:ln>
+        </p:spPr>
+      </p:sp>
+      <p:sp>
+        <p:nvSpPr>
+          <p:cNvPr id="13" name="Text 11"/>
+          <p:cNvSpPr/>
+          <p:nvPr/>
+        </p:nvSpPr>
+        <p:spPr>
+          <a:xfrm>
+            <a:off x="4572000" y="1691640"/>
+            <a:ext cx="6949440" cy="365760"/>
+          </a:xfrm>
+          <a:prstGeom prst="rect">
+            <a:avLst/>
+          </a:prstGeom>
+          <a:noFill/>
+          <a:ln/>
+        </p:spPr>
+        <p:txBody>
+          <a:bodyPr wrap="square" rtlCol="0" anchor="ctr"/>
+          <a:lstStyle/>
+          <a:p>
+            <a:pPr algn="ctr" indent="0" marL="0">
+              <a:buNone/>
+            </a:pPr>
+            <a:r>
+              <a:rPr lang="en-US" sz="1200" b="1" spc="200" kern="0" dirty="0">
+                <a:solidFill>
+                  <a:srgbClr val="8A6516"/>
+                </a:solidFill>
+                <a:latin typeface="Calibri" pitchFamily="34" charset="0"/>
+                <a:ea typeface="Calibri" pitchFamily="34" charset="-122"/>
+                <a:cs typeface="Calibri" pitchFamily="34" charset="-120"/>
+              </a:rPr>
+              <a:t>CLOUD (serverless)</a:t>
+            </a:r>
+            <a:endParaRPr lang="en-US" sz="1200" dirty="0"/>
+          </a:p>
+        </p:txBody>
+      </p:sp>
+      <p:sp>
+        <p:nvSpPr>
+          <p:cNvPr id="14" name="Shape 12"/>
+          <p:cNvSpPr/>
+          <p:nvPr/>
+        </p:nvSpPr>
+        <p:spPr>
+          <a:xfrm>
+            <a:off x="4846320" y="2651760"/>
+            <a:ext cx="1463040" cy="1371600"/>
+          </a:xfrm>
+          <a:prstGeom prst="roundRect">
+            <a:avLst>
+              <a:gd name="adj" fmla="val 5333"/>
+            </a:avLst>
+          </a:prstGeom>
+          <a:solidFill>
+            <a:srgbClr val="FFFFFF"/>
+          </a:solidFill>
+          <a:ln w="15240">
+            <a:solidFill>
+              <a:srgbClr val="8A6516"/>
+            </a:solidFill>
+            <a:prstDash val="solid"/>
+          </a:ln>
+        </p:spPr>
+      </p:sp>
+      <p:sp>
+        <p:nvSpPr>
+          <p:cNvPr id="15" name="Text 13"/>
+          <p:cNvSpPr/>
+          <p:nvPr/>
+        </p:nvSpPr>
+        <p:spPr>
+          <a:xfrm>
+            <a:off x="4800600" y="2907792"/>
+            <a:ext cx="1554480" cy="457200"/>
+          </a:xfrm>
+          <a:prstGeom prst="rect">
+            <a:avLst/>
+          </a:prstGeom>
+          <a:noFill/>
+          <a:ln/>
+        </p:spPr>
+        <p:txBody>
+          <a:bodyPr wrap="square" lIns="0" tIns="0" rIns="0" bIns="0" rtlCol="0" anchor="ctr"/>
+          <a:lstStyle/>
+          <a:p>
+            <a:pPr algn="ctr" indent="0" marL="0">
+              <a:buNone/>
+            </a:pPr>
+            <a:r>
+              <a:rPr lang="en-US" sz="1250" b="1" dirty="0">
+                <a:solidFill>
+                  <a:srgbClr val="281F0F"/>
+                </a:solidFill>
+                <a:latin typeface="Calibri" pitchFamily="34" charset="0"/>
+                <a:ea typeface="Calibri" pitchFamily="34" charset="-122"/>
+                <a:cs typeface="Calibri" pitchFamily="34" charset="-120"/>
+              </a:rPr>
+              <a:t>Amazon SQS</a:t>
+            </a:r>
+            <a:endParaRPr lang="en-US" sz="1250" dirty="0"/>
+          </a:p>
+        </p:txBody>
+      </p:sp>
+      <p:sp>
+        <p:nvSpPr>
+          <p:cNvPr id="16" name="Text 14"/>
+          <p:cNvSpPr/>
+          <p:nvPr/>
+        </p:nvSpPr>
+        <p:spPr>
+          <a:xfrm>
+            <a:off x="4828032" y="3401568"/>
+            <a:ext cx="1499616" cy="457200"/>
+          </a:xfrm>
+          <a:prstGeom prst="rect">
+            <a:avLst/>
+          </a:prstGeom>
+          <a:noFill/>
+          <a:ln/>
+        </p:spPr>
+        <p:txBody>
+          <a:bodyPr wrap="square" lIns="0" tIns="0" rIns="0" bIns="0" rtlCol="0" anchor="ctr"/>
+          <a:lstStyle/>
+          <a:p>
+            <a:pPr algn="ctr" indent="0" marL="0">
+              <a:buNone/>
+            </a:pPr>
+            <a:r>
+              <a:rPr lang="en-US" sz="900" dirty="0">
+                <a:solidFill>
+                  <a:srgbClr val="6E6144"/>
+                </a:solidFill>
+                <a:latin typeface="Calibri" pitchFamily="34" charset="0"/>
+                <a:ea typeface="Calibri" pitchFamily="34" charset="-122"/>
+                <a:cs typeface="Calibri" pitchFamily="34" charset="-120"/>
+              </a:rPr>
+              <a:t>1 summary / window</a:t>
+            </a:r>
+            <a:endParaRPr lang="en-US" sz="900" dirty="0"/>
+          </a:p>
+        </p:txBody>
+      </p:sp>
+      <p:sp>
+        <p:nvSpPr>
+          <p:cNvPr id="17" name="Shape 15"/>
+          <p:cNvSpPr/>
+          <p:nvPr/>
+        </p:nvSpPr>
+        <p:spPr>
+          <a:xfrm>
+            <a:off x="6318504" y="3337560"/>
+            <a:ext cx="164592" cy="0"/>
+          </a:xfrm>
+          <a:prstGeom prst="line">
+            <a:avLst/>
+          </a:prstGeom>
+          <a:noFill/>
+          <a:ln w="20320">
             <a:solidFill>
               <a:srgbClr val="D8AE3E"/>
             </a:solidFill>
@@ -1721,26 +2067,26 @@
       </p:sp>
       <p:sp>
         <p:nvSpPr>
-          <p:cNvPr id="8" name="Shape 6"/>
-          <p:cNvSpPr/>
-          <p:nvPr/>
-        </p:nvSpPr>
-        <p:spPr>
-          <a:xfrm>
-            <a:off x="2507833" y="2468880"/>
-            <a:ext cx="1572768" cy="1371600"/>
+          <p:cNvPr id="18" name="Shape 16"/>
+          <p:cNvSpPr/>
+          <p:nvPr/>
+        </p:nvSpPr>
+        <p:spPr>
+          <a:xfrm>
+            <a:off x="6492240" y="2651760"/>
+            <a:ext cx="1463040" cy="1371600"/>
           </a:xfrm>
           <a:prstGeom prst="roundRect">
             <a:avLst>
-              <a:gd name="adj" fmla="val 6667"/>
+              <a:gd name="adj" fmla="val 5333"/>
             </a:avLst>
           </a:prstGeom>
           <a:solidFill>
-            <a:srgbClr val="F7F2E3"/>
-          </a:solidFill>
-          <a:ln w="19050">
+            <a:srgbClr val="FFFFFF"/>
+          </a:solidFill>
+          <a:ln w="15240">
             <a:solidFill>
-              <a:srgbClr val="D8AE3E"/>
+              <a:srgbClr val="8A6516"/>
             </a:solidFill>
             <a:prstDash val="solid"/>
           </a:ln>
@@ -1748,34 +2094,14 @@
       </p:sp>
       <p:sp>
         <p:nvSpPr>
-          <p:cNvPr id="9" name="Shape 7"/>
-          <p:cNvSpPr/>
-          <p:nvPr/>
-        </p:nvSpPr>
-        <p:spPr>
-          <a:xfrm>
-            <a:off x="3193633" y="2670048"/>
-            <a:ext cx="201168" cy="201168"/>
-          </a:xfrm>
-          <a:prstGeom prst="ellipse">
-            <a:avLst/>
-          </a:prstGeom>
-          <a:solidFill>
-            <a:srgbClr val="D8AE3E"/>
-          </a:solidFill>
-          <a:ln/>
-        </p:spPr>
-      </p:sp>
-      <p:sp>
-        <p:nvSpPr>
-          <p:cNvPr id="10" name="Text 8"/>
-          <p:cNvSpPr/>
-          <p:nvPr/>
-        </p:nvSpPr>
-        <p:spPr>
-          <a:xfrm>
-            <a:off x="2462113" y="2926080"/>
-            <a:ext cx="1664208" cy="411480"/>
+          <p:cNvPr id="19" name="Text 17"/>
+          <p:cNvSpPr/>
+          <p:nvPr/>
+        </p:nvSpPr>
+        <p:spPr>
+          <a:xfrm>
+            <a:off x="6446520" y="2907792"/>
+            <a:ext cx="1554480" cy="457200"/>
           </a:xfrm>
           <a:prstGeom prst="rect">
             <a:avLst/>
@@ -1791,7 +2117,7 @@
               <a:buNone/>
             </a:pPr>
             <a:r>
-              <a:rPr lang="en-US" sz="1450" b="1" dirty="0">
+              <a:rPr lang="en-US" sz="1250" b="1" dirty="0">
                 <a:solidFill>
                   <a:srgbClr val="281F0F"/>
                 </a:solidFill>
@@ -1799,38 +2125,38 @@
                 <a:ea typeface="Calibri" pitchFamily="34" charset="-122"/>
                 <a:cs typeface="Calibri" pitchFamily="34" charset="-120"/>
               </a:rPr>
-              <a:t>Fog node</a:t>
-            </a:r>
-            <a:endParaRPr lang="en-US" sz="1450" dirty="0"/>
-          </a:p>
-        </p:txBody>
-      </p:sp>
-      <p:sp>
-        <p:nvSpPr>
-          <p:cNvPr id="11" name="Text 9"/>
-          <p:cNvSpPr/>
-          <p:nvPr/>
-        </p:nvSpPr>
-        <p:spPr>
-          <a:xfrm>
-            <a:off x="2489545" y="3310128"/>
-            <a:ext cx="1609344" cy="457200"/>
-          </a:xfrm>
-          <a:prstGeom prst="rect">
-            <a:avLst/>
-          </a:prstGeom>
-          <a:noFill/>
-          <a:ln/>
-        </p:spPr>
-        <p:txBody>
-          <a:bodyPr wrap="square" lIns="0" tIns="0" rIns="0" bIns="0" rtlCol="0" anchor="t"/>
+              <a:t>AWS Lambda</a:t>
+            </a:r>
+            <a:endParaRPr lang="en-US" sz="1250" dirty="0"/>
+          </a:p>
+        </p:txBody>
+      </p:sp>
+      <p:sp>
+        <p:nvSpPr>
+          <p:cNvPr id="20" name="Text 18"/>
+          <p:cNvSpPr/>
+          <p:nvPr/>
+        </p:nvSpPr>
+        <p:spPr>
+          <a:xfrm>
+            <a:off x="6473952" y="3401568"/>
+            <a:ext cx="1499616" cy="457200"/>
+          </a:xfrm>
+          <a:prstGeom prst="rect">
+            <a:avLst/>
+          </a:prstGeom>
+          <a:noFill/>
+          <a:ln/>
+        </p:spPr>
+        <p:txBody>
+          <a:bodyPr wrap="square" lIns="0" tIns="0" rIns="0" bIns="0" rtlCol="0" anchor="ctr"/>
           <a:lstStyle/>
           <a:p>
             <a:pPr algn="ctr" indent="0" marL="0">
               <a:buNone/>
             </a:pPr>
             <a:r>
-              <a:rPr lang="en-US" sz="1050" dirty="0">
+              <a:rPr lang="en-US" sz="900" dirty="0">
                 <a:solidFill>
                   <a:srgbClr val="6E6144"/>
                 </a:solidFill>
@@ -1838,28 +2164,28 @@
                 <a:ea typeface="Calibri" pitchFamily="34" charset="-122"/>
                 <a:cs typeface="Calibri" pitchFamily="34" charset="-120"/>
               </a:rPr>
-              <a:t>10 s windows · colony rules</a:t>
-            </a:r>
-            <a:endParaRPr lang="en-US" sz="1050" dirty="0"/>
-          </a:p>
-        </p:txBody>
-      </p:sp>
-      <p:sp>
-        <p:nvSpPr>
-          <p:cNvPr id="12" name="Shape 10"/>
-          <p:cNvSpPr/>
-          <p:nvPr/>
-        </p:nvSpPr>
-        <p:spPr>
-          <a:xfrm>
-            <a:off x="4098889" y="3154680"/>
-            <a:ext cx="258409" cy="0"/>
+              <a:t>nodejs20 ingest</a:t>
+            </a:r>
+            <a:endParaRPr lang="en-US" sz="900" dirty="0"/>
+          </a:p>
+        </p:txBody>
+      </p:sp>
+      <p:sp>
+        <p:nvSpPr>
+          <p:cNvPr id="21" name="Shape 19"/>
+          <p:cNvSpPr/>
+          <p:nvPr/>
+        </p:nvSpPr>
+        <p:spPr>
+          <a:xfrm>
+            <a:off x="7964424" y="3337560"/>
+            <a:ext cx="164592" cy="0"/>
           </a:xfrm>
           <a:prstGeom prst="line">
             <a:avLst/>
           </a:prstGeom>
           <a:noFill/>
-          <a:ln w="25400">
+          <a:ln w="20320">
             <a:solidFill>
               <a:srgbClr val="D8AE3E"/>
             </a:solidFill>
@@ -1870,24 +2196,24 @@
       </p:sp>
       <p:sp>
         <p:nvSpPr>
-          <p:cNvPr id="13" name="Shape 11"/>
-          <p:cNvSpPr/>
-          <p:nvPr/>
-        </p:nvSpPr>
-        <p:spPr>
-          <a:xfrm>
-            <a:off x="4375587" y="2468880"/>
-            <a:ext cx="1572768" cy="1371600"/>
+          <p:cNvPr id="22" name="Shape 20"/>
+          <p:cNvSpPr/>
+          <p:nvPr/>
+        </p:nvSpPr>
+        <p:spPr>
+          <a:xfrm>
+            <a:off x="8138160" y="2651760"/>
+            <a:ext cx="1463040" cy="1371600"/>
           </a:xfrm>
           <a:prstGeom prst="roundRect">
             <a:avLst>
-              <a:gd name="adj" fmla="val 6667"/>
+              <a:gd name="adj" fmla="val 5333"/>
             </a:avLst>
           </a:prstGeom>
           <a:solidFill>
-            <a:srgbClr val="F7F2E3"/>
-          </a:solidFill>
-          <a:ln w="19050">
+            <a:srgbClr val="FFFFFF"/>
+          </a:solidFill>
+          <a:ln w="15240">
             <a:solidFill>
               <a:srgbClr val="8A6516"/>
             </a:solidFill>
@@ -1897,34 +2223,14 @@
       </p:sp>
       <p:sp>
         <p:nvSpPr>
-          <p:cNvPr id="14" name="Shape 12"/>
-          <p:cNvSpPr/>
-          <p:nvPr/>
-        </p:nvSpPr>
-        <p:spPr>
-          <a:xfrm>
-            <a:off x="5061387" y="2670048"/>
-            <a:ext cx="201168" cy="201168"/>
-          </a:xfrm>
-          <a:prstGeom prst="ellipse">
-            <a:avLst/>
-          </a:prstGeom>
-          <a:solidFill>
-            <a:srgbClr val="8A6516"/>
-          </a:solidFill>
-          <a:ln/>
-        </p:spPr>
-      </p:sp>
-      <p:sp>
-        <p:nvSpPr>
-          <p:cNvPr id="15" name="Text 13"/>
-          <p:cNvSpPr/>
-          <p:nvPr/>
-        </p:nvSpPr>
-        <p:spPr>
-          <a:xfrm>
-            <a:off x="4329867" y="2926080"/>
-            <a:ext cx="1664208" cy="411480"/>
+          <p:cNvPr id="23" name="Text 21"/>
+          <p:cNvSpPr/>
+          <p:nvPr/>
+        </p:nvSpPr>
+        <p:spPr>
+          <a:xfrm>
+            <a:off x="8092440" y="2907792"/>
+            <a:ext cx="1554480" cy="457200"/>
           </a:xfrm>
           <a:prstGeom prst="rect">
             <a:avLst/>
@@ -1940,7 +2246,7 @@
               <a:buNone/>
             </a:pPr>
             <a:r>
-              <a:rPr lang="en-US" sz="1450" b="1" dirty="0">
+              <a:rPr lang="en-US" sz="1250" b="1" dirty="0">
                 <a:solidFill>
                   <a:srgbClr val="281F0F"/>
                 </a:solidFill>
@@ -1948,38 +2254,38 @@
                 <a:ea typeface="Calibri" pitchFamily="34" charset="-122"/>
                 <a:cs typeface="Calibri" pitchFamily="34" charset="-120"/>
               </a:rPr>
-              <a:t>Amazon SQS</a:t>
-            </a:r>
-            <a:endParaRPr lang="en-US" sz="1450" dirty="0"/>
-          </a:p>
-        </p:txBody>
-      </p:sp>
-      <p:sp>
-        <p:nvSpPr>
-          <p:cNvPr id="16" name="Text 14"/>
-          <p:cNvSpPr/>
-          <p:nvPr/>
-        </p:nvSpPr>
-        <p:spPr>
-          <a:xfrm>
-            <a:off x="4357299" y="3310128"/>
-            <a:ext cx="1609344" cy="457200"/>
-          </a:xfrm>
-          <a:prstGeom prst="rect">
-            <a:avLst/>
-          </a:prstGeom>
-          <a:noFill/>
-          <a:ln/>
-        </p:spPr>
-        <p:txBody>
-          <a:bodyPr wrap="square" lIns="0" tIns="0" rIns="0" bIns="0" rtlCol="0" anchor="t"/>
+              <a:t>DynamoDB</a:t>
+            </a:r>
+            <a:endParaRPr lang="en-US" sz="1250" dirty="0"/>
+          </a:p>
+        </p:txBody>
+      </p:sp>
+      <p:sp>
+        <p:nvSpPr>
+          <p:cNvPr id="24" name="Text 22"/>
+          <p:cNvSpPr/>
+          <p:nvPr/>
+        </p:nvSpPr>
+        <p:spPr>
+          <a:xfrm>
+            <a:off x="8119872" y="3401568"/>
+            <a:ext cx="1499616" cy="457200"/>
+          </a:xfrm>
+          <a:prstGeom prst="rect">
+            <a:avLst/>
+          </a:prstGeom>
+          <a:noFill/>
+          <a:ln/>
+        </p:spPr>
+        <p:txBody>
+          <a:bodyPr wrap="square" lIns="0" tIns="0" rIns="0" bIns="0" rtlCol="0" anchor="ctr"/>
           <a:lstStyle/>
           <a:p>
             <a:pPr algn="ctr" indent="0" marL="0">
               <a:buNone/>
             </a:pPr>
             <a:r>
-              <a:rPr lang="en-US" sz="1050" dirty="0">
+              <a:rPr lang="en-US" sz="900" dirty="0">
                 <a:solidFill>
                   <a:srgbClr val="6E6144"/>
                 </a:solidFill>
@@ -1987,28 +2293,28 @@
                 <a:ea typeface="Calibri" pitchFamily="34" charset="-122"/>
                 <a:cs typeface="Calibri" pitchFamily="34" charset="-120"/>
               </a:rPr>
-              <a:t>1 summary / window</a:t>
-            </a:r>
-            <a:endParaRPr lang="en-US" sz="1050" dirty="0"/>
-          </a:p>
-        </p:txBody>
-      </p:sp>
-      <p:sp>
-        <p:nvSpPr>
-          <p:cNvPr id="17" name="Shape 15"/>
-          <p:cNvSpPr/>
-          <p:nvPr/>
-        </p:nvSpPr>
-        <p:spPr>
-          <a:xfrm>
-            <a:off x="5966643" y="3154680"/>
-            <a:ext cx="258409" cy="0"/>
+              <a:t>time-series store</a:t>
+            </a:r>
+            <a:endParaRPr lang="en-US" sz="900" dirty="0"/>
+          </a:p>
+        </p:txBody>
+      </p:sp>
+      <p:sp>
+        <p:nvSpPr>
+          <p:cNvPr id="25" name="Shape 23"/>
+          <p:cNvSpPr/>
+          <p:nvPr/>
+        </p:nvSpPr>
+        <p:spPr>
+          <a:xfrm>
+            <a:off x="9610344" y="3337560"/>
+            <a:ext cx="164592" cy="0"/>
           </a:xfrm>
           <a:prstGeom prst="line">
             <a:avLst/>
           </a:prstGeom>
           <a:noFill/>
-          <a:ln w="25400">
+          <a:ln w="20320">
             <a:solidFill>
               <a:srgbClr val="D8AE3E"/>
             </a:solidFill>
@@ -2019,322 +2325,24 @@
       </p:sp>
       <p:sp>
         <p:nvSpPr>
-          <p:cNvPr id="18" name="Shape 16"/>
-          <p:cNvSpPr/>
-          <p:nvPr/>
-        </p:nvSpPr>
-        <p:spPr>
-          <a:xfrm>
-            <a:off x="6243340" y="2468880"/>
-            <a:ext cx="1572768" cy="1371600"/>
+          <p:cNvPr id="26" name="Shape 24"/>
+          <p:cNvSpPr/>
+          <p:nvPr/>
+        </p:nvSpPr>
+        <p:spPr>
+          <a:xfrm>
+            <a:off x="9784080" y="2651760"/>
+            <a:ext cx="1463040" cy="1371600"/>
           </a:xfrm>
           <a:prstGeom prst="roundRect">
             <a:avLst>
-              <a:gd name="adj" fmla="val 6667"/>
+              <a:gd name="adj" fmla="val 5333"/>
             </a:avLst>
           </a:prstGeom>
           <a:solidFill>
-            <a:srgbClr val="F7F2E3"/>
-          </a:solidFill>
-          <a:ln w="19050">
-            <a:solidFill>
-              <a:srgbClr val="8A6516"/>
-            </a:solidFill>
-            <a:prstDash val="solid"/>
-          </a:ln>
-        </p:spPr>
-      </p:sp>
-      <p:sp>
-        <p:nvSpPr>
-          <p:cNvPr id="19" name="Shape 17"/>
-          <p:cNvSpPr/>
-          <p:nvPr/>
-        </p:nvSpPr>
-        <p:spPr>
-          <a:xfrm>
-            <a:off x="6929140" y="2670048"/>
-            <a:ext cx="201168" cy="201168"/>
-          </a:xfrm>
-          <a:prstGeom prst="ellipse">
-            <a:avLst/>
-          </a:prstGeom>
-          <a:solidFill>
-            <a:srgbClr val="8A6516"/>
-          </a:solidFill>
-          <a:ln/>
-        </p:spPr>
-      </p:sp>
-      <p:sp>
-        <p:nvSpPr>
-          <p:cNvPr id="20" name="Text 18"/>
-          <p:cNvSpPr/>
-          <p:nvPr/>
-        </p:nvSpPr>
-        <p:spPr>
-          <a:xfrm>
-            <a:off x="6197620" y="2926080"/>
-            <a:ext cx="1664208" cy="411480"/>
-          </a:xfrm>
-          <a:prstGeom prst="rect">
-            <a:avLst/>
-          </a:prstGeom>
-          <a:noFill/>
-          <a:ln/>
-        </p:spPr>
-        <p:txBody>
-          <a:bodyPr wrap="square" lIns="0" tIns="0" rIns="0" bIns="0" rtlCol="0" anchor="ctr"/>
-          <a:lstStyle/>
-          <a:p>
-            <a:pPr algn="ctr" indent="0" marL="0">
-              <a:buNone/>
-            </a:pPr>
-            <a:r>
-              <a:rPr lang="en-US" sz="1450" b="1" dirty="0">
-                <a:solidFill>
-                  <a:srgbClr val="281F0F"/>
-                </a:solidFill>
-                <a:latin typeface="Calibri" pitchFamily="34" charset="0"/>
-                <a:ea typeface="Calibri" pitchFamily="34" charset="-122"/>
-                <a:cs typeface="Calibri" pitchFamily="34" charset="-120"/>
-              </a:rPr>
-              <a:t>AWS Lambda</a:t>
-            </a:r>
-            <a:endParaRPr lang="en-US" sz="1450" dirty="0"/>
-          </a:p>
-        </p:txBody>
-      </p:sp>
-      <p:sp>
-        <p:nvSpPr>
-          <p:cNvPr id="21" name="Text 19"/>
-          <p:cNvSpPr/>
-          <p:nvPr/>
-        </p:nvSpPr>
-        <p:spPr>
-          <a:xfrm>
-            <a:off x="6225052" y="3310128"/>
-            <a:ext cx="1609344" cy="457200"/>
-          </a:xfrm>
-          <a:prstGeom prst="rect">
-            <a:avLst/>
-          </a:prstGeom>
-          <a:noFill/>
-          <a:ln/>
-        </p:spPr>
-        <p:txBody>
-          <a:bodyPr wrap="square" lIns="0" tIns="0" rIns="0" bIns="0" rtlCol="0" anchor="t"/>
-          <a:lstStyle/>
-          <a:p>
-            <a:pPr algn="ctr" indent="0" marL="0">
-              <a:buNone/>
-            </a:pPr>
-            <a:r>
-              <a:rPr lang="en-US" sz="1050" dirty="0">
-                <a:solidFill>
-                  <a:srgbClr val="6E6144"/>
-                </a:solidFill>
-                <a:latin typeface="Calibri" pitchFamily="34" charset="0"/>
-                <a:ea typeface="Calibri" pitchFamily="34" charset="-122"/>
-                <a:cs typeface="Calibri" pitchFamily="34" charset="-120"/>
-              </a:rPr>
-              <a:t>nodejs20 ingest</a:t>
-            </a:r>
-            <a:endParaRPr lang="en-US" sz="1050" dirty="0"/>
-          </a:p>
-        </p:txBody>
-      </p:sp>
-      <p:sp>
-        <p:nvSpPr>
-          <p:cNvPr id="22" name="Shape 20"/>
-          <p:cNvSpPr/>
-          <p:nvPr/>
-        </p:nvSpPr>
-        <p:spPr>
-          <a:xfrm>
-            <a:off x="7834396" y="3154680"/>
-            <a:ext cx="258409" cy="0"/>
-          </a:xfrm>
-          <a:prstGeom prst="line">
-            <a:avLst/>
-          </a:prstGeom>
-          <a:noFill/>
-          <a:ln w="25400">
-            <a:solidFill>
-              <a:srgbClr val="D8AE3E"/>
-            </a:solidFill>
-            <a:prstDash val="solid"/>
-            <a:tailEnd type="triangle"/>
-          </a:ln>
-        </p:spPr>
-      </p:sp>
-      <p:sp>
-        <p:nvSpPr>
-          <p:cNvPr id="23" name="Shape 21"/>
-          <p:cNvSpPr/>
-          <p:nvPr/>
-        </p:nvSpPr>
-        <p:spPr>
-          <a:xfrm>
-            <a:off x="8111094" y="2468880"/>
-            <a:ext cx="1572768" cy="1371600"/>
-          </a:xfrm>
-          <a:prstGeom prst="roundRect">
-            <a:avLst>
-              <a:gd name="adj" fmla="val 6667"/>
-            </a:avLst>
-          </a:prstGeom>
-          <a:solidFill>
-            <a:srgbClr val="F7F2E3"/>
-          </a:solidFill>
-          <a:ln w="19050">
-            <a:solidFill>
-              <a:srgbClr val="8A6516"/>
-            </a:solidFill>
-            <a:prstDash val="solid"/>
-          </a:ln>
-        </p:spPr>
-      </p:sp>
-      <p:sp>
-        <p:nvSpPr>
-          <p:cNvPr id="24" name="Shape 22"/>
-          <p:cNvSpPr/>
-          <p:nvPr/>
-        </p:nvSpPr>
-        <p:spPr>
-          <a:xfrm>
-            <a:off x="8796894" y="2670048"/>
-            <a:ext cx="201168" cy="201168"/>
-          </a:xfrm>
-          <a:prstGeom prst="ellipse">
-            <a:avLst/>
-          </a:prstGeom>
-          <a:solidFill>
-            <a:srgbClr val="8A6516"/>
-          </a:solidFill>
-          <a:ln/>
-        </p:spPr>
-      </p:sp>
-      <p:sp>
-        <p:nvSpPr>
-          <p:cNvPr id="25" name="Text 23"/>
-          <p:cNvSpPr/>
-          <p:nvPr/>
-        </p:nvSpPr>
-        <p:spPr>
-          <a:xfrm>
-            <a:off x="8065374" y="2926080"/>
-            <a:ext cx="1664208" cy="411480"/>
-          </a:xfrm>
-          <a:prstGeom prst="rect">
-            <a:avLst/>
-          </a:prstGeom>
-          <a:noFill/>
-          <a:ln/>
-        </p:spPr>
-        <p:txBody>
-          <a:bodyPr wrap="square" lIns="0" tIns="0" rIns="0" bIns="0" rtlCol="0" anchor="ctr"/>
-          <a:lstStyle/>
-          <a:p>
-            <a:pPr algn="ctr" indent="0" marL="0">
-              <a:buNone/>
-            </a:pPr>
-            <a:r>
-              <a:rPr lang="en-US" sz="1450" b="1" dirty="0">
-                <a:solidFill>
-                  <a:srgbClr val="281F0F"/>
-                </a:solidFill>
-                <a:latin typeface="Calibri" pitchFamily="34" charset="0"/>
-                <a:ea typeface="Calibri" pitchFamily="34" charset="-122"/>
-                <a:cs typeface="Calibri" pitchFamily="34" charset="-120"/>
-              </a:rPr>
-              <a:t>DynamoDB</a:t>
-            </a:r>
-            <a:endParaRPr lang="en-US" sz="1450" dirty="0"/>
-          </a:p>
-        </p:txBody>
-      </p:sp>
-      <p:sp>
-        <p:nvSpPr>
-          <p:cNvPr id="26" name="Text 24"/>
-          <p:cNvSpPr/>
-          <p:nvPr/>
-        </p:nvSpPr>
-        <p:spPr>
-          <a:xfrm>
-            <a:off x="8092806" y="3310128"/>
-            <a:ext cx="1609344" cy="457200"/>
-          </a:xfrm>
-          <a:prstGeom prst="rect">
-            <a:avLst/>
-          </a:prstGeom>
-          <a:noFill/>
-          <a:ln/>
-        </p:spPr>
-        <p:txBody>
-          <a:bodyPr wrap="square" lIns="0" tIns="0" rIns="0" bIns="0" rtlCol="0" anchor="t"/>
-          <a:lstStyle/>
-          <a:p>
-            <a:pPr algn="ctr" indent="0" marL="0">
-              <a:buNone/>
-            </a:pPr>
-            <a:r>
-              <a:rPr lang="en-US" sz="1050" dirty="0">
-                <a:solidFill>
-                  <a:srgbClr val="6E6144"/>
-                </a:solidFill>
-                <a:latin typeface="Calibri" pitchFamily="34" charset="0"/>
-                <a:ea typeface="Calibri" pitchFamily="34" charset="-122"/>
-                <a:cs typeface="Calibri" pitchFamily="34" charset="-120"/>
-              </a:rPr>
-              <a:t>time-series store</a:t>
-            </a:r>
-            <a:endParaRPr lang="en-US" sz="1050" dirty="0"/>
-          </a:p>
-        </p:txBody>
-      </p:sp>
-      <p:sp>
-        <p:nvSpPr>
-          <p:cNvPr id="27" name="Shape 25"/>
-          <p:cNvSpPr/>
-          <p:nvPr/>
-        </p:nvSpPr>
-        <p:spPr>
-          <a:xfrm>
-            <a:off x="9702150" y="3154680"/>
-            <a:ext cx="258409" cy="0"/>
-          </a:xfrm>
-          <a:prstGeom prst="line">
-            <a:avLst/>
-          </a:prstGeom>
-          <a:noFill/>
-          <a:ln w="25400">
-            <a:solidFill>
-              <a:srgbClr val="D8AE3E"/>
-            </a:solidFill>
-            <a:prstDash val="solid"/>
-            <a:tailEnd type="triangle"/>
-          </a:ln>
-        </p:spPr>
-      </p:sp>
-      <p:sp>
-        <p:nvSpPr>
-          <p:cNvPr id="28" name="Shape 26"/>
-          <p:cNvSpPr/>
-          <p:nvPr/>
-        </p:nvSpPr>
-        <p:spPr>
-          <a:xfrm>
-            <a:off x="9978847" y="2468880"/>
-            <a:ext cx="1572768" cy="1371600"/>
-          </a:xfrm>
-          <a:prstGeom prst="roundRect">
-            <a:avLst>
-              <a:gd name="adj" fmla="val 6667"/>
-            </a:avLst>
-          </a:prstGeom>
-          <a:solidFill>
-            <a:srgbClr val="F7F2E3"/>
-          </a:solidFill>
-          <a:ln w="19050">
+            <a:srgbClr val="FFFFFF"/>
+          </a:solidFill>
+          <a:ln w="15240">
             <a:solidFill>
               <a:srgbClr val="B98A1E"/>
             </a:solidFill>
@@ -2344,34 +2352,14 @@
       </p:sp>
       <p:sp>
         <p:nvSpPr>
-          <p:cNvPr id="29" name="Shape 27"/>
-          <p:cNvSpPr/>
-          <p:nvPr/>
-        </p:nvSpPr>
-        <p:spPr>
-          <a:xfrm>
-            <a:off x="10664647" y="2670048"/>
-            <a:ext cx="201168" cy="201168"/>
-          </a:xfrm>
-          <a:prstGeom prst="ellipse">
-            <a:avLst/>
-          </a:prstGeom>
-          <a:solidFill>
-            <a:srgbClr val="B98A1E"/>
-          </a:solidFill>
-          <a:ln/>
-        </p:spPr>
-      </p:sp>
-      <p:sp>
-        <p:nvSpPr>
-          <p:cNvPr id="30" name="Text 28"/>
-          <p:cNvSpPr/>
-          <p:nvPr/>
-        </p:nvSpPr>
-        <p:spPr>
-          <a:xfrm>
-            <a:off x="9933127" y="2926080"/>
-            <a:ext cx="1664208" cy="411480"/>
+          <p:cNvPr id="27" name="Text 25"/>
+          <p:cNvSpPr/>
+          <p:nvPr/>
+        </p:nvSpPr>
+        <p:spPr>
+          <a:xfrm>
+            <a:off x="9738360" y="2907792"/>
+            <a:ext cx="1554480" cy="457200"/>
           </a:xfrm>
           <a:prstGeom prst="rect">
             <a:avLst/>
@@ -2387,7 +2375,7 @@
               <a:buNone/>
             </a:pPr>
             <a:r>
-              <a:rPr lang="en-US" sz="1450" b="1" dirty="0">
+              <a:rPr lang="en-US" sz="1250" b="1" dirty="0">
                 <a:solidFill>
                   <a:srgbClr val="281F0F"/>
                 </a:solidFill>
@@ -2397,36 +2385,36 @@
               </a:rPr>
               <a:t>API GW + S3</a:t>
             </a:r>
-            <a:endParaRPr lang="en-US" sz="1450" dirty="0"/>
-          </a:p>
-        </p:txBody>
-      </p:sp>
-      <p:sp>
-        <p:nvSpPr>
-          <p:cNvPr id="31" name="Text 29"/>
-          <p:cNvSpPr/>
-          <p:nvPr/>
-        </p:nvSpPr>
-        <p:spPr>
-          <a:xfrm>
-            <a:off x="9960559" y="3310128"/>
-            <a:ext cx="1609344" cy="457200"/>
-          </a:xfrm>
-          <a:prstGeom prst="rect">
-            <a:avLst/>
-          </a:prstGeom>
-          <a:noFill/>
-          <a:ln/>
-        </p:spPr>
-        <p:txBody>
-          <a:bodyPr wrap="square" lIns="0" tIns="0" rIns="0" bIns="0" rtlCol="0" anchor="t"/>
+            <a:endParaRPr lang="en-US" sz="1250" dirty="0"/>
+          </a:p>
+        </p:txBody>
+      </p:sp>
+      <p:sp>
+        <p:nvSpPr>
+          <p:cNvPr id="28" name="Text 26"/>
+          <p:cNvSpPr/>
+          <p:nvPr/>
+        </p:nvSpPr>
+        <p:spPr>
+          <a:xfrm>
+            <a:off x="9765792" y="3401568"/>
+            <a:ext cx="1499616" cy="457200"/>
+          </a:xfrm>
+          <a:prstGeom prst="rect">
+            <a:avLst/>
+          </a:prstGeom>
+          <a:noFill/>
+          <a:ln/>
+        </p:spPr>
+        <p:txBody>
+          <a:bodyPr wrap="square" lIns="0" tIns="0" rIns="0" bIns="0" rtlCol="0" anchor="ctr"/>
           <a:lstStyle/>
           <a:p>
             <a:pPr algn="ctr" indent="0" marL="0">
               <a:buNone/>
             </a:pPr>
             <a:r>
-              <a:rPr lang="en-US" sz="1050" dirty="0">
+              <a:rPr lang="en-US" sz="900" dirty="0">
                 <a:solidFill>
                   <a:srgbClr val="6E6144"/>
                 </a:solidFill>
@@ -2436,98 +2424,20 @@
               </a:rPr>
               <a:t>colony verdict cards</a:t>
             </a:r>
-            <a:endParaRPr lang="en-US" sz="1050" dirty="0"/>
-          </a:p>
-        </p:txBody>
-      </p:sp>
-      <p:sp>
-        <p:nvSpPr>
-          <p:cNvPr id="32" name="Text 30"/>
-          <p:cNvSpPr/>
-          <p:nvPr/>
-        </p:nvSpPr>
-        <p:spPr>
-          <a:xfrm>
-            <a:off x="640080" y="3977640"/>
-            <a:ext cx="3440521" cy="274320"/>
-          </a:xfrm>
-          <a:prstGeom prst="rect">
-            <a:avLst/>
-          </a:prstGeom>
-          <a:noFill/>
-          <a:ln/>
-        </p:spPr>
-        <p:txBody>
-          <a:bodyPr wrap="square" rtlCol="0" anchor="ctr"/>
-          <a:lstStyle/>
-          <a:p>
-            <a:pPr algn="ctr" indent="0" marL="0">
-              <a:buNone/>
-            </a:pPr>
-            <a:r>
-              <a:rPr lang="en-US" sz="1100" b="1" spc="200" kern="0" dirty="0">
-                <a:solidFill>
-                  <a:srgbClr val="D8AE3E"/>
-                </a:solidFill>
-                <a:latin typeface="Calibri" pitchFamily="34" charset="0"/>
-                <a:ea typeface="Calibri" pitchFamily="34" charset="-122"/>
-                <a:cs typeface="Calibri" pitchFamily="34" charset="-120"/>
-              </a:rPr>
-              <a:t>EDGE</a:t>
-            </a:r>
-            <a:endParaRPr lang="en-US" sz="1100" dirty="0"/>
-          </a:p>
-        </p:txBody>
-      </p:sp>
-      <p:sp>
-        <p:nvSpPr>
-          <p:cNvPr id="33" name="Text 31"/>
-          <p:cNvSpPr/>
-          <p:nvPr/>
-        </p:nvSpPr>
-        <p:spPr>
-          <a:xfrm>
-            <a:off x="4375587" y="3977640"/>
-            <a:ext cx="7176028" cy="274320"/>
-          </a:xfrm>
-          <a:prstGeom prst="rect">
-            <a:avLst/>
-          </a:prstGeom>
-          <a:noFill/>
-          <a:ln/>
-        </p:spPr>
-        <p:txBody>
-          <a:bodyPr wrap="square" rtlCol="0" anchor="ctr"/>
-          <a:lstStyle/>
-          <a:p>
-            <a:pPr algn="ctr" indent="0" marL="0">
-              <a:buNone/>
-            </a:pPr>
-            <a:r>
-              <a:rPr lang="en-US" sz="1100" b="1" spc="200" kern="0" dirty="0">
-                <a:solidFill>
-                  <a:srgbClr val="8A6516"/>
-                </a:solidFill>
-                <a:latin typeface="Calibri" pitchFamily="34" charset="0"/>
-                <a:ea typeface="Calibri" pitchFamily="34" charset="-122"/>
-                <a:cs typeface="Calibri" pitchFamily="34" charset="-120"/>
-              </a:rPr>
-              <a:t>CLOUD</a:t>
-            </a:r>
-            <a:endParaRPr lang="en-US" sz="1100" dirty="0"/>
-          </a:p>
-        </p:txBody>
-      </p:sp>
-      <p:sp>
-        <p:nvSpPr>
-          <p:cNvPr id="34" name="Text 32"/>
-          <p:cNvSpPr/>
-          <p:nvPr/>
-        </p:nvSpPr>
-        <p:spPr>
-          <a:xfrm>
-            <a:off x="640080" y="5212080"/>
-            <a:ext cx="10972800" cy="640080"/>
+            <a:endParaRPr lang="en-US" sz="900" dirty="0"/>
+          </a:p>
+        </p:txBody>
+      </p:sp>
+      <p:sp>
+        <p:nvSpPr>
+          <p:cNvPr id="29" name="Text 27"/>
+          <p:cNvSpPr/>
+          <p:nvPr/>
+        </p:nvSpPr>
+        <p:spPr>
+          <a:xfrm>
+            <a:off x="640080" y="5257800"/>
+            <a:ext cx="10972800" cy="731520"/>
           </a:xfrm>
           <a:prstGeom prst="rect">
             <a:avLst/>
@@ -2675,8 +2585,35 @@
         </p:nvSpPr>
         <p:spPr>
           <a:xfrm>
-            <a:off x="731520" y="1965960"/>
-            <a:ext cx="685800" cy="685800"/>
+            <a:off x="640080" y="1874520"/>
+            <a:ext cx="3502152" cy="3657600"/>
+          </a:xfrm>
+          <a:prstGeom prst="roundRect">
+            <a:avLst>
+              <a:gd name="adj" fmla="val 2611"/>
+            </a:avLst>
+          </a:prstGeom>
+          <a:solidFill>
+            <a:srgbClr val="F7F2E3"/>
+          </a:solidFill>
+          <a:ln w="15240">
+            <a:solidFill>
+              <a:srgbClr val="B98A1E"/>
+            </a:solidFill>
+            <a:prstDash val="solid"/>
+          </a:ln>
+        </p:spPr>
+      </p:sp>
+      <p:sp>
+        <p:nvSpPr>
+          <p:cNvPr id="5" name="Shape 3"/>
+          <p:cNvSpPr/>
+          <p:nvPr/>
+        </p:nvSpPr>
+        <p:spPr>
+          <a:xfrm>
+            <a:off x="914400" y="2194560"/>
+            <a:ext cx="640080" cy="640080"/>
           </a:xfrm>
           <a:prstGeom prst="ellipse">
             <a:avLst/>
@@ -2689,14 +2626,14 @@
       </p:sp>
       <p:sp>
         <p:nvSpPr>
-          <p:cNvPr id="5" name="Text 3"/>
-          <p:cNvSpPr/>
-          <p:nvPr/>
-        </p:nvSpPr>
-        <p:spPr>
-          <a:xfrm>
-            <a:off x="731520" y="1965960"/>
-            <a:ext cx="685800" cy="685800"/>
+          <p:cNvPr id="6" name="Text 4"/>
+          <p:cNvSpPr/>
+          <p:nvPr/>
+        </p:nvSpPr>
+        <p:spPr>
+          <a:xfrm>
+            <a:off x="914400" y="2194560"/>
+            <a:ext cx="640080" cy="640080"/>
           </a:xfrm>
           <a:prstGeom prst="rect">
             <a:avLst/>
@@ -2712,7 +2649,7 @@
               <a:buNone/>
             </a:pPr>
             <a:r>
-              <a:rPr lang="en-US" sz="2600" b="1" dirty="0">
+              <a:rPr lang="en-US" sz="2400" b="1" dirty="0">
                 <a:solidFill>
                   <a:srgbClr val="FFFFFF"/>
                 </a:solidFill>
@@ -2722,20 +2659,20 @@
               </a:rPr>
               <a:t>1</a:t>
             </a:r>
-            <a:endParaRPr lang="en-US" sz="2600" dirty="0"/>
-          </a:p>
-        </p:txBody>
-      </p:sp>
-      <p:sp>
-        <p:nvSpPr>
-          <p:cNvPr id="6" name="Text 4"/>
-          <p:cNvSpPr/>
-          <p:nvPr/>
-        </p:nvSpPr>
-        <p:spPr>
-          <a:xfrm>
-            <a:off x="1691640" y="1920240"/>
-            <a:ext cx="9875520" cy="411480"/>
+            <a:endParaRPr lang="en-US" sz="2400" dirty="0"/>
+          </a:p>
+        </p:txBody>
+      </p:sp>
+      <p:sp>
+        <p:nvSpPr>
+          <p:cNvPr id="7" name="Text 5"/>
+          <p:cNvSpPr/>
+          <p:nvPr/>
+        </p:nvSpPr>
+        <p:spPr>
+          <a:xfrm>
+            <a:off x="914400" y="3017520"/>
+            <a:ext cx="2953512" cy="822960"/>
           </a:xfrm>
           <a:prstGeom prst="rect">
             <a:avLst/>
@@ -2751,7 +2688,7 @@
               <a:buNone/>
             </a:pPr>
             <a:r>
-              <a:rPr lang="en-US" sz="1800" b="1" dirty="0">
+              <a:rPr lang="en-US" sz="1700" b="1" dirty="0">
                 <a:solidFill>
                   <a:srgbClr val="281F0F"/>
                 </a:solidFill>
@@ -2759,22 +2696,22 @@
                 <a:ea typeface="Calibri" pitchFamily="34" charset="-122"/>
                 <a:cs typeface="Calibri" pitchFamily="34" charset="-120"/>
               </a:rPr>
-              <a:t>Pipeline health, all green</a:t>
-            </a:r>
-            <a:endParaRPr lang="en-US" sz="1800" dirty="0"/>
-          </a:p>
-        </p:txBody>
-      </p:sp>
-      <p:sp>
-        <p:nvSpPr>
-          <p:cNvPr id="7" name="Text 5"/>
-          <p:cNvSpPr/>
-          <p:nvPr/>
-        </p:nvSpPr>
-        <p:spPr>
-          <a:xfrm>
-            <a:off x="1691640" y="2340864"/>
-            <a:ext cx="9875520" cy="640080"/>
+              <a:t>A plain-language verdict per apiary</a:t>
+            </a:r>
+            <a:endParaRPr lang="en-US" sz="1700" dirty="0"/>
+          </a:p>
+        </p:txBody>
+      </p:sp>
+      <p:sp>
+        <p:nvSpPr>
+          <p:cNvPr id="8" name="Text 6"/>
+          <p:cNvSpPr/>
+          <p:nvPr/>
+        </p:nvSpPr>
+        <p:spPr>
+          <a:xfrm>
+            <a:off x="914400" y="3794760"/>
+            <a:ext cx="2953512" cy="1554480"/>
           </a:xfrm>
           <a:prstGeom prst="rect">
             <a:avLst/>
@@ -2787,10 +2724,13 @@
           <a:lstStyle/>
           <a:p>
             <a:pPr indent="0" marL="0">
-              <a:buNone/>
-            </a:pPr>
-            <a:r>
-              <a:rPr lang="en-US" sz="1350" dirty="0">
+              <a:lnSpc>
+                <a:spcPct val="105000"/>
+              </a:lnSpc>
+              <a:buNone/>
+            </a:pPr>
+            <a:r>
+              <a:rPr lang="en-US" sz="1300" dirty="0">
                 <a:solidFill>
                   <a:srgbClr val="6E6144"/>
                 </a:solidFill>
@@ -2798,22 +2738,49 @@
                 <a:ea typeface="Calibri" pitchFamily="34" charset="-122"/>
                 <a:cs typeface="Calibri" pitchFamily="34" charset="-120"/>
               </a:rPr>
-              <a:t>Gateway, queue, Lambda and the end-to-end pipeline all green.</a:t>
-            </a:r>
-            <a:endParaRPr lang="en-US" sz="1350" dirty="0"/>
-          </a:p>
-        </p:txBody>
-      </p:sp>
-      <p:sp>
-        <p:nvSpPr>
-          <p:cNvPr id="8" name="Shape 6"/>
-          <p:cNvSpPr/>
-          <p:nvPr/>
-        </p:nvSpPr>
-        <p:spPr>
-          <a:xfrm>
-            <a:off x="731520" y="3383280"/>
-            <a:ext cx="685800" cy="685800"/>
+              <a:t>Each colony card reads thriving, stressed or about to swarm — a conclusion, not five graphs to interpret.</a:t>
+            </a:r>
+            <a:endParaRPr lang="en-US" sz="1300" dirty="0"/>
+          </a:p>
+        </p:txBody>
+      </p:sp>
+      <p:sp>
+        <p:nvSpPr>
+          <p:cNvPr id="9" name="Shape 7"/>
+          <p:cNvSpPr/>
+          <p:nvPr/>
+        </p:nvSpPr>
+        <p:spPr>
+          <a:xfrm>
+            <a:off x="4416552" y="1874520"/>
+            <a:ext cx="3502152" cy="3657600"/>
+          </a:xfrm>
+          <a:prstGeom prst="roundRect">
+            <a:avLst>
+              <a:gd name="adj" fmla="val 2611"/>
+            </a:avLst>
+          </a:prstGeom>
+          <a:solidFill>
+            <a:srgbClr val="F7F2E3"/>
+          </a:solidFill>
+          <a:ln w="15240">
+            <a:solidFill>
+              <a:srgbClr val="B98A1E"/>
+            </a:solidFill>
+            <a:prstDash val="solid"/>
+          </a:ln>
+        </p:spPr>
+      </p:sp>
+      <p:sp>
+        <p:nvSpPr>
+          <p:cNvPr id="10" name="Shape 8"/>
+          <p:cNvSpPr/>
+          <p:nvPr/>
+        </p:nvSpPr>
+        <p:spPr>
+          <a:xfrm>
+            <a:off x="4690872" y="2194560"/>
+            <a:ext cx="640080" cy="640080"/>
           </a:xfrm>
           <a:prstGeom prst="ellipse">
             <a:avLst/>
@@ -2826,14 +2793,14 @@
       </p:sp>
       <p:sp>
         <p:nvSpPr>
-          <p:cNvPr id="9" name="Text 7"/>
-          <p:cNvSpPr/>
-          <p:nvPr/>
-        </p:nvSpPr>
-        <p:spPr>
-          <a:xfrm>
-            <a:off x="731520" y="3383280"/>
-            <a:ext cx="685800" cy="685800"/>
+          <p:cNvPr id="11" name="Text 9"/>
+          <p:cNvSpPr/>
+          <p:nvPr/>
+        </p:nvSpPr>
+        <p:spPr>
+          <a:xfrm>
+            <a:off x="4690872" y="2194560"/>
+            <a:ext cx="640080" cy="640080"/>
           </a:xfrm>
           <a:prstGeom prst="rect">
             <a:avLst/>
@@ -2849,7 +2816,7 @@
               <a:buNone/>
             </a:pPr>
             <a:r>
-              <a:rPr lang="en-US" sz="2600" b="1" dirty="0">
+              <a:rPr lang="en-US" sz="2400" b="1" dirty="0">
                 <a:solidFill>
                   <a:srgbClr val="FFFFFF"/>
                 </a:solidFill>
@@ -2859,20 +2826,20 @@
               </a:rPr>
               <a:t>2</a:t>
             </a:r>
-            <a:endParaRPr lang="en-US" sz="2600" dirty="0"/>
-          </a:p>
-        </p:txBody>
-      </p:sp>
-      <p:sp>
-        <p:nvSpPr>
-          <p:cNvPr id="10" name="Text 8"/>
-          <p:cNvSpPr/>
-          <p:nvPr/>
-        </p:nvSpPr>
-        <p:spPr>
-          <a:xfrm>
-            <a:off x="1691640" y="3337560"/>
-            <a:ext cx="9875520" cy="411480"/>
+            <a:endParaRPr lang="en-US" sz="2400" dirty="0"/>
+          </a:p>
+        </p:txBody>
+      </p:sp>
+      <p:sp>
+        <p:nvSpPr>
+          <p:cNvPr id="12" name="Text 10"/>
+          <p:cNvSpPr/>
+          <p:nvPr/>
+        </p:nvSpPr>
+        <p:spPr>
+          <a:xfrm>
+            <a:off x="4690872" y="3017520"/>
+            <a:ext cx="2953512" cy="822960"/>
           </a:xfrm>
           <a:prstGeom prst="rect">
             <a:avLst/>
@@ -2888,7 +2855,7 @@
               <a:buNone/>
             </a:pPr>
             <a:r>
-              <a:rPr lang="en-US" sz="1800" b="1" dirty="0">
+              <a:rPr lang="en-US" sz="1700" b="1" dirty="0">
                 <a:solidFill>
                   <a:srgbClr val="281F0F"/>
                 </a:solidFill>
@@ -2896,22 +2863,22 @@
                 <a:ea typeface="Calibri" pitchFamily="34" charset="-122"/>
                 <a:cs typeface="Calibri" pitchFamily="34" charset="-120"/>
               </a:rPr>
-              <a:t>Live colony verdicts</a:t>
-            </a:r>
-            <a:endParaRPr lang="en-US" sz="1800" dirty="0"/>
-          </a:p>
-        </p:txBody>
-      </p:sp>
-      <p:sp>
-        <p:nvSpPr>
-          <p:cNvPr id="11" name="Text 9"/>
-          <p:cNvSpPr/>
-          <p:nvPr/>
-        </p:nvSpPr>
-        <p:spPr>
-          <a:xfrm>
-            <a:off x="1691640" y="3758184"/>
-            <a:ext cx="9875520" cy="640080"/>
+              <a:t>A brood-overheat alert with context</a:t>
+            </a:r>
+            <a:endParaRPr lang="en-US" sz="1700" dirty="0"/>
+          </a:p>
+        </p:txBody>
+      </p:sp>
+      <p:sp>
+        <p:nvSpPr>
+          <p:cNvPr id="13" name="Text 11"/>
+          <p:cNvSpPr/>
+          <p:nvPr/>
+        </p:nvSpPr>
+        <p:spPr>
+          <a:xfrm>
+            <a:off x="4690872" y="3794760"/>
+            <a:ext cx="2953512" cy="1554480"/>
           </a:xfrm>
           <a:prstGeom prst="rect">
             <a:avLst/>
@@ -2924,10 +2891,13 @@
           <a:lstStyle/>
           <a:p>
             <a:pPr indent="0" marL="0">
-              <a:buNone/>
-            </a:pPr>
-            <a:r>
-              <a:rPr lang="en-US" sz="1350" dirty="0">
+              <a:lnSpc>
+                <a:spcPct val="105000"/>
+              </a:lnSpc>
+              <a:buNone/>
+            </a:pPr>
+            <a:r>
+              <a:rPr lang="en-US" sz="1300" dirty="0">
                 <a:solidFill>
                   <a:srgbClr val="6E6144"/>
                 </a:solidFill>
@@ -2935,22 +2905,49 @@
                 <a:ea typeface="Calibri" pitchFamily="34" charset="-122"/>
                 <a:cs typeface="Calibri" pitchFamily="34" charset="-120"/>
               </a:rPr>
-              <a:t>A colony-health card per apiary with a plain-language verdict and five readings; the alert banner names two firing brood-overheat conditions.</a:t>
-            </a:r>
-            <a:endParaRPr lang="en-US" sz="1350" dirty="0"/>
-          </a:p>
-        </p:txBody>
-      </p:sp>
-      <p:sp>
-        <p:nvSpPr>
-          <p:cNvPr id="12" name="Shape 10"/>
-          <p:cNvSpPr/>
-          <p:nvPr/>
-        </p:nvSpPr>
-        <p:spPr>
-          <a:xfrm>
-            <a:off x="731520" y="4800600"/>
-            <a:ext cx="685800" cy="685800"/>
+              <a:t>The banner names two firing brood-overheat conditions and reports brood temperature breaching a safe threshold while weight is rising.</a:t>
+            </a:r>
+            <a:endParaRPr lang="en-US" sz="1300" dirty="0"/>
+          </a:p>
+        </p:txBody>
+      </p:sp>
+      <p:sp>
+        <p:nvSpPr>
+          <p:cNvPr id="14" name="Shape 12"/>
+          <p:cNvSpPr/>
+          <p:nvPr/>
+        </p:nvSpPr>
+        <p:spPr>
+          <a:xfrm>
+            <a:off x="8193024" y="1874520"/>
+            <a:ext cx="3502152" cy="3657600"/>
+          </a:xfrm>
+          <a:prstGeom prst="roundRect">
+            <a:avLst>
+              <a:gd name="adj" fmla="val 2611"/>
+            </a:avLst>
+          </a:prstGeom>
+          <a:solidFill>
+            <a:srgbClr val="F7F2E3"/>
+          </a:solidFill>
+          <a:ln w="15240">
+            <a:solidFill>
+              <a:srgbClr val="B98A1E"/>
+            </a:solidFill>
+            <a:prstDash val="solid"/>
+          </a:ln>
+        </p:spPr>
+      </p:sp>
+      <p:sp>
+        <p:nvSpPr>
+          <p:cNvPr id="15" name="Shape 13"/>
+          <p:cNvSpPr/>
+          <p:nvPr/>
+        </p:nvSpPr>
+        <p:spPr>
+          <a:xfrm>
+            <a:off x="8467344" y="2194560"/>
+            <a:ext cx="640080" cy="640080"/>
           </a:xfrm>
           <a:prstGeom prst="ellipse">
             <a:avLst/>
@@ -2963,14 +2960,14 @@
       </p:sp>
       <p:sp>
         <p:nvSpPr>
-          <p:cNvPr id="13" name="Text 11"/>
-          <p:cNvSpPr/>
-          <p:nvPr/>
-        </p:nvSpPr>
-        <p:spPr>
-          <a:xfrm>
-            <a:off x="731520" y="4800600"/>
-            <a:ext cx="685800" cy="685800"/>
+          <p:cNvPr id="16" name="Text 14"/>
+          <p:cNvSpPr/>
+          <p:nvPr/>
+        </p:nvSpPr>
+        <p:spPr>
+          <a:xfrm>
+            <a:off x="8467344" y="2194560"/>
+            <a:ext cx="640080" cy="640080"/>
           </a:xfrm>
           <a:prstGeom prst="rect">
             <a:avLst/>
@@ -2986,7 +2983,7 @@
               <a:buNone/>
             </a:pPr>
             <a:r>
-              <a:rPr lang="en-US" sz="2600" b="1" dirty="0">
+              <a:rPr lang="en-US" sz="2400" b="1" dirty="0">
                 <a:solidFill>
                   <a:srgbClr val="FFFFFF"/>
                 </a:solidFill>
@@ -2996,20 +2993,20 @@
               </a:rPr>
               <a:t>3</a:t>
             </a:r>
-            <a:endParaRPr lang="en-US" sz="2600" dirty="0"/>
-          </a:p>
-        </p:txBody>
-      </p:sp>
-      <p:sp>
-        <p:nvSpPr>
-          <p:cNvPr id="14" name="Text 12"/>
-          <p:cNvSpPr/>
-          <p:nvPr/>
-        </p:nvSpPr>
-        <p:spPr>
-          <a:xfrm>
-            <a:off x="1691640" y="4754880"/>
-            <a:ext cx="9875520" cy="411480"/>
+            <a:endParaRPr lang="en-US" sz="2400" dirty="0"/>
+          </a:p>
+        </p:txBody>
+      </p:sp>
+      <p:sp>
+        <p:nvSpPr>
+          <p:cNvPr id="17" name="Text 15"/>
+          <p:cNvSpPr/>
+          <p:nvPr/>
+        </p:nvSpPr>
+        <p:spPr>
+          <a:xfrm>
+            <a:off x="8467344" y="3017520"/>
+            <a:ext cx="2953512" cy="822960"/>
           </a:xfrm>
           <a:prstGeom prst="rect">
             <a:avLst/>
@@ -3025,7 +3022,7 @@
               <a:buNone/>
             </a:pPr>
             <a:r>
-              <a:rPr lang="en-US" sz="1800" b="1" dirty="0">
+              <a:rPr lang="en-US" sz="1700" b="1" dirty="0">
                 <a:solidFill>
                   <a:srgbClr val="281F0F"/>
                 </a:solidFill>
@@ -3033,22 +3030,22 @@
                 <a:ea typeface="Calibri" pitchFamily="34" charset="-122"/>
                 <a:cs typeface="Calibri" pitchFamily="34" charset="-120"/>
               </a:rPr>
-              <a:t>Tested end to end</a:t>
-            </a:r>
-            <a:endParaRPr lang="en-US" sz="1800" dirty="0"/>
-          </a:p>
-        </p:txBody>
-      </p:sp>
-      <p:sp>
-        <p:nvSpPr>
-          <p:cNvPr id="15" name="Text 13"/>
-          <p:cNvSpPr/>
-          <p:nvPr/>
-        </p:nvSpPr>
-        <p:spPr>
-          <a:xfrm>
-            <a:off x="1691640" y="5175504"/>
-            <a:ext cx="9875520" cy="640080"/>
+              <a:t>Sound leads the other signals</a:t>
+            </a:r>
+            <a:endParaRPr lang="en-US" sz="1700" dirty="0"/>
+          </a:p>
+        </p:txBody>
+      </p:sp>
+      <p:sp>
+        <p:nvSpPr>
+          <p:cNvPr id="18" name="Text 16"/>
+          <p:cNvSpPr/>
+          <p:nvPr/>
+        </p:nvSpPr>
+        <p:spPr>
+          <a:xfrm>
+            <a:off x="8467344" y="3794760"/>
+            <a:ext cx="2953512" cy="1554480"/>
           </a:xfrm>
           <a:prstGeom prst="rect">
             <a:avLst/>
@@ -3061,10 +3058,13 @@
           <a:lstStyle/>
           <a:p>
             <a:pPr indent="0" marL="0">
-              <a:buNone/>
-            </a:pPr>
-            <a:r>
-              <a:rPr lang="en-US" sz="1350" dirty="0">
+              <a:lnSpc>
+                <a:spcPct val="105000"/>
+              </a:lnSpc>
+              <a:buNone/>
+            </a:pPr>
+            <a:r>
+              <a:rPr lang="en-US" sz="1300" dirty="0">
                 <a:solidFill>
                   <a:srgbClr val="6E6144"/>
                 </a:solidFill>
@@ -3072,15 +3072,15 @@
                 <a:ea typeface="Calibri" pitchFamily="34" charset="-122"/>
                 <a:cs typeface="Calibri" pitchFamily="34" charset="-120"/>
               </a:rPr>
-              <a:t>138 automated tests pass across sensors, fog, processor and dashboard.</a:t>
-            </a:r>
-            <a:endParaRPr lang="en-US" sz="1350" dirty="0"/>
-          </a:p>
-        </p:txBody>
-      </p:sp>
-      <p:sp>
-        <p:nvSpPr>
-          <p:cNvPr id="16" name="Text 14"/>
+              <a:t>The acoustic swarming-precursor rule flags a rising hum above 350 Hz before the weight even moves.</a:t>
+            </a:r>
+            <a:endParaRPr lang="en-US" sz="1300" dirty="0"/>
+          </a:p>
+        </p:txBody>
+      </p:sp>
+      <p:sp>
+        <p:nvSpPr>
+          <p:cNvPr id="19" name="Text 17"/>
           <p:cNvSpPr/>
           <p:nvPr/>
         </p:nvSpPr>
@@ -3157,24 +3157,24 @@
         </p:nvSpPr>
         <p:spPr>
           <a:xfrm>
-            <a:off x="640080" y="640080"/>
-            <a:ext cx="10972800" cy="640080"/>
-          </a:xfrm>
-          <a:prstGeom prst="rect">
-            <a:avLst/>
-          </a:prstGeom>
-          <a:noFill/>
-          <a:ln/>
-        </p:spPr>
-        <p:txBody>
-          <a:bodyPr wrap="square" rtlCol="0" anchor="ctr"/>
+            <a:off x="640080" y="594360"/>
+            <a:ext cx="10972800" cy="822960"/>
+          </a:xfrm>
+          <a:prstGeom prst="rect">
+            <a:avLst/>
+          </a:prstGeom>
+          <a:noFill/>
+          <a:ln/>
+        </p:spPr>
+        <p:txBody>
+          <a:bodyPr wrap="square" rtlCol="0" anchor="t"/>
           <a:lstStyle/>
           <a:p>
             <a:pPr indent="0" marL="0">
               <a:buNone/>
             </a:pPr>
             <a:r>
-              <a:rPr lang="en-US" sz="3000" b="1" dirty="0">
+              <a:rPr lang="en-US" sz="2800" b="1" dirty="0">
                 <a:solidFill>
                   <a:srgbClr val="FFFFFF"/>
                 </a:solidFill>
@@ -3184,7 +3184,7 @@
               </a:rPr>
               <a:t>Hardest Part — a verdict, not a jittery number</a:t>
             </a:r>
-            <a:endParaRPr lang="en-US" sz="3000" dirty="0"/>
+            <a:endParaRPr lang="en-US" sz="2800" dirty="0"/>
           </a:p>
         </p:txBody>
       </p:sp>
@@ -3196,12 +3196,12 @@
         </p:nvSpPr>
         <p:spPr>
           <a:xfrm>
-            <a:off x="731520" y="1920240"/>
-            <a:ext cx="10698480" cy="1965960"/>
+            <a:off x="731520" y="1874520"/>
+            <a:ext cx="5212080" cy="4160520"/>
           </a:xfrm>
           <a:prstGeom prst="roundRect">
             <a:avLst>
-              <a:gd name="adj" fmla="val 4651"/>
+              <a:gd name="adj" fmla="val 2198"/>
             </a:avLst>
           </a:prstGeom>
           <a:solidFill>
@@ -3223,7 +3223,7 @@
         </p:nvSpPr>
         <p:spPr>
           <a:xfrm>
-            <a:off x="1005840" y="2103120"/>
+            <a:off x="1051560" y="2103120"/>
             <a:ext cx="3657600" cy="457200"/>
           </a:xfrm>
           <a:prstGeom prst="rect">
@@ -3262,8 +3262,8 @@
         </p:nvSpPr>
         <p:spPr>
           <a:xfrm>
-            <a:off x="1005840" y="2578608"/>
-            <a:ext cx="9966960" cy="1188720"/>
+            <a:off x="1051560" y="2651760"/>
+            <a:ext cx="4572000" cy="3200400"/>
           </a:xfrm>
           <a:prstGeom prst="rect">
             <a:avLst/>
@@ -3277,12 +3277,12 @@
           <a:p>
             <a:pPr indent="0" marL="0">
               <a:lnSpc>
-                <a:spcPct val="105000"/>
+                <a:spcPct val="110000"/>
               </a:lnSpc>
               <a:buNone/>
             </a:pPr>
             <a:r>
-              <a:rPr lang="en-US" sz="1300" dirty="0">
+              <a:rPr lang="en-US" sz="1350" dirty="0">
                 <a:solidFill>
                   <a:srgbClr val="EBDCB6"/>
                 </a:solidFill>
@@ -3292,7 +3292,7 @@
               </a:rPr>
               <a:t>A beekeeper does not want five live graphs per hive; the useful answer is whether a colony is thriving, stressed, or about to swarm. But a single 10-second window is noisy — bees are loud and entrance traffic spikes — so a naive per-reading rule cries wolf, and one reading cannot tell a rising trend from a blip.</a:t>
             </a:r>
-            <a:endParaRPr lang="en-US" sz="1300" dirty="0"/>
+            <a:endParaRPr lang="en-US" sz="1350" dirty="0"/>
           </a:p>
         </p:txBody>
       </p:sp>
@@ -3304,12 +3304,12 @@
         </p:nvSpPr>
         <p:spPr>
           <a:xfrm>
-            <a:off x="731520" y="4041648"/>
-            <a:ext cx="10698480" cy="1965960"/>
+            <a:off x="6263640" y="1874520"/>
+            <a:ext cx="5212080" cy="4160520"/>
           </a:xfrm>
           <a:prstGeom prst="roundRect">
             <a:avLst>
-              <a:gd name="adj" fmla="val 4651"/>
+              <a:gd name="adj" fmla="val 2198"/>
             </a:avLst>
           </a:prstGeom>
           <a:solidFill>
@@ -3331,7 +3331,7 @@
         </p:nvSpPr>
         <p:spPr>
           <a:xfrm>
-            <a:off x="1005840" y="4224528"/>
+            <a:off x="6583680" y="2103120"/>
             <a:ext cx="3657600" cy="457200"/>
           </a:xfrm>
           <a:prstGeom prst="rect">
@@ -3370,8 +3370,8 @@
         </p:nvSpPr>
         <p:spPr>
           <a:xfrm>
-            <a:off x="1005840" y="4700016"/>
-            <a:ext cx="9966960" cy="1188720"/>
+            <a:off x="6583680" y="2651760"/>
+            <a:ext cx="4572000" cy="3200400"/>
           </a:xfrm>
           <a:prstGeom prst="rect">
             <a:avLst/>
@@ -3385,12 +3385,12 @@
           <a:p>
             <a:pPr indent="0" marL="0">
               <a:lnSpc>
-                <a:spcPct val="105000"/>
+                <a:spcPct val="110000"/>
               </a:lnSpc>
               <a:buNone/>
             </a:pPr>
             <a:r>
-              <a:rPr lang="en-US" sz="1300" dirty="0">
+              <a:rPr lang="en-US" sz="1350" dirty="0">
                 <a:solidFill>
                   <a:srgbClr val="EBDCB6"/>
                 </a:solidFill>
@@ -3400,7 +3400,7 @@
               </a:rPr>
               <a:t>Rules score the window mean or minimum, never a single sample; then the read tier reads a short history of recent windows and reduces it to a weight trend and a brood-thermal state, composed into one sentence per apiary. The judgement lives in the read tier, where that history is already at hand, so the dashboard says "weight rising, brood temperature has breached a safe threshold" rather than showing a number to interpret.</a:t>
             </a:r>
-            <a:endParaRPr lang="en-US" sz="1300" dirty="0"/>
+            <a:endParaRPr lang="en-US" sz="1350" dirty="0"/>
           </a:p>
         </p:txBody>
       </p:sp>

--- a/ppt/YashaswiniPenumarthi_X24262404_beehive-apiary-monitoring.pptx
+++ b/ppt/YashaswiniPenumarthi_X24262404_beehive-apiary-monitoring.pptx
@@ -3131,7 +3131,7 @@
     <p:bg>
       <p:bgPr>
         <a:solidFill>
-          <a:srgbClr val="2A2110"/>
+          <a:srgbClr val="FFFFFF"/>
         </a:solidFill>
       </p:bgPr>
     </p:bg>
@@ -3157,7 +3157,7 @@
         </p:nvSpPr>
         <p:spPr>
           <a:xfrm>
-            <a:off x="640080" y="594360"/>
+            <a:off x="640080" y="502920"/>
             <a:ext cx="10972800" cy="822960"/>
           </a:xfrm>
           <a:prstGeom prst="rect">
@@ -3176,7 +3176,7 @@
             <a:r>
               <a:rPr lang="en-US" sz="2800" b="1" dirty="0">
                 <a:solidFill>
-                  <a:srgbClr val="FFFFFF"/>
+                  <a:srgbClr val="281F0F"/>
                 </a:solidFill>
                 <a:latin typeface="Century Schoolbook" pitchFamily="34" charset="0"/>
                 <a:ea typeface="Century Schoolbook" pitchFamily="34" charset="-122"/>
@@ -3196,8 +3196,8 @@
         </p:nvSpPr>
         <p:spPr>
           <a:xfrm>
-            <a:off x="731520" y="1874520"/>
-            <a:ext cx="5212080" cy="4160520"/>
+            <a:off x="640080" y="1874520"/>
+            <a:ext cx="4937760" cy="4160520"/>
           </a:xfrm>
           <a:prstGeom prst="roundRect">
             <a:avLst>
@@ -3205,9 +3205,9 @@
             </a:avLst>
           </a:prstGeom>
           <a:solidFill>
-            <a:srgbClr val="3A2E16"/>
-          </a:solidFill>
-          <a:ln w="15875">
+            <a:srgbClr val="F7F2E3"/>
+          </a:solidFill>
+          <a:ln w="19050">
             <a:solidFill>
               <a:srgbClr val="E7C24A"/>
             </a:solidFill>
@@ -3223,7 +3223,7 @@
         </p:nvSpPr>
         <p:spPr>
           <a:xfrm>
-            <a:off x="1051560" y="2103120"/>
+            <a:off x="960120" y="2103120"/>
             <a:ext cx="3657600" cy="457200"/>
           </a:xfrm>
           <a:prstGeom prst="rect">
@@ -3262,8 +3262,8 @@
         </p:nvSpPr>
         <p:spPr>
           <a:xfrm>
-            <a:off x="1051560" y="2651760"/>
-            <a:ext cx="4572000" cy="3200400"/>
+            <a:off x="960120" y="2651760"/>
+            <a:ext cx="4343400" cy="3200400"/>
           </a:xfrm>
           <a:prstGeom prst="rect">
             <a:avLst/>
@@ -3277,14 +3277,14 @@
           <a:p>
             <a:pPr indent="0" marL="0">
               <a:lnSpc>
-                <a:spcPct val="110000"/>
+                <a:spcPct val="112000"/>
               </a:lnSpc>
               <a:buNone/>
             </a:pPr>
             <a:r>
               <a:rPr lang="en-US" sz="1350" dirty="0">
                 <a:solidFill>
-                  <a:srgbClr val="EBDCB6"/>
+                  <a:srgbClr val="281F0F"/>
                 </a:solidFill>
                 <a:latin typeface="Calibri" pitchFamily="34" charset="0"/>
                 <a:ea typeface="Calibri" pitchFamily="34" charset="-122"/>
@@ -3304,8 +3304,8 @@
         </p:nvSpPr>
         <p:spPr>
           <a:xfrm>
-            <a:off x="6263640" y="1874520"/>
-            <a:ext cx="5212080" cy="4160520"/>
+            <a:off x="6611112" y="1874520"/>
+            <a:ext cx="4937760" cy="4160520"/>
           </a:xfrm>
           <a:prstGeom prst="roundRect">
             <a:avLst>
@@ -3313,11 +3313,11 @@
             </a:avLst>
           </a:prstGeom>
           <a:solidFill>
-            <a:srgbClr val="3A2E16"/>
-          </a:solidFill>
-          <a:ln w="15875">
+            <a:srgbClr val="F7F2E3"/>
+          </a:solidFill>
+          <a:ln w="19050">
             <a:solidFill>
-              <a:srgbClr val="D8AE3E"/>
+              <a:srgbClr val="B98A1E"/>
             </a:solidFill>
             <a:prstDash val="solid"/>
           </a:ln>
@@ -3331,7 +3331,7 @@
         </p:nvSpPr>
         <p:spPr>
           <a:xfrm>
-            <a:off x="6583680" y="2103120"/>
+            <a:off x="6931152" y="2103120"/>
             <a:ext cx="3657600" cy="457200"/>
           </a:xfrm>
           <a:prstGeom prst="rect">
@@ -3350,7 +3350,7 @@
             <a:r>
               <a:rPr lang="en-US" sz="1900" b="1" dirty="0">
                 <a:solidFill>
-                  <a:srgbClr val="D8AE3E"/>
+                  <a:srgbClr val="B98A1E"/>
                 </a:solidFill>
                 <a:latin typeface="Century Schoolbook" pitchFamily="34" charset="0"/>
                 <a:ea typeface="Century Schoolbook" pitchFamily="34" charset="-122"/>
@@ -3370,8 +3370,8 @@
         </p:nvSpPr>
         <p:spPr>
           <a:xfrm>
-            <a:off x="6583680" y="2651760"/>
-            <a:ext cx="4572000" cy="3200400"/>
+            <a:off x="6931152" y="2651760"/>
+            <a:ext cx="4343400" cy="3200400"/>
           </a:xfrm>
           <a:prstGeom prst="rect">
             <a:avLst/>
@@ -3385,14 +3385,14 @@
           <a:p>
             <a:pPr indent="0" marL="0">
               <a:lnSpc>
-                <a:spcPct val="110000"/>
+                <a:spcPct val="112000"/>
               </a:lnSpc>
               <a:buNone/>
             </a:pPr>
             <a:r>
               <a:rPr lang="en-US" sz="1350" dirty="0">
                 <a:solidFill>
-                  <a:srgbClr val="EBDCB6"/>
+                  <a:srgbClr val="281F0F"/>
                 </a:solidFill>
                 <a:latin typeface="Calibri" pitchFamily="34" charset="0"/>
                 <a:ea typeface="Calibri" pitchFamily="34" charset="-122"/>
@@ -3403,6 +3403,26 @@
             <a:endParaRPr lang="en-US" sz="1350" dirty="0"/>
           </a:p>
         </p:txBody>
+      </p:sp>
+      <p:sp>
+        <p:nvSpPr>
+          <p:cNvPr id="9" name="Shape 7"/>
+          <p:cNvSpPr/>
+          <p:nvPr/>
+        </p:nvSpPr>
+        <p:spPr>
+          <a:xfrm>
+            <a:off x="5669280" y="3703320"/>
+            <a:ext cx="841248" cy="512064"/>
+          </a:xfrm>
+          <a:prstGeom prst="rightArrow">
+            <a:avLst/>
+          </a:prstGeom>
+          <a:solidFill>
+            <a:srgbClr val="8A6516"/>
+          </a:solidFill>
+          <a:ln/>
+        </p:spPr>
       </p:sp>
     </p:spTree>
   </p:cSld>

--- a/ppt/YashaswiniPenumarthi_X24262404_beehive-apiary-monitoring.pptx
+++ b/ppt/YashaswiniPenumarthi_X24262404_beehive-apiary-monitoring.pptx
@@ -1578,12 +1578,12 @@
         </p:nvSpPr>
         <p:spPr>
           <a:xfrm>
-            <a:off x="640080" y="1554480"/>
-            <a:ext cx="3200400" cy="3383280"/>
+            <a:off x="640080" y="1874520"/>
+            <a:ext cx="2286000" cy="1280160"/>
           </a:xfrm>
           <a:prstGeom prst="roundRect">
             <a:avLst>
-              <a:gd name="adj" fmla="val 2857"/>
+              <a:gd name="adj" fmla="val 7143"/>
             </a:avLst>
           </a:prstGeom>
           <a:solidFill>
@@ -1599,96 +1599,50 @@
       </p:sp>
       <p:sp>
         <p:nvSpPr>
-          <p:cNvPr id="4" name="Text 2"/>
-          <p:cNvSpPr/>
-          <p:nvPr/>
-        </p:nvSpPr>
-        <p:spPr>
-          <a:xfrm>
-            <a:off x="640080" y="1691640"/>
-            <a:ext cx="3200400" cy="365760"/>
-          </a:xfrm>
-          <a:prstGeom prst="rect">
-            <a:avLst/>
-          </a:prstGeom>
-          <a:noFill/>
-          <a:ln/>
-        </p:spPr>
-        <p:txBody>
-          <a:bodyPr wrap="square" rtlCol="0" anchor="ctr"/>
+          <p:cNvPr id="4" name="Shape 2"/>
+          <p:cNvSpPr/>
+          <p:nvPr/>
+        </p:nvSpPr>
+        <p:spPr>
+          <a:xfrm>
+            <a:off x="1691640" y="2039112"/>
+            <a:ext cx="182880" cy="182880"/>
+          </a:xfrm>
+          <a:prstGeom prst="ellipse">
+            <a:avLst/>
+          </a:prstGeom>
+          <a:solidFill>
+            <a:srgbClr val="D8AE3E"/>
+          </a:solidFill>
+          <a:ln/>
+        </p:spPr>
+      </p:sp>
+      <p:sp>
+        <p:nvSpPr>
+          <p:cNvPr id="5" name="Text 3"/>
+          <p:cNvSpPr/>
+          <p:nvPr/>
+        </p:nvSpPr>
+        <p:spPr>
+          <a:xfrm>
+            <a:off x="612648" y="2258568"/>
+            <a:ext cx="2340864" cy="365760"/>
+          </a:xfrm>
+          <a:prstGeom prst="rect">
+            <a:avLst/>
+          </a:prstGeom>
+          <a:noFill/>
+          <a:ln/>
+        </p:spPr>
+        <p:txBody>
+          <a:bodyPr wrap="square" lIns="0" tIns="0" rIns="0" bIns="0" rtlCol="0" anchor="ctr"/>
           <a:lstStyle/>
           <a:p>
             <a:pPr algn="ctr" indent="0" marL="0">
               <a:buNone/>
             </a:pPr>
             <a:r>
-              <a:rPr lang="en-US" sz="1200" b="1" spc="300" kern="0" dirty="0">
-                <a:solidFill>
-                  <a:srgbClr val="D8AE3E"/>
-                </a:solidFill>
-                <a:latin typeface="Calibri" pitchFamily="34" charset="0"/>
-                <a:ea typeface="Calibri" pitchFamily="34" charset="-122"/>
-                <a:cs typeface="Calibri" pitchFamily="34" charset="-120"/>
-              </a:rPr>
-              <a:t>EDGE</a:t>
-            </a:r>
-            <a:endParaRPr lang="en-US" sz="1200" dirty="0"/>
-          </a:p>
-        </p:txBody>
-      </p:sp>
-      <p:sp>
-        <p:nvSpPr>
-          <p:cNvPr id="5" name="Shape 3"/>
-          <p:cNvSpPr/>
-          <p:nvPr/>
-        </p:nvSpPr>
-        <p:spPr>
-          <a:xfrm>
-            <a:off x="914400" y="2286000"/>
-            <a:ext cx="2651760" cy="1005840"/>
-          </a:xfrm>
-          <a:prstGeom prst="roundRect">
-            <a:avLst>
-              <a:gd name="adj" fmla="val 7273"/>
-            </a:avLst>
-          </a:prstGeom>
-          <a:solidFill>
-            <a:srgbClr val="FFFFFF"/>
-          </a:solidFill>
-          <a:ln w="15240">
-            <a:solidFill>
-              <a:srgbClr val="D8AE3E"/>
-            </a:solidFill>
-            <a:prstDash val="solid"/>
-          </a:ln>
-        </p:spPr>
-      </p:sp>
-      <p:sp>
-        <p:nvSpPr>
-          <p:cNvPr id="6" name="Text 4"/>
-          <p:cNvSpPr/>
-          <p:nvPr/>
-        </p:nvSpPr>
-        <p:spPr>
-          <a:xfrm>
-            <a:off x="914400" y="2432304"/>
-            <a:ext cx="2651760" cy="365760"/>
-          </a:xfrm>
-          <a:prstGeom prst="rect">
-            <a:avLst/>
-          </a:prstGeom>
-          <a:noFill/>
-          <a:ln/>
-        </p:spPr>
-        <p:txBody>
-          <a:bodyPr wrap="square" lIns="0" tIns="0" rIns="0" bIns="0" rtlCol="0" anchor="ctr"/>
-          <a:lstStyle/>
-          <a:p>
-            <a:pPr algn="ctr" indent="0" marL="0">
-              <a:buNone/>
-            </a:pPr>
-            <a:r>
-              <a:rPr lang="en-US" sz="1400" b="1" dirty="0">
+              <a:rPr lang="en-US" sz="1450" b="1" dirty="0">
                 <a:solidFill>
                   <a:srgbClr val="281F0F"/>
                 </a:solidFill>
@@ -1698,36 +1652,36 @@
               </a:rPr>
               <a:t>Hive sensors</a:t>
             </a:r>
-            <a:endParaRPr lang="en-US" sz="1400" dirty="0"/>
-          </a:p>
-        </p:txBody>
-      </p:sp>
-      <p:sp>
-        <p:nvSpPr>
-          <p:cNvPr id="7" name="Text 5"/>
-          <p:cNvSpPr/>
-          <p:nvPr/>
-        </p:nvSpPr>
-        <p:spPr>
-          <a:xfrm>
-            <a:off x="914400" y="2816352"/>
-            <a:ext cx="2651760" cy="365760"/>
-          </a:xfrm>
-          <a:prstGeom prst="rect">
-            <a:avLst/>
-          </a:prstGeom>
-          <a:noFill/>
-          <a:ln/>
-        </p:spPr>
-        <p:txBody>
-          <a:bodyPr wrap="square" lIns="0" tIns="0" rIns="0" bIns="0" rtlCol="0" anchor="ctr"/>
+            <a:endParaRPr lang="en-US" sz="1450" dirty="0"/>
+          </a:p>
+        </p:txBody>
+      </p:sp>
+      <p:sp>
+        <p:nvSpPr>
+          <p:cNvPr id="6" name="Text 4"/>
+          <p:cNvSpPr/>
+          <p:nvPr/>
+        </p:nvSpPr>
+        <p:spPr>
+          <a:xfrm>
+            <a:off x="640080" y="2606040"/>
+            <a:ext cx="2286000" cy="411480"/>
+          </a:xfrm>
+          <a:prstGeom prst="rect">
+            <a:avLst/>
+          </a:prstGeom>
+          <a:noFill/>
+          <a:ln/>
+        </p:spPr>
+        <p:txBody>
+          <a:bodyPr wrap="square" lIns="0" tIns="0" rIns="0" bIns="0" rtlCol="0" anchor="t"/>
           <a:lstStyle/>
           <a:p>
             <a:pPr algn="ctr" indent="0" marL="0">
               <a:buNone/>
             </a:pPr>
             <a:r>
-              <a:rPr lang="en-US" sz="1000" dirty="0">
+              <a:rPr lang="en-US" sz="1050" dirty="0">
                 <a:solidFill>
                   <a:srgbClr val="6E6144"/>
                 </a:solidFill>
@@ -1737,9 +1691,34 @@
               </a:rPr>
               <a:t>10 · 2 apiaries</a:t>
             </a:r>
-            <a:endParaRPr lang="en-US" sz="1000" dirty="0"/>
-          </a:p>
-        </p:txBody>
+            <a:endParaRPr lang="en-US" sz="1050" dirty="0"/>
+          </a:p>
+        </p:txBody>
+      </p:sp>
+      <p:sp>
+        <p:nvSpPr>
+          <p:cNvPr id="7" name="Shape 5"/>
+          <p:cNvSpPr/>
+          <p:nvPr/>
+        </p:nvSpPr>
+        <p:spPr>
+          <a:xfrm>
+            <a:off x="2944368" y="2514600"/>
+            <a:ext cx="1975104" cy="0"/>
+          </a:xfrm>
+          <a:prstGeom prst="line">
+            <a:avLst/>
+          </a:prstGeom>
+          <a:noFill/>
+          <a:ln w="25400">
+            <a:solidFill>
+              <a:srgbClr val="D8AE3E"/>
+            </a:solidFill>
+            <a:prstDash val="solid"/>
+            <a:headEnd type="none"/>
+            <a:tailEnd type="triangle"/>
+          </a:ln>
+        </p:spPr>
       </p:sp>
       <p:sp>
         <p:nvSpPr>
@@ -1749,18 +1728,18 @@
         </p:nvSpPr>
         <p:spPr>
           <a:xfrm>
-            <a:off x="914400" y="3520440"/>
-            <a:ext cx="2651760" cy="1005840"/>
+            <a:off x="4937760" y="1874520"/>
+            <a:ext cx="2286000" cy="1280160"/>
           </a:xfrm>
           <a:prstGeom prst="roundRect">
             <a:avLst>
-              <a:gd name="adj" fmla="val 7273"/>
+              <a:gd name="adj" fmla="val 7143"/>
             </a:avLst>
           </a:prstGeom>
           <a:solidFill>
-            <a:srgbClr val="FFFFFF"/>
-          </a:solidFill>
-          <a:ln w="15240">
+            <a:srgbClr val="F7F2E3"/>
+          </a:solidFill>
+          <a:ln w="19050">
             <a:solidFill>
               <a:srgbClr val="D8AE3E"/>
             </a:solidFill>
@@ -1770,14 +1749,34 @@
       </p:sp>
       <p:sp>
         <p:nvSpPr>
-          <p:cNvPr id="9" name="Text 7"/>
-          <p:cNvSpPr/>
-          <p:nvPr/>
-        </p:nvSpPr>
-        <p:spPr>
-          <a:xfrm>
-            <a:off x="914400" y="3666744"/>
-            <a:ext cx="2651760" cy="365760"/>
+          <p:cNvPr id="9" name="Shape 7"/>
+          <p:cNvSpPr/>
+          <p:nvPr/>
+        </p:nvSpPr>
+        <p:spPr>
+          <a:xfrm>
+            <a:off x="5989320" y="2039112"/>
+            <a:ext cx="182880" cy="182880"/>
+          </a:xfrm>
+          <a:prstGeom prst="ellipse">
+            <a:avLst/>
+          </a:prstGeom>
+          <a:solidFill>
+            <a:srgbClr val="D8AE3E"/>
+          </a:solidFill>
+          <a:ln/>
+        </p:spPr>
+      </p:sp>
+      <p:sp>
+        <p:nvSpPr>
+          <p:cNvPr id="10" name="Text 8"/>
+          <p:cNvSpPr/>
+          <p:nvPr/>
+        </p:nvSpPr>
+        <p:spPr>
+          <a:xfrm>
+            <a:off x="4910328" y="2258568"/>
+            <a:ext cx="2340864" cy="365760"/>
           </a:xfrm>
           <a:prstGeom prst="rect">
             <a:avLst/>
@@ -1793,7 +1792,7 @@
               <a:buNone/>
             </a:pPr>
             <a:r>
-              <a:rPr lang="en-US" sz="1400" b="1" dirty="0">
+              <a:rPr lang="en-US" sz="1450" b="1" dirty="0">
                 <a:solidFill>
                   <a:srgbClr val="281F0F"/>
                 </a:solidFill>
@@ -1803,36 +1802,36 @@
               </a:rPr>
               <a:t>Fog node</a:t>
             </a:r>
-            <a:endParaRPr lang="en-US" sz="1400" dirty="0"/>
-          </a:p>
-        </p:txBody>
-      </p:sp>
-      <p:sp>
-        <p:nvSpPr>
-          <p:cNvPr id="10" name="Text 8"/>
-          <p:cNvSpPr/>
-          <p:nvPr/>
-        </p:nvSpPr>
-        <p:spPr>
-          <a:xfrm>
-            <a:off x="914400" y="4050792"/>
-            <a:ext cx="2651760" cy="365760"/>
-          </a:xfrm>
-          <a:prstGeom prst="rect">
-            <a:avLst/>
-          </a:prstGeom>
-          <a:noFill/>
-          <a:ln/>
-        </p:spPr>
-        <p:txBody>
-          <a:bodyPr wrap="square" lIns="0" tIns="0" rIns="0" bIns="0" rtlCol="0" anchor="ctr"/>
+            <a:endParaRPr lang="en-US" sz="1450" dirty="0"/>
+          </a:p>
+        </p:txBody>
+      </p:sp>
+      <p:sp>
+        <p:nvSpPr>
+          <p:cNvPr id="11" name="Text 9"/>
+          <p:cNvSpPr/>
+          <p:nvPr/>
+        </p:nvSpPr>
+        <p:spPr>
+          <a:xfrm>
+            <a:off x="4937760" y="2606040"/>
+            <a:ext cx="2286000" cy="411480"/>
+          </a:xfrm>
+          <a:prstGeom prst="rect">
+            <a:avLst/>
+          </a:prstGeom>
+          <a:noFill/>
+          <a:ln/>
+        </p:spPr>
+        <p:txBody>
+          <a:bodyPr wrap="square" lIns="0" tIns="0" rIns="0" bIns="0" rtlCol="0" anchor="t"/>
           <a:lstStyle/>
           <a:p>
             <a:pPr algn="ctr" indent="0" marL="0">
               <a:buNone/>
             </a:pPr>
             <a:r>
-              <a:rPr lang="en-US" sz="1000" dirty="0">
+              <a:rPr lang="en-US" sz="1050" dirty="0">
                 <a:solidFill>
                   <a:srgbClr val="6E6144"/>
                 </a:solidFill>
@@ -1842,48 +1841,49 @@
               </a:rPr>
               <a:t>10 s windows · colony rules</a:t>
             </a:r>
-            <a:endParaRPr lang="en-US" sz="1000" dirty="0"/>
-          </a:p>
-        </p:txBody>
-      </p:sp>
-      <p:sp>
-        <p:nvSpPr>
-          <p:cNvPr id="11" name="Shape 9"/>
-          <p:cNvSpPr/>
-          <p:nvPr/>
-        </p:nvSpPr>
-        <p:spPr>
-          <a:xfrm>
-            <a:off x="3886200" y="3246120"/>
-            <a:ext cx="502920" cy="0"/>
+            <a:endParaRPr lang="en-US" sz="1050" dirty="0"/>
+          </a:p>
+        </p:txBody>
+      </p:sp>
+      <p:sp>
+        <p:nvSpPr>
+          <p:cNvPr id="12" name="Shape 10"/>
+          <p:cNvSpPr/>
+          <p:nvPr/>
+        </p:nvSpPr>
+        <p:spPr>
+          <a:xfrm>
+            <a:off x="7242048" y="2514600"/>
+            <a:ext cx="1975104" cy="0"/>
           </a:xfrm>
           <a:prstGeom prst="line">
             <a:avLst/>
           </a:prstGeom>
           <a:noFill/>
-          <a:ln w="31750">
+          <a:ln w="25400">
             <a:solidFill>
-              <a:srgbClr val="8A6516"/>
+              <a:srgbClr val="D8AE3E"/>
             </a:solidFill>
             <a:prstDash val="solid"/>
+            <a:headEnd type="none"/>
             <a:tailEnd type="triangle"/>
           </a:ln>
         </p:spPr>
       </p:sp>
       <p:sp>
         <p:nvSpPr>
-          <p:cNvPr id="12" name="Shape 10"/>
-          <p:cNvSpPr/>
-          <p:nvPr/>
-        </p:nvSpPr>
-        <p:spPr>
-          <a:xfrm>
-            <a:off x="4572000" y="1554480"/>
-            <a:ext cx="6949440" cy="3383280"/>
+          <p:cNvPr id="13" name="Shape 11"/>
+          <p:cNvSpPr/>
+          <p:nvPr/>
+        </p:nvSpPr>
+        <p:spPr>
+          <a:xfrm>
+            <a:off x="9235440" y="1874520"/>
+            <a:ext cx="2286000" cy="1280160"/>
           </a:xfrm>
           <a:prstGeom prst="roundRect">
             <a:avLst>
-              <a:gd name="adj" fmla="val 2703"/>
+              <a:gd name="adj" fmla="val 7143"/>
             </a:avLst>
           </a:prstGeom>
           <a:solidFill>
@@ -1899,96 +1899,50 @@
       </p:sp>
       <p:sp>
         <p:nvSpPr>
-          <p:cNvPr id="13" name="Text 11"/>
-          <p:cNvSpPr/>
-          <p:nvPr/>
-        </p:nvSpPr>
-        <p:spPr>
-          <a:xfrm>
-            <a:off x="4572000" y="1691640"/>
-            <a:ext cx="6949440" cy="365760"/>
-          </a:xfrm>
-          <a:prstGeom prst="rect">
-            <a:avLst/>
-          </a:prstGeom>
-          <a:noFill/>
-          <a:ln/>
-        </p:spPr>
-        <p:txBody>
-          <a:bodyPr wrap="square" rtlCol="0" anchor="ctr"/>
+          <p:cNvPr id="14" name="Shape 12"/>
+          <p:cNvSpPr/>
+          <p:nvPr/>
+        </p:nvSpPr>
+        <p:spPr>
+          <a:xfrm>
+            <a:off x="10287000" y="2039112"/>
+            <a:ext cx="182880" cy="182880"/>
+          </a:xfrm>
+          <a:prstGeom prst="ellipse">
+            <a:avLst/>
+          </a:prstGeom>
+          <a:solidFill>
+            <a:srgbClr val="8A6516"/>
+          </a:solidFill>
+          <a:ln/>
+        </p:spPr>
+      </p:sp>
+      <p:sp>
+        <p:nvSpPr>
+          <p:cNvPr id="15" name="Text 13"/>
+          <p:cNvSpPr/>
+          <p:nvPr/>
+        </p:nvSpPr>
+        <p:spPr>
+          <a:xfrm>
+            <a:off x="9208008" y="2258568"/>
+            <a:ext cx="2340864" cy="365760"/>
+          </a:xfrm>
+          <a:prstGeom prst="rect">
+            <a:avLst/>
+          </a:prstGeom>
+          <a:noFill/>
+          <a:ln/>
+        </p:spPr>
+        <p:txBody>
+          <a:bodyPr wrap="square" lIns="0" tIns="0" rIns="0" bIns="0" rtlCol="0" anchor="ctr"/>
           <a:lstStyle/>
           <a:p>
             <a:pPr algn="ctr" indent="0" marL="0">
               <a:buNone/>
             </a:pPr>
             <a:r>
-              <a:rPr lang="en-US" sz="1200" b="1" spc="200" kern="0" dirty="0">
-                <a:solidFill>
-                  <a:srgbClr val="8A6516"/>
-                </a:solidFill>
-                <a:latin typeface="Calibri" pitchFamily="34" charset="0"/>
-                <a:ea typeface="Calibri" pitchFamily="34" charset="-122"/>
-                <a:cs typeface="Calibri" pitchFamily="34" charset="-120"/>
-              </a:rPr>
-              <a:t>CLOUD (serverless)</a:t>
-            </a:r>
-            <a:endParaRPr lang="en-US" sz="1200" dirty="0"/>
-          </a:p>
-        </p:txBody>
-      </p:sp>
-      <p:sp>
-        <p:nvSpPr>
-          <p:cNvPr id="14" name="Shape 12"/>
-          <p:cNvSpPr/>
-          <p:nvPr/>
-        </p:nvSpPr>
-        <p:spPr>
-          <a:xfrm>
-            <a:off x="4846320" y="2651760"/>
-            <a:ext cx="1463040" cy="1371600"/>
-          </a:xfrm>
-          <a:prstGeom prst="roundRect">
-            <a:avLst>
-              <a:gd name="adj" fmla="val 5333"/>
-            </a:avLst>
-          </a:prstGeom>
-          <a:solidFill>
-            <a:srgbClr val="FFFFFF"/>
-          </a:solidFill>
-          <a:ln w="15240">
-            <a:solidFill>
-              <a:srgbClr val="8A6516"/>
-            </a:solidFill>
-            <a:prstDash val="solid"/>
-          </a:ln>
-        </p:spPr>
-      </p:sp>
-      <p:sp>
-        <p:nvSpPr>
-          <p:cNvPr id="15" name="Text 13"/>
-          <p:cNvSpPr/>
-          <p:nvPr/>
-        </p:nvSpPr>
-        <p:spPr>
-          <a:xfrm>
-            <a:off x="4800600" y="2907792"/>
-            <a:ext cx="1554480" cy="457200"/>
-          </a:xfrm>
-          <a:prstGeom prst="rect">
-            <a:avLst/>
-          </a:prstGeom>
-          <a:noFill/>
-          <a:ln/>
-        </p:spPr>
-        <p:txBody>
-          <a:bodyPr wrap="square" lIns="0" tIns="0" rIns="0" bIns="0" rtlCol="0" anchor="ctr"/>
-          <a:lstStyle/>
-          <a:p>
-            <a:pPr algn="ctr" indent="0" marL="0">
-              <a:buNone/>
-            </a:pPr>
-            <a:r>
-              <a:rPr lang="en-US" sz="1250" b="1" dirty="0">
+              <a:rPr lang="en-US" sz="1450" b="1" dirty="0">
                 <a:solidFill>
                   <a:srgbClr val="281F0F"/>
                 </a:solidFill>
@@ -1998,7 +1952,7 @@
               </a:rPr>
               <a:t>Amazon SQS</a:t>
             </a:r>
-            <a:endParaRPr lang="en-US" sz="1250" dirty="0"/>
+            <a:endParaRPr lang="en-US" sz="1450" dirty="0"/>
           </a:p>
         </p:txBody>
       </p:sp>
@@ -2010,24 +1964,24 @@
         </p:nvSpPr>
         <p:spPr>
           <a:xfrm>
-            <a:off x="4828032" y="3401568"/>
-            <a:ext cx="1499616" cy="457200"/>
-          </a:xfrm>
-          <a:prstGeom prst="rect">
-            <a:avLst/>
-          </a:prstGeom>
-          <a:noFill/>
-          <a:ln/>
-        </p:spPr>
-        <p:txBody>
-          <a:bodyPr wrap="square" lIns="0" tIns="0" rIns="0" bIns="0" rtlCol="0" anchor="ctr"/>
+            <a:off x="9235440" y="2606040"/>
+            <a:ext cx="2286000" cy="411480"/>
+          </a:xfrm>
+          <a:prstGeom prst="rect">
+            <a:avLst/>
+          </a:prstGeom>
+          <a:noFill/>
+          <a:ln/>
+        </p:spPr>
+        <p:txBody>
+          <a:bodyPr wrap="square" lIns="0" tIns="0" rIns="0" bIns="0" rtlCol="0" anchor="t"/>
           <a:lstStyle/>
           <a:p>
             <a:pPr algn="ctr" indent="0" marL="0">
               <a:buNone/>
             </a:pPr>
             <a:r>
-              <a:rPr lang="en-US" sz="900" dirty="0">
+              <a:rPr lang="en-US" sz="1050" dirty="0">
                 <a:solidFill>
                   <a:srgbClr val="6E6144"/>
                 </a:solidFill>
@@ -2037,7 +1991,7 @@
               </a:rPr>
               <a:t>1 summary / window</a:t>
             </a:r>
-            <a:endParaRPr lang="en-US" sz="900" dirty="0"/>
+            <a:endParaRPr lang="en-US" sz="1050" dirty="0"/>
           </a:p>
         </p:txBody>
       </p:sp>
@@ -2049,42 +2003,18 @@
         </p:nvSpPr>
         <p:spPr>
           <a:xfrm>
-            <a:off x="6318504" y="3337560"/>
-            <a:ext cx="164592" cy="0"/>
-          </a:xfrm>
-          <a:prstGeom prst="line">
-            <a:avLst/>
-          </a:prstGeom>
-          <a:noFill/>
-          <a:ln w="20320">
-            <a:solidFill>
-              <a:srgbClr val="D8AE3E"/>
-            </a:solidFill>
-            <a:prstDash val="solid"/>
-            <a:tailEnd type="triangle"/>
-          </a:ln>
-        </p:spPr>
-      </p:sp>
-      <p:sp>
-        <p:nvSpPr>
-          <p:cNvPr id="18" name="Shape 16"/>
-          <p:cNvSpPr/>
-          <p:nvPr/>
-        </p:nvSpPr>
-        <p:spPr>
-          <a:xfrm>
-            <a:off x="6492240" y="2651760"/>
-            <a:ext cx="1463040" cy="1371600"/>
+            <a:off x="9235440" y="3520440"/>
+            <a:ext cx="2286000" cy="1280160"/>
           </a:xfrm>
           <a:prstGeom prst="roundRect">
             <a:avLst>
-              <a:gd name="adj" fmla="val 5333"/>
+              <a:gd name="adj" fmla="val 7143"/>
             </a:avLst>
           </a:prstGeom>
           <a:solidFill>
-            <a:srgbClr val="FFFFFF"/>
-          </a:solidFill>
-          <a:ln w="15240">
+            <a:srgbClr val="F7F2E3"/>
+          </a:solidFill>
+          <a:ln w="19050">
             <a:solidFill>
               <a:srgbClr val="8A6516"/>
             </a:solidFill>
@@ -2094,14 +2024,34 @@
       </p:sp>
       <p:sp>
         <p:nvSpPr>
+          <p:cNvPr id="18" name="Shape 16"/>
+          <p:cNvSpPr/>
+          <p:nvPr/>
+        </p:nvSpPr>
+        <p:spPr>
+          <a:xfrm>
+            <a:off x="10287000" y="3685032"/>
+            <a:ext cx="182880" cy="182880"/>
+          </a:xfrm>
+          <a:prstGeom prst="ellipse">
+            <a:avLst/>
+          </a:prstGeom>
+          <a:solidFill>
+            <a:srgbClr val="8A6516"/>
+          </a:solidFill>
+          <a:ln/>
+        </p:spPr>
+      </p:sp>
+      <p:sp>
+        <p:nvSpPr>
           <p:cNvPr id="19" name="Text 17"/>
           <p:cNvSpPr/>
           <p:nvPr/>
         </p:nvSpPr>
         <p:spPr>
           <a:xfrm>
-            <a:off x="6446520" y="2907792"/>
-            <a:ext cx="1554480" cy="457200"/>
+            <a:off x="9208008" y="3904488"/>
+            <a:ext cx="2340864" cy="365760"/>
           </a:xfrm>
           <a:prstGeom prst="rect">
             <a:avLst/>
@@ -2117,7 +2067,7 @@
               <a:buNone/>
             </a:pPr>
             <a:r>
-              <a:rPr lang="en-US" sz="1250" b="1" dirty="0">
+              <a:rPr lang="en-US" sz="1450" b="1" dirty="0">
                 <a:solidFill>
                   <a:srgbClr val="281F0F"/>
                 </a:solidFill>
@@ -2127,7 +2077,7 @@
               </a:rPr>
               <a:t>AWS Lambda</a:t>
             </a:r>
-            <a:endParaRPr lang="en-US" sz="1250" dirty="0"/>
+            <a:endParaRPr lang="en-US" sz="1450" dirty="0"/>
           </a:p>
         </p:txBody>
       </p:sp>
@@ -2139,24 +2089,24 @@
         </p:nvSpPr>
         <p:spPr>
           <a:xfrm>
-            <a:off x="6473952" y="3401568"/>
-            <a:ext cx="1499616" cy="457200"/>
-          </a:xfrm>
-          <a:prstGeom prst="rect">
-            <a:avLst/>
-          </a:prstGeom>
-          <a:noFill/>
-          <a:ln/>
-        </p:spPr>
-        <p:txBody>
-          <a:bodyPr wrap="square" lIns="0" tIns="0" rIns="0" bIns="0" rtlCol="0" anchor="ctr"/>
+            <a:off x="9235440" y="4251960"/>
+            <a:ext cx="2286000" cy="411480"/>
+          </a:xfrm>
+          <a:prstGeom prst="rect">
+            <a:avLst/>
+          </a:prstGeom>
+          <a:noFill/>
+          <a:ln/>
+        </p:spPr>
+        <p:txBody>
+          <a:bodyPr wrap="square" lIns="0" tIns="0" rIns="0" bIns="0" rtlCol="0" anchor="t"/>
           <a:lstStyle/>
           <a:p>
             <a:pPr algn="ctr" indent="0" marL="0">
               <a:buNone/>
             </a:pPr>
             <a:r>
-              <a:rPr lang="en-US" sz="900" dirty="0">
+              <a:rPr lang="en-US" sz="1050" dirty="0">
                 <a:solidFill>
                   <a:srgbClr val="6E6144"/>
                 </a:solidFill>
@@ -2166,7 +2116,7 @@
               </a:rPr>
               <a:t>nodejs20 ingest</a:t>
             </a:r>
-            <a:endParaRPr lang="en-US" sz="900" dirty="0"/>
+            <a:endParaRPr lang="en-US" sz="1050" dirty="0"/>
           </a:p>
         </p:txBody>
       </p:sp>
@@ -2178,19 +2128,20 @@
         </p:nvSpPr>
         <p:spPr>
           <a:xfrm>
-            <a:off x="7964424" y="3337560"/>
-            <a:ext cx="164592" cy="0"/>
+            <a:off x="7242048" y="4160520"/>
+            <a:ext cx="1975104" cy="0"/>
           </a:xfrm>
           <a:prstGeom prst="line">
             <a:avLst/>
           </a:prstGeom>
           <a:noFill/>
-          <a:ln w="20320">
+          <a:ln w="25400">
             <a:solidFill>
               <a:srgbClr val="D8AE3E"/>
             </a:solidFill>
             <a:prstDash val="solid"/>
-            <a:tailEnd type="triangle"/>
+            <a:headEnd type="triangle"/>
+            <a:tailEnd type="oval"/>
           </a:ln>
         </p:spPr>
       </p:sp>
@@ -2202,18 +2153,18 @@
         </p:nvSpPr>
         <p:spPr>
           <a:xfrm>
-            <a:off x="8138160" y="2651760"/>
-            <a:ext cx="1463040" cy="1371600"/>
+            <a:off x="4937760" y="3520440"/>
+            <a:ext cx="2286000" cy="1280160"/>
           </a:xfrm>
           <a:prstGeom prst="roundRect">
             <a:avLst>
-              <a:gd name="adj" fmla="val 5333"/>
+              <a:gd name="adj" fmla="val 7143"/>
             </a:avLst>
           </a:prstGeom>
           <a:solidFill>
-            <a:srgbClr val="FFFFFF"/>
-          </a:solidFill>
-          <a:ln w="15240">
+            <a:srgbClr val="F7F2E3"/>
+          </a:solidFill>
+          <a:ln w="19050">
             <a:solidFill>
               <a:srgbClr val="8A6516"/>
             </a:solidFill>
@@ -2223,14 +2174,34 @@
       </p:sp>
       <p:sp>
         <p:nvSpPr>
-          <p:cNvPr id="23" name="Text 21"/>
-          <p:cNvSpPr/>
-          <p:nvPr/>
-        </p:nvSpPr>
-        <p:spPr>
-          <a:xfrm>
-            <a:off x="8092440" y="2907792"/>
-            <a:ext cx="1554480" cy="457200"/>
+          <p:cNvPr id="23" name="Shape 21"/>
+          <p:cNvSpPr/>
+          <p:nvPr/>
+        </p:nvSpPr>
+        <p:spPr>
+          <a:xfrm>
+            <a:off x="5989320" y="3685032"/>
+            <a:ext cx="182880" cy="182880"/>
+          </a:xfrm>
+          <a:prstGeom prst="ellipse">
+            <a:avLst/>
+          </a:prstGeom>
+          <a:solidFill>
+            <a:srgbClr val="8A6516"/>
+          </a:solidFill>
+          <a:ln/>
+        </p:spPr>
+      </p:sp>
+      <p:sp>
+        <p:nvSpPr>
+          <p:cNvPr id="24" name="Text 22"/>
+          <p:cNvSpPr/>
+          <p:nvPr/>
+        </p:nvSpPr>
+        <p:spPr>
+          <a:xfrm>
+            <a:off x="4910328" y="3904488"/>
+            <a:ext cx="2340864" cy="365760"/>
           </a:xfrm>
           <a:prstGeom prst="rect">
             <a:avLst/>
@@ -2246,7 +2217,7 @@
               <a:buNone/>
             </a:pPr>
             <a:r>
-              <a:rPr lang="en-US" sz="1250" b="1" dirty="0">
+              <a:rPr lang="en-US" sz="1450" b="1" dirty="0">
                 <a:solidFill>
                   <a:srgbClr val="281F0F"/>
                 </a:solidFill>
@@ -2256,36 +2227,36 @@
               </a:rPr>
               <a:t>DynamoDB</a:t>
             </a:r>
-            <a:endParaRPr lang="en-US" sz="1250" dirty="0"/>
-          </a:p>
-        </p:txBody>
-      </p:sp>
-      <p:sp>
-        <p:nvSpPr>
-          <p:cNvPr id="24" name="Text 22"/>
-          <p:cNvSpPr/>
-          <p:nvPr/>
-        </p:nvSpPr>
-        <p:spPr>
-          <a:xfrm>
-            <a:off x="8119872" y="3401568"/>
-            <a:ext cx="1499616" cy="457200"/>
-          </a:xfrm>
-          <a:prstGeom prst="rect">
-            <a:avLst/>
-          </a:prstGeom>
-          <a:noFill/>
-          <a:ln/>
-        </p:spPr>
-        <p:txBody>
-          <a:bodyPr wrap="square" lIns="0" tIns="0" rIns="0" bIns="0" rtlCol="0" anchor="ctr"/>
+            <a:endParaRPr lang="en-US" sz="1450" dirty="0"/>
+          </a:p>
+        </p:txBody>
+      </p:sp>
+      <p:sp>
+        <p:nvSpPr>
+          <p:cNvPr id="25" name="Text 23"/>
+          <p:cNvSpPr/>
+          <p:nvPr/>
+        </p:nvSpPr>
+        <p:spPr>
+          <a:xfrm>
+            <a:off x="4937760" y="4251960"/>
+            <a:ext cx="2286000" cy="411480"/>
+          </a:xfrm>
+          <a:prstGeom prst="rect">
+            <a:avLst/>
+          </a:prstGeom>
+          <a:noFill/>
+          <a:ln/>
+        </p:spPr>
+        <p:txBody>
+          <a:bodyPr wrap="square" lIns="0" tIns="0" rIns="0" bIns="0" rtlCol="0" anchor="t"/>
           <a:lstStyle/>
           <a:p>
             <a:pPr algn="ctr" indent="0" marL="0">
               <a:buNone/>
             </a:pPr>
             <a:r>
-              <a:rPr lang="en-US" sz="900" dirty="0">
+              <a:rPr lang="en-US" sz="1050" dirty="0">
                 <a:solidFill>
                   <a:srgbClr val="6E6144"/>
                 </a:solidFill>
@@ -2295,54 +2266,55 @@
               </a:rPr>
               <a:t>time-series store</a:t>
             </a:r>
-            <a:endParaRPr lang="en-US" sz="900" dirty="0"/>
-          </a:p>
-        </p:txBody>
-      </p:sp>
-      <p:sp>
-        <p:nvSpPr>
-          <p:cNvPr id="25" name="Shape 23"/>
-          <p:cNvSpPr/>
-          <p:nvPr/>
-        </p:nvSpPr>
-        <p:spPr>
-          <a:xfrm>
-            <a:off x="9610344" y="3337560"/>
-            <a:ext cx="164592" cy="0"/>
+            <a:endParaRPr lang="en-US" sz="1050" dirty="0"/>
+          </a:p>
+        </p:txBody>
+      </p:sp>
+      <p:sp>
+        <p:nvSpPr>
+          <p:cNvPr id="26" name="Shape 24"/>
+          <p:cNvSpPr/>
+          <p:nvPr/>
+        </p:nvSpPr>
+        <p:spPr>
+          <a:xfrm>
+            <a:off x="2944368" y="4160520"/>
+            <a:ext cx="1975104" cy="0"/>
           </a:xfrm>
           <a:prstGeom prst="line">
             <a:avLst/>
           </a:prstGeom>
           <a:noFill/>
-          <a:ln w="20320">
+          <a:ln w="25400">
             <a:solidFill>
               <a:srgbClr val="D8AE3E"/>
             </a:solidFill>
             <a:prstDash val="solid"/>
-            <a:tailEnd type="triangle"/>
+            <a:headEnd type="triangle"/>
+            <a:tailEnd type="oval"/>
           </a:ln>
         </p:spPr>
       </p:sp>
       <p:sp>
         <p:nvSpPr>
-          <p:cNvPr id="26" name="Shape 24"/>
-          <p:cNvSpPr/>
-          <p:nvPr/>
-        </p:nvSpPr>
-        <p:spPr>
-          <a:xfrm>
-            <a:off x="9784080" y="2651760"/>
-            <a:ext cx="1463040" cy="1371600"/>
+          <p:cNvPr id="27" name="Shape 25"/>
+          <p:cNvSpPr/>
+          <p:nvPr/>
+        </p:nvSpPr>
+        <p:spPr>
+          <a:xfrm>
+            <a:off x="640080" y="3520440"/>
+            <a:ext cx="2286000" cy="1280160"/>
           </a:xfrm>
           <a:prstGeom prst="roundRect">
             <a:avLst>
-              <a:gd name="adj" fmla="val 5333"/>
+              <a:gd name="adj" fmla="val 7143"/>
             </a:avLst>
           </a:prstGeom>
           <a:solidFill>
-            <a:srgbClr val="FFFFFF"/>
-          </a:solidFill>
-          <a:ln w="15240">
+            <a:srgbClr val="F7F2E3"/>
+          </a:solidFill>
+          <a:ln w="19050">
             <a:solidFill>
               <a:srgbClr val="B98A1E"/>
             </a:solidFill>
@@ -2352,14 +2324,34 @@
       </p:sp>
       <p:sp>
         <p:nvSpPr>
-          <p:cNvPr id="27" name="Text 25"/>
-          <p:cNvSpPr/>
-          <p:nvPr/>
-        </p:nvSpPr>
-        <p:spPr>
-          <a:xfrm>
-            <a:off x="9738360" y="2907792"/>
-            <a:ext cx="1554480" cy="457200"/>
+          <p:cNvPr id="28" name="Shape 26"/>
+          <p:cNvSpPr/>
+          <p:nvPr/>
+        </p:nvSpPr>
+        <p:spPr>
+          <a:xfrm>
+            <a:off x="1691640" y="3685032"/>
+            <a:ext cx="182880" cy="182880"/>
+          </a:xfrm>
+          <a:prstGeom prst="ellipse">
+            <a:avLst/>
+          </a:prstGeom>
+          <a:solidFill>
+            <a:srgbClr val="B98A1E"/>
+          </a:solidFill>
+          <a:ln/>
+        </p:spPr>
+      </p:sp>
+      <p:sp>
+        <p:nvSpPr>
+          <p:cNvPr id="29" name="Text 27"/>
+          <p:cNvSpPr/>
+          <p:nvPr/>
+        </p:nvSpPr>
+        <p:spPr>
+          <a:xfrm>
+            <a:off x="612648" y="3904488"/>
+            <a:ext cx="2340864" cy="365760"/>
           </a:xfrm>
           <a:prstGeom prst="rect">
             <a:avLst/>
@@ -2375,7 +2367,7 @@
               <a:buNone/>
             </a:pPr>
             <a:r>
-              <a:rPr lang="en-US" sz="1250" b="1" dirty="0">
+              <a:rPr lang="en-US" sz="1450" b="1" dirty="0">
                 <a:solidFill>
                   <a:srgbClr val="281F0F"/>
                 </a:solidFill>
@@ -2385,36 +2377,36 @@
               </a:rPr>
               <a:t>API GW + S3</a:t>
             </a:r>
-            <a:endParaRPr lang="en-US" sz="1250" dirty="0"/>
-          </a:p>
-        </p:txBody>
-      </p:sp>
-      <p:sp>
-        <p:nvSpPr>
-          <p:cNvPr id="28" name="Text 26"/>
-          <p:cNvSpPr/>
-          <p:nvPr/>
-        </p:nvSpPr>
-        <p:spPr>
-          <a:xfrm>
-            <a:off x="9765792" y="3401568"/>
-            <a:ext cx="1499616" cy="457200"/>
-          </a:xfrm>
-          <a:prstGeom prst="rect">
-            <a:avLst/>
-          </a:prstGeom>
-          <a:noFill/>
-          <a:ln/>
-        </p:spPr>
-        <p:txBody>
-          <a:bodyPr wrap="square" lIns="0" tIns="0" rIns="0" bIns="0" rtlCol="0" anchor="ctr"/>
+            <a:endParaRPr lang="en-US" sz="1450" dirty="0"/>
+          </a:p>
+        </p:txBody>
+      </p:sp>
+      <p:sp>
+        <p:nvSpPr>
+          <p:cNvPr id="30" name="Text 28"/>
+          <p:cNvSpPr/>
+          <p:nvPr/>
+        </p:nvSpPr>
+        <p:spPr>
+          <a:xfrm>
+            <a:off x="640080" y="4251960"/>
+            <a:ext cx="2286000" cy="411480"/>
+          </a:xfrm>
+          <a:prstGeom prst="rect">
+            <a:avLst/>
+          </a:prstGeom>
+          <a:noFill/>
+          <a:ln/>
+        </p:spPr>
+        <p:txBody>
+          <a:bodyPr wrap="square" lIns="0" tIns="0" rIns="0" bIns="0" rtlCol="0" anchor="t"/>
           <a:lstStyle/>
           <a:p>
             <a:pPr algn="ctr" indent="0" marL="0">
               <a:buNone/>
             </a:pPr>
             <a:r>
-              <a:rPr lang="en-US" sz="900" dirty="0">
+              <a:rPr lang="en-US" sz="1050" dirty="0">
                 <a:solidFill>
                   <a:srgbClr val="6E6144"/>
                 </a:solidFill>
@@ -2424,13 +2416,37 @@
               </a:rPr>
               <a:t>colony verdict cards</a:t>
             </a:r>
-            <a:endParaRPr lang="en-US" sz="900" dirty="0"/>
-          </a:p>
-        </p:txBody>
-      </p:sp>
-      <p:sp>
-        <p:nvSpPr>
-          <p:cNvPr id="29" name="Text 27"/>
+            <a:endParaRPr lang="en-US" sz="1050" dirty="0"/>
+          </a:p>
+        </p:txBody>
+      </p:sp>
+      <p:sp>
+        <p:nvSpPr>
+          <p:cNvPr id="31" name="Shape 29"/>
+          <p:cNvSpPr/>
+          <p:nvPr/>
+        </p:nvSpPr>
+        <p:spPr>
+          <a:xfrm>
+            <a:off x="10378440" y="3154680"/>
+            <a:ext cx="0" cy="365760"/>
+          </a:xfrm>
+          <a:prstGeom prst="line">
+            <a:avLst/>
+          </a:prstGeom>
+          <a:noFill/>
+          <a:ln w="25400">
+            <a:solidFill>
+              <a:srgbClr val="D8AE3E"/>
+            </a:solidFill>
+            <a:prstDash val="solid"/>
+            <a:tailEnd type="triangle"/>
+          </a:ln>
+        </p:spPr>
+      </p:sp>
+      <p:sp>
+        <p:nvSpPr>
+          <p:cNvPr id="32" name="Text 30"/>
           <p:cNvSpPr/>
           <p:nvPr/>
         </p:nvSpPr>
@@ -3190,41 +3206,14 @@
       </p:sp>
       <p:sp>
         <p:nvSpPr>
-          <p:cNvPr id="3" name="Shape 1"/>
-          <p:cNvSpPr/>
-          <p:nvPr/>
-        </p:nvSpPr>
-        <p:spPr>
-          <a:xfrm>
-            <a:off x="640080" y="1874520"/>
-            <a:ext cx="4937760" cy="4160520"/>
-          </a:xfrm>
-          <a:prstGeom prst="roundRect">
-            <a:avLst>
-              <a:gd name="adj" fmla="val 2198"/>
-            </a:avLst>
-          </a:prstGeom>
-          <a:solidFill>
-            <a:srgbClr val="F7F2E3"/>
-          </a:solidFill>
-          <a:ln w="19050">
-            <a:solidFill>
-              <a:srgbClr val="E7C24A"/>
-            </a:solidFill>
-            <a:prstDash val="solid"/>
-          </a:ln>
-        </p:spPr>
-      </p:sp>
-      <p:sp>
-        <p:nvSpPr>
-          <p:cNvPr id="4" name="Text 2"/>
-          <p:cNvSpPr/>
-          <p:nvPr/>
-        </p:nvSpPr>
-        <p:spPr>
-          <a:xfrm>
-            <a:off x="960120" y="2103120"/>
-            <a:ext cx="3657600" cy="457200"/>
+          <p:cNvPr id="3" name="Text 1"/>
+          <p:cNvSpPr/>
+          <p:nvPr/>
+        </p:nvSpPr>
+        <p:spPr>
+          <a:xfrm>
+            <a:off x="731520" y="1965960"/>
+            <a:ext cx="2377440" cy="548640"/>
           </a:xfrm>
           <a:prstGeom prst="rect">
             <a:avLst/>
@@ -3240,7 +3229,7 @@
               <a:buNone/>
             </a:pPr>
             <a:r>
-              <a:rPr lang="en-US" sz="1900" b="1" dirty="0">
+              <a:rPr lang="en-US" sz="2300" b="1" dirty="0">
                 <a:solidFill>
                   <a:srgbClr val="E7C24A"/>
                 </a:solidFill>
@@ -3250,9 +3239,32 @@
               </a:rPr>
               <a:t>Problem</a:t>
             </a:r>
-            <a:endParaRPr lang="en-US" sz="1900" dirty="0"/>
-          </a:p>
-        </p:txBody>
+            <a:endParaRPr lang="en-US" sz="2300" dirty="0"/>
+          </a:p>
+        </p:txBody>
+      </p:sp>
+      <p:sp>
+        <p:nvSpPr>
+          <p:cNvPr id="4" name="Shape 2"/>
+          <p:cNvSpPr/>
+          <p:nvPr/>
+        </p:nvSpPr>
+        <p:spPr>
+          <a:xfrm>
+            <a:off x="3200400" y="1920240"/>
+            <a:ext cx="0" cy="1783080"/>
+          </a:xfrm>
+          <a:prstGeom prst="line">
+            <a:avLst/>
+          </a:prstGeom>
+          <a:noFill/>
+          <a:ln w="31750">
+            <a:solidFill>
+              <a:srgbClr val="E7C24A"/>
+            </a:solidFill>
+            <a:prstDash val="solid"/>
+          </a:ln>
+        </p:spPr>
       </p:sp>
       <p:sp>
         <p:nvSpPr>
@@ -3262,8 +3274,8 @@
         </p:nvSpPr>
         <p:spPr>
           <a:xfrm>
-            <a:off x="960120" y="2651760"/>
-            <a:ext cx="4343400" cy="3200400"/>
+            <a:off x="3474720" y="1920240"/>
+            <a:ext cx="7955280" cy="1920240"/>
           </a:xfrm>
           <a:prstGeom prst="rect">
             <a:avLst/>
@@ -3282,7 +3294,7 @@
               <a:buNone/>
             </a:pPr>
             <a:r>
-              <a:rPr lang="en-US" sz="1350" dirty="0">
+              <a:rPr lang="en-US" sz="1450" dirty="0">
                 <a:solidFill>
                   <a:srgbClr val="281F0F"/>
                 </a:solidFill>
@@ -3292,47 +3304,20 @@
               </a:rPr>
               <a:t>A beekeeper does not want five live graphs per hive; the useful answer is whether a colony is thriving, stressed, or about to swarm. But a single 10-second window is noisy — bees are loud and entrance traffic spikes — so a naive per-reading rule cries wolf, and one reading cannot tell a rising trend from a blip.</a:t>
             </a:r>
-            <a:endParaRPr lang="en-US" sz="1350" dirty="0"/>
-          </a:p>
-        </p:txBody>
-      </p:sp>
-      <p:sp>
-        <p:nvSpPr>
-          <p:cNvPr id="6" name="Shape 4"/>
-          <p:cNvSpPr/>
-          <p:nvPr/>
-        </p:nvSpPr>
-        <p:spPr>
-          <a:xfrm>
-            <a:off x="6611112" y="1874520"/>
-            <a:ext cx="4937760" cy="4160520"/>
-          </a:xfrm>
-          <a:prstGeom prst="roundRect">
-            <a:avLst>
-              <a:gd name="adj" fmla="val 2198"/>
-            </a:avLst>
-          </a:prstGeom>
-          <a:solidFill>
-            <a:srgbClr val="F7F2E3"/>
-          </a:solidFill>
-          <a:ln w="19050">
-            <a:solidFill>
-              <a:srgbClr val="B98A1E"/>
-            </a:solidFill>
-            <a:prstDash val="solid"/>
-          </a:ln>
-        </p:spPr>
-      </p:sp>
-      <p:sp>
-        <p:nvSpPr>
-          <p:cNvPr id="7" name="Text 5"/>
-          <p:cNvSpPr/>
-          <p:nvPr/>
-        </p:nvSpPr>
-        <p:spPr>
-          <a:xfrm>
-            <a:off x="6931152" y="2103120"/>
-            <a:ext cx="3657600" cy="457200"/>
+            <a:endParaRPr lang="en-US" sz="1450" dirty="0"/>
+          </a:p>
+        </p:txBody>
+      </p:sp>
+      <p:sp>
+        <p:nvSpPr>
+          <p:cNvPr id="6" name="Text 4"/>
+          <p:cNvSpPr/>
+          <p:nvPr/>
+        </p:nvSpPr>
+        <p:spPr>
+          <a:xfrm>
+            <a:off x="731520" y="4114800"/>
+            <a:ext cx="2377440" cy="548640"/>
           </a:xfrm>
           <a:prstGeom prst="rect">
             <a:avLst/>
@@ -3348,7 +3333,7 @@
               <a:buNone/>
             </a:pPr>
             <a:r>
-              <a:rPr lang="en-US" sz="1900" b="1" dirty="0">
+              <a:rPr lang="en-US" sz="2300" b="1" dirty="0">
                 <a:solidFill>
                   <a:srgbClr val="B98A1E"/>
                 </a:solidFill>
@@ -3358,9 +3343,32 @@
               </a:rPr>
               <a:t>Solution</a:t>
             </a:r>
-            <a:endParaRPr lang="en-US" sz="1900" dirty="0"/>
-          </a:p>
-        </p:txBody>
+            <a:endParaRPr lang="en-US" sz="2300" dirty="0"/>
+          </a:p>
+        </p:txBody>
+      </p:sp>
+      <p:sp>
+        <p:nvSpPr>
+          <p:cNvPr id="7" name="Shape 5"/>
+          <p:cNvSpPr/>
+          <p:nvPr/>
+        </p:nvSpPr>
+        <p:spPr>
+          <a:xfrm>
+            <a:off x="3200400" y="4069080"/>
+            <a:ext cx="0" cy="1783080"/>
+          </a:xfrm>
+          <a:prstGeom prst="line">
+            <a:avLst/>
+          </a:prstGeom>
+          <a:noFill/>
+          <a:ln w="31750">
+            <a:solidFill>
+              <a:srgbClr val="B98A1E"/>
+            </a:solidFill>
+            <a:prstDash val="solid"/>
+          </a:ln>
+        </p:spPr>
       </p:sp>
       <p:sp>
         <p:nvSpPr>
@@ -3370,8 +3378,8 @@
         </p:nvSpPr>
         <p:spPr>
           <a:xfrm>
-            <a:off x="6931152" y="2651760"/>
-            <a:ext cx="4343400" cy="3200400"/>
+            <a:off x="3474720" y="4069080"/>
+            <a:ext cx="7955280" cy="1920240"/>
           </a:xfrm>
           <a:prstGeom prst="rect">
             <a:avLst/>
@@ -3390,7 +3398,7 @@
               <a:buNone/>
             </a:pPr>
             <a:r>
-              <a:rPr lang="en-US" sz="1350" dirty="0">
+              <a:rPr lang="en-US" sz="1450" dirty="0">
                 <a:solidFill>
                   <a:srgbClr val="281F0F"/>
                 </a:solidFill>
@@ -3400,29 +3408,9 @@
               </a:rPr>
               <a:t>Rules score the window mean or minimum, never a single sample; then the read tier reads a short history of recent windows and reduces it to a weight trend and a brood-thermal state, composed into one sentence per apiary. The judgement lives in the read tier, where that history is already at hand, so the dashboard says "weight rising, brood temperature has breached a safe threshold" rather than showing a number to interpret.</a:t>
             </a:r>
-            <a:endParaRPr lang="en-US" sz="1350" dirty="0"/>
-          </a:p>
-        </p:txBody>
-      </p:sp>
-      <p:sp>
-        <p:nvSpPr>
-          <p:cNvPr id="9" name="Shape 7"/>
-          <p:cNvSpPr/>
-          <p:nvPr/>
-        </p:nvSpPr>
-        <p:spPr>
-          <a:xfrm>
-            <a:off x="5669280" y="3703320"/>
-            <a:ext cx="841248" cy="512064"/>
-          </a:xfrm>
-          <a:prstGeom prst="rightArrow">
-            <a:avLst/>
-          </a:prstGeom>
-          <a:solidFill>
-            <a:srgbClr val="8A6516"/>
-          </a:solidFill>
-          <a:ln/>
-        </p:spPr>
+            <a:endParaRPr lang="en-US" sz="1450" dirty="0"/>
+          </a:p>
+        </p:txBody>
       </p:sp>
     </p:spTree>
   </p:cSld>

--- a/ppt/YashaswiniPenumarthi_X24262404_beehive-apiary-monitoring.pptx
+++ b/ppt/YashaswiniPenumarthi_X24262404_beehive-apiary-monitoring.pptx
@@ -1578,12 +1578,12 @@
         </p:nvSpPr>
         <p:spPr>
           <a:xfrm>
-            <a:off x="640080" y="1874520"/>
-            <a:ext cx="2286000" cy="1280160"/>
+            <a:off x="640080" y="1554480"/>
+            <a:ext cx="3200400" cy="3383280"/>
           </a:xfrm>
           <a:prstGeom prst="roundRect">
             <a:avLst>
-              <a:gd name="adj" fmla="val 7143"/>
+              <a:gd name="adj" fmla="val 2857"/>
             </a:avLst>
           </a:prstGeom>
           <a:solidFill>
@@ -1599,147 +1599,63 @@
       </p:sp>
       <p:sp>
         <p:nvSpPr>
-          <p:cNvPr id="4" name="Shape 2"/>
-          <p:cNvSpPr/>
-          <p:nvPr/>
-        </p:nvSpPr>
-        <p:spPr>
-          <a:xfrm>
-            <a:off x="1691640" y="2039112"/>
-            <a:ext cx="182880" cy="182880"/>
-          </a:xfrm>
-          <a:prstGeom prst="ellipse">
-            <a:avLst/>
-          </a:prstGeom>
-          <a:solidFill>
-            <a:srgbClr val="D8AE3E"/>
-          </a:solidFill>
-          <a:ln/>
-        </p:spPr>
-      </p:sp>
-      <p:sp>
-        <p:nvSpPr>
-          <p:cNvPr id="5" name="Text 3"/>
-          <p:cNvSpPr/>
-          <p:nvPr/>
-        </p:nvSpPr>
-        <p:spPr>
-          <a:xfrm>
-            <a:off x="612648" y="2258568"/>
-            <a:ext cx="2340864" cy="365760"/>
-          </a:xfrm>
-          <a:prstGeom prst="rect">
-            <a:avLst/>
-          </a:prstGeom>
-          <a:noFill/>
-          <a:ln/>
-        </p:spPr>
-        <p:txBody>
-          <a:bodyPr wrap="square" lIns="0" tIns="0" rIns="0" bIns="0" rtlCol="0" anchor="ctr"/>
+          <p:cNvPr id="4" name="Text 2"/>
+          <p:cNvSpPr/>
+          <p:nvPr/>
+        </p:nvSpPr>
+        <p:spPr>
+          <a:xfrm>
+            <a:off x="640080" y="1691640"/>
+            <a:ext cx="3200400" cy="365760"/>
+          </a:xfrm>
+          <a:prstGeom prst="rect">
+            <a:avLst/>
+          </a:prstGeom>
+          <a:noFill/>
+          <a:ln/>
+        </p:spPr>
+        <p:txBody>
+          <a:bodyPr wrap="square" rtlCol="0" anchor="ctr"/>
           <a:lstStyle/>
           <a:p>
             <a:pPr algn="ctr" indent="0" marL="0">
               <a:buNone/>
             </a:pPr>
             <a:r>
-              <a:rPr lang="en-US" sz="1450" b="1" dirty="0">
-                <a:solidFill>
-                  <a:srgbClr val="281F0F"/>
+              <a:rPr lang="en-US" sz="1200" b="1" spc="300" kern="0" dirty="0">
+                <a:solidFill>
+                  <a:srgbClr val="D8AE3E"/>
                 </a:solidFill>
                 <a:latin typeface="Calibri" pitchFamily="34" charset="0"/>
                 <a:ea typeface="Calibri" pitchFamily="34" charset="-122"/>
                 <a:cs typeface="Calibri" pitchFamily="34" charset="-120"/>
               </a:rPr>
-              <a:t>Hive sensors</a:t>
-            </a:r>
-            <a:endParaRPr lang="en-US" sz="1450" dirty="0"/>
-          </a:p>
-        </p:txBody>
-      </p:sp>
-      <p:sp>
-        <p:nvSpPr>
-          <p:cNvPr id="6" name="Text 4"/>
-          <p:cNvSpPr/>
-          <p:nvPr/>
-        </p:nvSpPr>
-        <p:spPr>
-          <a:xfrm>
-            <a:off x="640080" y="2606040"/>
-            <a:ext cx="2286000" cy="411480"/>
-          </a:xfrm>
-          <a:prstGeom prst="rect">
-            <a:avLst/>
-          </a:prstGeom>
-          <a:noFill/>
-          <a:ln/>
-        </p:spPr>
-        <p:txBody>
-          <a:bodyPr wrap="square" lIns="0" tIns="0" rIns="0" bIns="0" rtlCol="0" anchor="t"/>
-          <a:lstStyle/>
-          <a:p>
-            <a:pPr algn="ctr" indent="0" marL="0">
-              <a:buNone/>
-            </a:pPr>
-            <a:r>
-              <a:rPr lang="en-US" sz="1050" dirty="0">
-                <a:solidFill>
-                  <a:srgbClr val="6E6144"/>
-                </a:solidFill>
-                <a:latin typeface="Calibri" pitchFamily="34" charset="0"/>
-                <a:ea typeface="Calibri" pitchFamily="34" charset="-122"/>
-                <a:cs typeface="Calibri" pitchFamily="34" charset="-120"/>
-              </a:rPr>
-              <a:t>10 · 2 apiaries</a:t>
-            </a:r>
-            <a:endParaRPr lang="en-US" sz="1050" dirty="0"/>
-          </a:p>
-        </p:txBody>
-      </p:sp>
-      <p:sp>
-        <p:nvSpPr>
-          <p:cNvPr id="7" name="Shape 5"/>
-          <p:cNvSpPr/>
-          <p:nvPr/>
-        </p:nvSpPr>
-        <p:spPr>
-          <a:xfrm>
-            <a:off x="2944368" y="2514600"/>
-            <a:ext cx="1975104" cy="0"/>
-          </a:xfrm>
-          <a:prstGeom prst="line">
-            <a:avLst/>
-          </a:prstGeom>
-          <a:noFill/>
-          <a:ln w="25400">
-            <a:solidFill>
-              <a:srgbClr val="D8AE3E"/>
-            </a:solidFill>
-            <a:prstDash val="solid"/>
-            <a:headEnd type="none"/>
-            <a:tailEnd type="triangle"/>
-          </a:ln>
-        </p:spPr>
-      </p:sp>
-      <p:sp>
-        <p:nvSpPr>
-          <p:cNvPr id="8" name="Shape 6"/>
-          <p:cNvSpPr/>
-          <p:nvPr/>
-        </p:nvSpPr>
-        <p:spPr>
-          <a:xfrm>
-            <a:off x="4937760" y="1874520"/>
-            <a:ext cx="2286000" cy="1280160"/>
+              <a:t>EDGE</a:t>
+            </a:r>
+            <a:endParaRPr lang="en-US" sz="1200" dirty="0"/>
+          </a:p>
+        </p:txBody>
+      </p:sp>
+      <p:sp>
+        <p:nvSpPr>
+          <p:cNvPr id="5" name="Shape 3"/>
+          <p:cNvSpPr/>
+          <p:nvPr/>
+        </p:nvSpPr>
+        <p:spPr>
+          <a:xfrm>
+            <a:off x="914400" y="2286000"/>
+            <a:ext cx="2651760" cy="1005840"/>
           </a:xfrm>
           <a:prstGeom prst="roundRect">
             <a:avLst>
-              <a:gd name="adj" fmla="val 7143"/>
+              <a:gd name="adj" fmla="val 7273"/>
             </a:avLst>
           </a:prstGeom>
           <a:solidFill>
-            <a:srgbClr val="F7F2E3"/>
-          </a:solidFill>
-          <a:ln w="19050">
+            <a:srgbClr val="FFFFFF"/>
+          </a:solidFill>
+          <a:ln w="15240">
             <a:solidFill>
               <a:srgbClr val="D8AE3E"/>
             </a:solidFill>
@@ -1749,34 +1665,14 @@
       </p:sp>
       <p:sp>
         <p:nvSpPr>
-          <p:cNvPr id="9" name="Shape 7"/>
-          <p:cNvSpPr/>
-          <p:nvPr/>
-        </p:nvSpPr>
-        <p:spPr>
-          <a:xfrm>
-            <a:off x="5989320" y="2039112"/>
-            <a:ext cx="182880" cy="182880"/>
-          </a:xfrm>
-          <a:prstGeom prst="ellipse">
-            <a:avLst/>
-          </a:prstGeom>
-          <a:solidFill>
-            <a:srgbClr val="D8AE3E"/>
-          </a:solidFill>
-          <a:ln/>
-        </p:spPr>
-      </p:sp>
-      <p:sp>
-        <p:nvSpPr>
-          <p:cNvPr id="10" name="Text 8"/>
-          <p:cNvSpPr/>
-          <p:nvPr/>
-        </p:nvSpPr>
-        <p:spPr>
-          <a:xfrm>
-            <a:off x="4910328" y="2258568"/>
-            <a:ext cx="2340864" cy="365760"/>
+          <p:cNvPr id="6" name="Text 4"/>
+          <p:cNvSpPr/>
+          <p:nvPr/>
+        </p:nvSpPr>
+        <p:spPr>
+          <a:xfrm>
+            <a:off x="914400" y="2432304"/>
+            <a:ext cx="2651760" cy="365760"/>
           </a:xfrm>
           <a:prstGeom prst="rect">
             <a:avLst/>
@@ -1792,7 +1688,7 @@
               <a:buNone/>
             </a:pPr>
             <a:r>
-              <a:rPr lang="en-US" sz="1450" b="1" dirty="0">
+              <a:rPr lang="en-US" sz="1400" b="1" dirty="0">
                 <a:solidFill>
                   <a:srgbClr val="281F0F"/>
                 </a:solidFill>
@@ -1800,38 +1696,38 @@
                 <a:ea typeface="Calibri" pitchFamily="34" charset="-122"/>
                 <a:cs typeface="Calibri" pitchFamily="34" charset="-120"/>
               </a:rPr>
-              <a:t>Fog node</a:t>
-            </a:r>
-            <a:endParaRPr lang="en-US" sz="1450" dirty="0"/>
-          </a:p>
-        </p:txBody>
-      </p:sp>
-      <p:sp>
-        <p:nvSpPr>
-          <p:cNvPr id="11" name="Text 9"/>
-          <p:cNvSpPr/>
-          <p:nvPr/>
-        </p:nvSpPr>
-        <p:spPr>
-          <a:xfrm>
-            <a:off x="4937760" y="2606040"/>
-            <a:ext cx="2286000" cy="411480"/>
-          </a:xfrm>
-          <a:prstGeom prst="rect">
-            <a:avLst/>
-          </a:prstGeom>
-          <a:noFill/>
-          <a:ln/>
-        </p:spPr>
-        <p:txBody>
-          <a:bodyPr wrap="square" lIns="0" tIns="0" rIns="0" bIns="0" rtlCol="0" anchor="t"/>
+              <a:t>Hive sensors</a:t>
+            </a:r>
+            <a:endParaRPr lang="en-US" sz="1400" dirty="0"/>
+          </a:p>
+        </p:txBody>
+      </p:sp>
+      <p:sp>
+        <p:nvSpPr>
+          <p:cNvPr id="7" name="Text 5"/>
+          <p:cNvSpPr/>
+          <p:nvPr/>
+        </p:nvSpPr>
+        <p:spPr>
+          <a:xfrm>
+            <a:off x="914400" y="2816352"/>
+            <a:ext cx="2651760" cy="365760"/>
+          </a:xfrm>
+          <a:prstGeom prst="rect">
+            <a:avLst/>
+          </a:prstGeom>
+          <a:noFill/>
+          <a:ln/>
+        </p:spPr>
+        <p:txBody>
+          <a:bodyPr wrap="square" lIns="0" tIns="0" rIns="0" bIns="0" rtlCol="0" anchor="ctr"/>
           <a:lstStyle/>
           <a:p>
             <a:pPr algn="ctr" indent="0" marL="0">
               <a:buNone/>
             </a:pPr>
             <a:r>
-              <a:rPr lang="en-US" sz="1050" dirty="0">
+              <a:rPr lang="en-US" sz="1000" dirty="0">
                 <a:solidFill>
                   <a:srgbClr val="6E6144"/>
                 </a:solidFill>
@@ -1839,51 +1735,155 @@
                 <a:ea typeface="Calibri" pitchFamily="34" charset="-122"/>
                 <a:cs typeface="Calibri" pitchFamily="34" charset="-120"/>
               </a:rPr>
-              <a:t>10 s windows · colony rules</a:t>
-            </a:r>
-            <a:endParaRPr lang="en-US" sz="1050" dirty="0"/>
-          </a:p>
-        </p:txBody>
-      </p:sp>
-      <p:sp>
-        <p:nvSpPr>
-          <p:cNvPr id="12" name="Shape 10"/>
-          <p:cNvSpPr/>
-          <p:nvPr/>
-        </p:nvSpPr>
-        <p:spPr>
-          <a:xfrm>
-            <a:off x="7242048" y="2514600"/>
-            <a:ext cx="1975104" cy="0"/>
-          </a:xfrm>
-          <a:prstGeom prst="line">
-            <a:avLst/>
-          </a:prstGeom>
-          <a:noFill/>
-          <a:ln w="25400">
+              <a:t>10 · 2 apiaries</a:t>
+            </a:r>
+            <a:endParaRPr lang="en-US" sz="1000" dirty="0"/>
+          </a:p>
+        </p:txBody>
+      </p:sp>
+      <p:sp>
+        <p:nvSpPr>
+          <p:cNvPr id="8" name="Shape 6"/>
+          <p:cNvSpPr/>
+          <p:nvPr/>
+        </p:nvSpPr>
+        <p:spPr>
+          <a:xfrm>
+            <a:off x="914400" y="3520440"/>
+            <a:ext cx="2651760" cy="1005840"/>
+          </a:xfrm>
+          <a:prstGeom prst="roundRect">
+            <a:avLst>
+              <a:gd name="adj" fmla="val 7273"/>
+            </a:avLst>
+          </a:prstGeom>
+          <a:solidFill>
+            <a:srgbClr val="FFFFFF"/>
+          </a:solidFill>
+          <a:ln w="15240">
             <a:solidFill>
               <a:srgbClr val="D8AE3E"/>
             </a:solidFill>
             <a:prstDash val="solid"/>
-            <a:headEnd type="none"/>
+          </a:ln>
+        </p:spPr>
+      </p:sp>
+      <p:sp>
+        <p:nvSpPr>
+          <p:cNvPr id="9" name="Text 7"/>
+          <p:cNvSpPr/>
+          <p:nvPr/>
+        </p:nvSpPr>
+        <p:spPr>
+          <a:xfrm>
+            <a:off x="914400" y="3666744"/>
+            <a:ext cx="2651760" cy="365760"/>
+          </a:xfrm>
+          <a:prstGeom prst="rect">
+            <a:avLst/>
+          </a:prstGeom>
+          <a:noFill/>
+          <a:ln/>
+        </p:spPr>
+        <p:txBody>
+          <a:bodyPr wrap="square" lIns="0" tIns="0" rIns="0" bIns="0" rtlCol="0" anchor="ctr"/>
+          <a:lstStyle/>
+          <a:p>
+            <a:pPr algn="ctr" indent="0" marL="0">
+              <a:buNone/>
+            </a:pPr>
+            <a:r>
+              <a:rPr lang="en-US" sz="1400" b="1" dirty="0">
+                <a:solidFill>
+                  <a:srgbClr val="281F0F"/>
+                </a:solidFill>
+                <a:latin typeface="Calibri" pitchFamily="34" charset="0"/>
+                <a:ea typeface="Calibri" pitchFamily="34" charset="-122"/>
+                <a:cs typeface="Calibri" pitchFamily="34" charset="-120"/>
+              </a:rPr>
+              <a:t>Fog node</a:t>
+            </a:r>
+            <a:endParaRPr lang="en-US" sz="1400" dirty="0"/>
+          </a:p>
+        </p:txBody>
+      </p:sp>
+      <p:sp>
+        <p:nvSpPr>
+          <p:cNvPr id="10" name="Text 8"/>
+          <p:cNvSpPr/>
+          <p:nvPr/>
+        </p:nvSpPr>
+        <p:spPr>
+          <a:xfrm>
+            <a:off x="914400" y="4050792"/>
+            <a:ext cx="2651760" cy="365760"/>
+          </a:xfrm>
+          <a:prstGeom prst="rect">
+            <a:avLst/>
+          </a:prstGeom>
+          <a:noFill/>
+          <a:ln/>
+        </p:spPr>
+        <p:txBody>
+          <a:bodyPr wrap="square" lIns="0" tIns="0" rIns="0" bIns="0" rtlCol="0" anchor="ctr"/>
+          <a:lstStyle/>
+          <a:p>
+            <a:pPr algn="ctr" indent="0" marL="0">
+              <a:buNone/>
+            </a:pPr>
+            <a:r>
+              <a:rPr lang="en-US" sz="1000" dirty="0">
+                <a:solidFill>
+                  <a:srgbClr val="6E6144"/>
+                </a:solidFill>
+                <a:latin typeface="Calibri" pitchFamily="34" charset="0"/>
+                <a:ea typeface="Calibri" pitchFamily="34" charset="-122"/>
+                <a:cs typeface="Calibri" pitchFamily="34" charset="-120"/>
+              </a:rPr>
+              <a:t>10 s windows · colony rules</a:t>
+            </a:r>
+            <a:endParaRPr lang="en-US" sz="1000" dirty="0"/>
+          </a:p>
+        </p:txBody>
+      </p:sp>
+      <p:sp>
+        <p:nvSpPr>
+          <p:cNvPr id="11" name="Shape 9"/>
+          <p:cNvSpPr/>
+          <p:nvPr/>
+        </p:nvSpPr>
+        <p:spPr>
+          <a:xfrm>
+            <a:off x="3886200" y="3246120"/>
+            <a:ext cx="502920" cy="0"/>
+          </a:xfrm>
+          <a:prstGeom prst="line">
+            <a:avLst/>
+          </a:prstGeom>
+          <a:noFill/>
+          <a:ln w="31750">
+            <a:solidFill>
+              <a:srgbClr val="8A6516"/>
+            </a:solidFill>
+            <a:prstDash val="solid"/>
             <a:tailEnd type="triangle"/>
           </a:ln>
         </p:spPr>
       </p:sp>
       <p:sp>
         <p:nvSpPr>
-          <p:cNvPr id="13" name="Shape 11"/>
-          <p:cNvSpPr/>
-          <p:nvPr/>
-        </p:nvSpPr>
-        <p:spPr>
-          <a:xfrm>
-            <a:off x="9235440" y="1874520"/>
-            <a:ext cx="2286000" cy="1280160"/>
+          <p:cNvPr id="12" name="Shape 10"/>
+          <p:cNvSpPr/>
+          <p:nvPr/>
+        </p:nvSpPr>
+        <p:spPr>
+          <a:xfrm>
+            <a:off x="4572000" y="1554480"/>
+            <a:ext cx="6949440" cy="3383280"/>
           </a:xfrm>
           <a:prstGeom prst="roundRect">
             <a:avLst>
-              <a:gd name="adj" fmla="val 7143"/>
+              <a:gd name="adj" fmla="val 2703"/>
             </a:avLst>
           </a:prstGeom>
           <a:solidFill>
@@ -1899,122 +1899,63 @@
       </p:sp>
       <p:sp>
         <p:nvSpPr>
-          <p:cNvPr id="14" name="Shape 12"/>
-          <p:cNvSpPr/>
-          <p:nvPr/>
-        </p:nvSpPr>
-        <p:spPr>
-          <a:xfrm>
-            <a:off x="10287000" y="2039112"/>
-            <a:ext cx="182880" cy="182880"/>
-          </a:xfrm>
-          <a:prstGeom prst="ellipse">
-            <a:avLst/>
-          </a:prstGeom>
-          <a:solidFill>
-            <a:srgbClr val="8A6516"/>
-          </a:solidFill>
-          <a:ln/>
-        </p:spPr>
-      </p:sp>
-      <p:sp>
-        <p:nvSpPr>
-          <p:cNvPr id="15" name="Text 13"/>
-          <p:cNvSpPr/>
-          <p:nvPr/>
-        </p:nvSpPr>
-        <p:spPr>
-          <a:xfrm>
-            <a:off x="9208008" y="2258568"/>
-            <a:ext cx="2340864" cy="365760"/>
-          </a:xfrm>
-          <a:prstGeom prst="rect">
-            <a:avLst/>
-          </a:prstGeom>
-          <a:noFill/>
-          <a:ln/>
-        </p:spPr>
-        <p:txBody>
-          <a:bodyPr wrap="square" lIns="0" tIns="0" rIns="0" bIns="0" rtlCol="0" anchor="ctr"/>
+          <p:cNvPr id="13" name="Text 11"/>
+          <p:cNvSpPr/>
+          <p:nvPr/>
+        </p:nvSpPr>
+        <p:spPr>
+          <a:xfrm>
+            <a:off x="4572000" y="1691640"/>
+            <a:ext cx="6949440" cy="365760"/>
+          </a:xfrm>
+          <a:prstGeom prst="rect">
+            <a:avLst/>
+          </a:prstGeom>
+          <a:noFill/>
+          <a:ln/>
+        </p:spPr>
+        <p:txBody>
+          <a:bodyPr wrap="square" rtlCol="0" anchor="ctr"/>
           <a:lstStyle/>
           <a:p>
             <a:pPr algn="ctr" indent="0" marL="0">
               <a:buNone/>
             </a:pPr>
             <a:r>
-              <a:rPr lang="en-US" sz="1450" b="1" dirty="0">
-                <a:solidFill>
-                  <a:srgbClr val="281F0F"/>
+              <a:rPr lang="en-US" sz="1200" b="1" spc="200" kern="0" dirty="0">
+                <a:solidFill>
+                  <a:srgbClr val="8A6516"/>
                 </a:solidFill>
                 <a:latin typeface="Calibri" pitchFamily="34" charset="0"/>
                 <a:ea typeface="Calibri" pitchFamily="34" charset="-122"/>
                 <a:cs typeface="Calibri" pitchFamily="34" charset="-120"/>
               </a:rPr>
-              <a:t>Amazon SQS</a:t>
-            </a:r>
-            <a:endParaRPr lang="en-US" sz="1450" dirty="0"/>
-          </a:p>
-        </p:txBody>
-      </p:sp>
-      <p:sp>
-        <p:nvSpPr>
-          <p:cNvPr id="16" name="Text 14"/>
-          <p:cNvSpPr/>
-          <p:nvPr/>
-        </p:nvSpPr>
-        <p:spPr>
-          <a:xfrm>
-            <a:off x="9235440" y="2606040"/>
-            <a:ext cx="2286000" cy="411480"/>
-          </a:xfrm>
-          <a:prstGeom prst="rect">
-            <a:avLst/>
-          </a:prstGeom>
-          <a:noFill/>
-          <a:ln/>
-        </p:spPr>
-        <p:txBody>
-          <a:bodyPr wrap="square" lIns="0" tIns="0" rIns="0" bIns="0" rtlCol="0" anchor="t"/>
-          <a:lstStyle/>
-          <a:p>
-            <a:pPr algn="ctr" indent="0" marL="0">
-              <a:buNone/>
-            </a:pPr>
-            <a:r>
-              <a:rPr lang="en-US" sz="1050" dirty="0">
-                <a:solidFill>
-                  <a:srgbClr val="6E6144"/>
-                </a:solidFill>
-                <a:latin typeface="Calibri" pitchFamily="34" charset="0"/>
-                <a:ea typeface="Calibri" pitchFamily="34" charset="-122"/>
-                <a:cs typeface="Calibri" pitchFamily="34" charset="-120"/>
-              </a:rPr>
-              <a:t>1 summary / window</a:t>
-            </a:r>
-            <a:endParaRPr lang="en-US" sz="1050" dirty="0"/>
-          </a:p>
-        </p:txBody>
-      </p:sp>
-      <p:sp>
-        <p:nvSpPr>
-          <p:cNvPr id="17" name="Shape 15"/>
-          <p:cNvSpPr/>
-          <p:nvPr/>
-        </p:nvSpPr>
-        <p:spPr>
-          <a:xfrm>
-            <a:off x="9235440" y="3520440"/>
-            <a:ext cx="2286000" cy="1280160"/>
+              <a:t>CLOUD (serverless)</a:t>
+            </a:r>
+            <a:endParaRPr lang="en-US" sz="1200" dirty="0"/>
+          </a:p>
+        </p:txBody>
+      </p:sp>
+      <p:sp>
+        <p:nvSpPr>
+          <p:cNvPr id="14" name="Shape 12"/>
+          <p:cNvSpPr/>
+          <p:nvPr/>
+        </p:nvSpPr>
+        <p:spPr>
+          <a:xfrm>
+            <a:off x="4846320" y="2651760"/>
+            <a:ext cx="1463040" cy="1371600"/>
           </a:xfrm>
           <a:prstGeom prst="roundRect">
             <a:avLst>
-              <a:gd name="adj" fmla="val 7143"/>
+              <a:gd name="adj" fmla="val 5333"/>
             </a:avLst>
           </a:prstGeom>
           <a:solidFill>
-            <a:srgbClr val="F7F2E3"/>
-          </a:solidFill>
-          <a:ln w="19050">
+            <a:srgbClr val="FFFFFF"/>
+          </a:solidFill>
+          <a:ln w="15240">
             <a:solidFill>
               <a:srgbClr val="8A6516"/>
             </a:solidFill>
@@ -2024,34 +1965,14 @@
       </p:sp>
       <p:sp>
         <p:nvSpPr>
-          <p:cNvPr id="18" name="Shape 16"/>
-          <p:cNvSpPr/>
-          <p:nvPr/>
-        </p:nvSpPr>
-        <p:spPr>
-          <a:xfrm>
-            <a:off x="10287000" y="3685032"/>
-            <a:ext cx="182880" cy="182880"/>
-          </a:xfrm>
-          <a:prstGeom prst="ellipse">
-            <a:avLst/>
-          </a:prstGeom>
-          <a:solidFill>
-            <a:srgbClr val="8A6516"/>
-          </a:solidFill>
-          <a:ln/>
-        </p:spPr>
-      </p:sp>
-      <p:sp>
-        <p:nvSpPr>
-          <p:cNvPr id="19" name="Text 17"/>
-          <p:cNvSpPr/>
-          <p:nvPr/>
-        </p:nvSpPr>
-        <p:spPr>
-          <a:xfrm>
-            <a:off x="9208008" y="3904488"/>
-            <a:ext cx="2340864" cy="365760"/>
+          <p:cNvPr id="15" name="Text 13"/>
+          <p:cNvSpPr/>
+          <p:nvPr/>
+        </p:nvSpPr>
+        <p:spPr>
+          <a:xfrm>
+            <a:off x="4800600" y="2907792"/>
+            <a:ext cx="1554480" cy="457200"/>
           </a:xfrm>
           <a:prstGeom prst="rect">
             <a:avLst/>
@@ -2067,7 +1988,7 @@
               <a:buNone/>
             </a:pPr>
             <a:r>
-              <a:rPr lang="en-US" sz="1450" b="1" dirty="0">
+              <a:rPr lang="en-US" sz="1250" b="1" dirty="0">
                 <a:solidFill>
                   <a:srgbClr val="281F0F"/>
                 </a:solidFill>
@@ -2075,38 +1996,38 @@
                 <a:ea typeface="Calibri" pitchFamily="34" charset="-122"/>
                 <a:cs typeface="Calibri" pitchFamily="34" charset="-120"/>
               </a:rPr>
-              <a:t>AWS Lambda</a:t>
-            </a:r>
-            <a:endParaRPr lang="en-US" sz="1450" dirty="0"/>
-          </a:p>
-        </p:txBody>
-      </p:sp>
-      <p:sp>
-        <p:nvSpPr>
-          <p:cNvPr id="20" name="Text 18"/>
-          <p:cNvSpPr/>
-          <p:nvPr/>
-        </p:nvSpPr>
-        <p:spPr>
-          <a:xfrm>
-            <a:off x="9235440" y="4251960"/>
-            <a:ext cx="2286000" cy="411480"/>
-          </a:xfrm>
-          <a:prstGeom prst="rect">
-            <a:avLst/>
-          </a:prstGeom>
-          <a:noFill/>
-          <a:ln/>
-        </p:spPr>
-        <p:txBody>
-          <a:bodyPr wrap="square" lIns="0" tIns="0" rIns="0" bIns="0" rtlCol="0" anchor="t"/>
+              <a:t>Amazon SQS</a:t>
+            </a:r>
+            <a:endParaRPr lang="en-US" sz="1250" dirty="0"/>
+          </a:p>
+        </p:txBody>
+      </p:sp>
+      <p:sp>
+        <p:nvSpPr>
+          <p:cNvPr id="16" name="Text 14"/>
+          <p:cNvSpPr/>
+          <p:nvPr/>
+        </p:nvSpPr>
+        <p:spPr>
+          <a:xfrm>
+            <a:off x="4828032" y="3401568"/>
+            <a:ext cx="1499616" cy="457200"/>
+          </a:xfrm>
+          <a:prstGeom prst="rect">
+            <a:avLst/>
+          </a:prstGeom>
+          <a:noFill/>
+          <a:ln/>
+        </p:spPr>
+        <p:txBody>
+          <a:bodyPr wrap="square" lIns="0" tIns="0" rIns="0" bIns="0" rtlCol="0" anchor="ctr"/>
           <a:lstStyle/>
           <a:p>
             <a:pPr algn="ctr" indent="0" marL="0">
               <a:buNone/>
             </a:pPr>
             <a:r>
-              <a:rPr lang="en-US" sz="1050" dirty="0">
+              <a:rPr lang="en-US" sz="900" dirty="0">
                 <a:solidFill>
                   <a:srgbClr val="6E6144"/>
                 </a:solidFill>
@@ -2114,328 +2035,28 @@
                 <a:ea typeface="Calibri" pitchFamily="34" charset="-122"/>
                 <a:cs typeface="Calibri" pitchFamily="34" charset="-120"/>
               </a:rPr>
-              <a:t>nodejs20 ingest</a:t>
-            </a:r>
-            <a:endParaRPr lang="en-US" sz="1050" dirty="0"/>
-          </a:p>
-        </p:txBody>
-      </p:sp>
-      <p:sp>
-        <p:nvSpPr>
-          <p:cNvPr id="21" name="Shape 19"/>
-          <p:cNvSpPr/>
-          <p:nvPr/>
-        </p:nvSpPr>
-        <p:spPr>
-          <a:xfrm>
-            <a:off x="7242048" y="4160520"/>
-            <a:ext cx="1975104" cy="0"/>
+              <a:t>1 summary / window</a:t>
+            </a:r>
+            <a:endParaRPr lang="en-US" sz="900" dirty="0"/>
+          </a:p>
+        </p:txBody>
+      </p:sp>
+      <p:sp>
+        <p:nvSpPr>
+          <p:cNvPr id="17" name="Shape 15"/>
+          <p:cNvSpPr/>
+          <p:nvPr/>
+        </p:nvSpPr>
+        <p:spPr>
+          <a:xfrm>
+            <a:off x="6318504" y="3337560"/>
+            <a:ext cx="164592" cy="0"/>
           </a:xfrm>
           <a:prstGeom prst="line">
             <a:avLst/>
           </a:prstGeom>
           <a:noFill/>
-          <a:ln w="25400">
-            <a:solidFill>
-              <a:srgbClr val="D8AE3E"/>
-            </a:solidFill>
-            <a:prstDash val="solid"/>
-            <a:headEnd type="triangle"/>
-            <a:tailEnd type="oval"/>
-          </a:ln>
-        </p:spPr>
-      </p:sp>
-      <p:sp>
-        <p:nvSpPr>
-          <p:cNvPr id="22" name="Shape 20"/>
-          <p:cNvSpPr/>
-          <p:nvPr/>
-        </p:nvSpPr>
-        <p:spPr>
-          <a:xfrm>
-            <a:off x="4937760" y="3520440"/>
-            <a:ext cx="2286000" cy="1280160"/>
-          </a:xfrm>
-          <a:prstGeom prst="roundRect">
-            <a:avLst>
-              <a:gd name="adj" fmla="val 7143"/>
-            </a:avLst>
-          </a:prstGeom>
-          <a:solidFill>
-            <a:srgbClr val="F7F2E3"/>
-          </a:solidFill>
-          <a:ln w="19050">
-            <a:solidFill>
-              <a:srgbClr val="8A6516"/>
-            </a:solidFill>
-            <a:prstDash val="solid"/>
-          </a:ln>
-        </p:spPr>
-      </p:sp>
-      <p:sp>
-        <p:nvSpPr>
-          <p:cNvPr id="23" name="Shape 21"/>
-          <p:cNvSpPr/>
-          <p:nvPr/>
-        </p:nvSpPr>
-        <p:spPr>
-          <a:xfrm>
-            <a:off x="5989320" y="3685032"/>
-            <a:ext cx="182880" cy="182880"/>
-          </a:xfrm>
-          <a:prstGeom prst="ellipse">
-            <a:avLst/>
-          </a:prstGeom>
-          <a:solidFill>
-            <a:srgbClr val="8A6516"/>
-          </a:solidFill>
-          <a:ln/>
-        </p:spPr>
-      </p:sp>
-      <p:sp>
-        <p:nvSpPr>
-          <p:cNvPr id="24" name="Text 22"/>
-          <p:cNvSpPr/>
-          <p:nvPr/>
-        </p:nvSpPr>
-        <p:spPr>
-          <a:xfrm>
-            <a:off x="4910328" y="3904488"/>
-            <a:ext cx="2340864" cy="365760"/>
-          </a:xfrm>
-          <a:prstGeom prst="rect">
-            <a:avLst/>
-          </a:prstGeom>
-          <a:noFill/>
-          <a:ln/>
-        </p:spPr>
-        <p:txBody>
-          <a:bodyPr wrap="square" lIns="0" tIns="0" rIns="0" bIns="0" rtlCol="0" anchor="ctr"/>
-          <a:lstStyle/>
-          <a:p>
-            <a:pPr algn="ctr" indent="0" marL="0">
-              <a:buNone/>
-            </a:pPr>
-            <a:r>
-              <a:rPr lang="en-US" sz="1450" b="1" dirty="0">
-                <a:solidFill>
-                  <a:srgbClr val="281F0F"/>
-                </a:solidFill>
-                <a:latin typeface="Calibri" pitchFamily="34" charset="0"/>
-                <a:ea typeface="Calibri" pitchFamily="34" charset="-122"/>
-                <a:cs typeface="Calibri" pitchFamily="34" charset="-120"/>
-              </a:rPr>
-              <a:t>DynamoDB</a:t>
-            </a:r>
-            <a:endParaRPr lang="en-US" sz="1450" dirty="0"/>
-          </a:p>
-        </p:txBody>
-      </p:sp>
-      <p:sp>
-        <p:nvSpPr>
-          <p:cNvPr id="25" name="Text 23"/>
-          <p:cNvSpPr/>
-          <p:nvPr/>
-        </p:nvSpPr>
-        <p:spPr>
-          <a:xfrm>
-            <a:off x="4937760" y="4251960"/>
-            <a:ext cx="2286000" cy="411480"/>
-          </a:xfrm>
-          <a:prstGeom prst="rect">
-            <a:avLst/>
-          </a:prstGeom>
-          <a:noFill/>
-          <a:ln/>
-        </p:spPr>
-        <p:txBody>
-          <a:bodyPr wrap="square" lIns="0" tIns="0" rIns="0" bIns="0" rtlCol="0" anchor="t"/>
-          <a:lstStyle/>
-          <a:p>
-            <a:pPr algn="ctr" indent="0" marL="0">
-              <a:buNone/>
-            </a:pPr>
-            <a:r>
-              <a:rPr lang="en-US" sz="1050" dirty="0">
-                <a:solidFill>
-                  <a:srgbClr val="6E6144"/>
-                </a:solidFill>
-                <a:latin typeface="Calibri" pitchFamily="34" charset="0"/>
-                <a:ea typeface="Calibri" pitchFamily="34" charset="-122"/>
-                <a:cs typeface="Calibri" pitchFamily="34" charset="-120"/>
-              </a:rPr>
-              <a:t>time-series store</a:t>
-            </a:r>
-            <a:endParaRPr lang="en-US" sz="1050" dirty="0"/>
-          </a:p>
-        </p:txBody>
-      </p:sp>
-      <p:sp>
-        <p:nvSpPr>
-          <p:cNvPr id="26" name="Shape 24"/>
-          <p:cNvSpPr/>
-          <p:nvPr/>
-        </p:nvSpPr>
-        <p:spPr>
-          <a:xfrm>
-            <a:off x="2944368" y="4160520"/>
-            <a:ext cx="1975104" cy="0"/>
-          </a:xfrm>
-          <a:prstGeom prst="line">
-            <a:avLst/>
-          </a:prstGeom>
-          <a:noFill/>
-          <a:ln w="25400">
-            <a:solidFill>
-              <a:srgbClr val="D8AE3E"/>
-            </a:solidFill>
-            <a:prstDash val="solid"/>
-            <a:headEnd type="triangle"/>
-            <a:tailEnd type="oval"/>
-          </a:ln>
-        </p:spPr>
-      </p:sp>
-      <p:sp>
-        <p:nvSpPr>
-          <p:cNvPr id="27" name="Shape 25"/>
-          <p:cNvSpPr/>
-          <p:nvPr/>
-        </p:nvSpPr>
-        <p:spPr>
-          <a:xfrm>
-            <a:off x="640080" y="3520440"/>
-            <a:ext cx="2286000" cy="1280160"/>
-          </a:xfrm>
-          <a:prstGeom prst="roundRect">
-            <a:avLst>
-              <a:gd name="adj" fmla="val 7143"/>
-            </a:avLst>
-          </a:prstGeom>
-          <a:solidFill>
-            <a:srgbClr val="F7F2E3"/>
-          </a:solidFill>
-          <a:ln w="19050">
-            <a:solidFill>
-              <a:srgbClr val="B98A1E"/>
-            </a:solidFill>
-            <a:prstDash val="solid"/>
-          </a:ln>
-        </p:spPr>
-      </p:sp>
-      <p:sp>
-        <p:nvSpPr>
-          <p:cNvPr id="28" name="Shape 26"/>
-          <p:cNvSpPr/>
-          <p:nvPr/>
-        </p:nvSpPr>
-        <p:spPr>
-          <a:xfrm>
-            <a:off x="1691640" y="3685032"/>
-            <a:ext cx="182880" cy="182880"/>
-          </a:xfrm>
-          <a:prstGeom prst="ellipse">
-            <a:avLst/>
-          </a:prstGeom>
-          <a:solidFill>
-            <a:srgbClr val="B98A1E"/>
-          </a:solidFill>
-          <a:ln/>
-        </p:spPr>
-      </p:sp>
-      <p:sp>
-        <p:nvSpPr>
-          <p:cNvPr id="29" name="Text 27"/>
-          <p:cNvSpPr/>
-          <p:nvPr/>
-        </p:nvSpPr>
-        <p:spPr>
-          <a:xfrm>
-            <a:off x="612648" y="3904488"/>
-            <a:ext cx="2340864" cy="365760"/>
-          </a:xfrm>
-          <a:prstGeom prst="rect">
-            <a:avLst/>
-          </a:prstGeom>
-          <a:noFill/>
-          <a:ln/>
-        </p:spPr>
-        <p:txBody>
-          <a:bodyPr wrap="square" lIns="0" tIns="0" rIns="0" bIns="0" rtlCol="0" anchor="ctr"/>
-          <a:lstStyle/>
-          <a:p>
-            <a:pPr algn="ctr" indent="0" marL="0">
-              <a:buNone/>
-            </a:pPr>
-            <a:r>
-              <a:rPr lang="en-US" sz="1450" b="1" dirty="0">
-                <a:solidFill>
-                  <a:srgbClr val="281F0F"/>
-                </a:solidFill>
-                <a:latin typeface="Calibri" pitchFamily="34" charset="0"/>
-                <a:ea typeface="Calibri" pitchFamily="34" charset="-122"/>
-                <a:cs typeface="Calibri" pitchFamily="34" charset="-120"/>
-              </a:rPr>
-              <a:t>API GW + S3</a:t>
-            </a:r>
-            <a:endParaRPr lang="en-US" sz="1450" dirty="0"/>
-          </a:p>
-        </p:txBody>
-      </p:sp>
-      <p:sp>
-        <p:nvSpPr>
-          <p:cNvPr id="30" name="Text 28"/>
-          <p:cNvSpPr/>
-          <p:nvPr/>
-        </p:nvSpPr>
-        <p:spPr>
-          <a:xfrm>
-            <a:off x="640080" y="4251960"/>
-            <a:ext cx="2286000" cy="411480"/>
-          </a:xfrm>
-          <a:prstGeom prst="rect">
-            <a:avLst/>
-          </a:prstGeom>
-          <a:noFill/>
-          <a:ln/>
-        </p:spPr>
-        <p:txBody>
-          <a:bodyPr wrap="square" lIns="0" tIns="0" rIns="0" bIns="0" rtlCol="0" anchor="t"/>
-          <a:lstStyle/>
-          <a:p>
-            <a:pPr algn="ctr" indent="0" marL="0">
-              <a:buNone/>
-            </a:pPr>
-            <a:r>
-              <a:rPr lang="en-US" sz="1050" dirty="0">
-                <a:solidFill>
-                  <a:srgbClr val="6E6144"/>
-                </a:solidFill>
-                <a:latin typeface="Calibri" pitchFamily="34" charset="0"/>
-                <a:ea typeface="Calibri" pitchFamily="34" charset="-122"/>
-                <a:cs typeface="Calibri" pitchFamily="34" charset="-120"/>
-              </a:rPr>
-              <a:t>colony verdict cards</a:t>
-            </a:r>
-            <a:endParaRPr lang="en-US" sz="1050" dirty="0"/>
-          </a:p>
-        </p:txBody>
-      </p:sp>
-      <p:sp>
-        <p:nvSpPr>
-          <p:cNvPr id="31" name="Shape 29"/>
-          <p:cNvSpPr/>
-          <p:nvPr/>
-        </p:nvSpPr>
-        <p:spPr>
-          <a:xfrm>
-            <a:off x="10378440" y="3154680"/>
-            <a:ext cx="0" cy="365760"/>
-          </a:xfrm>
-          <a:prstGeom prst="line">
-            <a:avLst/>
-          </a:prstGeom>
-          <a:noFill/>
-          <a:ln w="25400">
+          <a:ln w="20320">
             <a:solidFill>
               <a:srgbClr val="D8AE3E"/>
             </a:solidFill>
@@ -2446,7 +2067,370 @@
       </p:sp>
       <p:sp>
         <p:nvSpPr>
-          <p:cNvPr id="32" name="Text 30"/>
+          <p:cNvPr id="18" name="Shape 16"/>
+          <p:cNvSpPr/>
+          <p:nvPr/>
+        </p:nvSpPr>
+        <p:spPr>
+          <a:xfrm>
+            <a:off x="6492240" y="2651760"/>
+            <a:ext cx="1463040" cy="1371600"/>
+          </a:xfrm>
+          <a:prstGeom prst="roundRect">
+            <a:avLst>
+              <a:gd name="adj" fmla="val 5333"/>
+            </a:avLst>
+          </a:prstGeom>
+          <a:solidFill>
+            <a:srgbClr val="FFFFFF"/>
+          </a:solidFill>
+          <a:ln w="15240">
+            <a:solidFill>
+              <a:srgbClr val="8A6516"/>
+            </a:solidFill>
+            <a:prstDash val="solid"/>
+          </a:ln>
+        </p:spPr>
+      </p:sp>
+      <p:sp>
+        <p:nvSpPr>
+          <p:cNvPr id="19" name="Text 17"/>
+          <p:cNvSpPr/>
+          <p:nvPr/>
+        </p:nvSpPr>
+        <p:spPr>
+          <a:xfrm>
+            <a:off x="6446520" y="2907792"/>
+            <a:ext cx="1554480" cy="457200"/>
+          </a:xfrm>
+          <a:prstGeom prst="rect">
+            <a:avLst/>
+          </a:prstGeom>
+          <a:noFill/>
+          <a:ln/>
+        </p:spPr>
+        <p:txBody>
+          <a:bodyPr wrap="square" lIns="0" tIns="0" rIns="0" bIns="0" rtlCol="0" anchor="ctr"/>
+          <a:lstStyle/>
+          <a:p>
+            <a:pPr algn="ctr" indent="0" marL="0">
+              <a:buNone/>
+            </a:pPr>
+            <a:r>
+              <a:rPr lang="en-US" sz="1250" b="1" dirty="0">
+                <a:solidFill>
+                  <a:srgbClr val="281F0F"/>
+                </a:solidFill>
+                <a:latin typeface="Calibri" pitchFamily="34" charset="0"/>
+                <a:ea typeface="Calibri" pitchFamily="34" charset="-122"/>
+                <a:cs typeface="Calibri" pitchFamily="34" charset="-120"/>
+              </a:rPr>
+              <a:t>AWS Lambda</a:t>
+            </a:r>
+            <a:endParaRPr lang="en-US" sz="1250" dirty="0"/>
+          </a:p>
+        </p:txBody>
+      </p:sp>
+      <p:sp>
+        <p:nvSpPr>
+          <p:cNvPr id="20" name="Text 18"/>
+          <p:cNvSpPr/>
+          <p:nvPr/>
+        </p:nvSpPr>
+        <p:spPr>
+          <a:xfrm>
+            <a:off x="6473952" y="3401568"/>
+            <a:ext cx="1499616" cy="457200"/>
+          </a:xfrm>
+          <a:prstGeom prst="rect">
+            <a:avLst/>
+          </a:prstGeom>
+          <a:noFill/>
+          <a:ln/>
+        </p:spPr>
+        <p:txBody>
+          <a:bodyPr wrap="square" lIns="0" tIns="0" rIns="0" bIns="0" rtlCol="0" anchor="ctr"/>
+          <a:lstStyle/>
+          <a:p>
+            <a:pPr algn="ctr" indent="0" marL="0">
+              <a:buNone/>
+            </a:pPr>
+            <a:r>
+              <a:rPr lang="en-US" sz="900" dirty="0">
+                <a:solidFill>
+                  <a:srgbClr val="6E6144"/>
+                </a:solidFill>
+                <a:latin typeface="Calibri" pitchFamily="34" charset="0"/>
+                <a:ea typeface="Calibri" pitchFamily="34" charset="-122"/>
+                <a:cs typeface="Calibri" pitchFamily="34" charset="-120"/>
+              </a:rPr>
+              <a:t>nodejs20 ingest</a:t>
+            </a:r>
+            <a:endParaRPr lang="en-US" sz="900" dirty="0"/>
+          </a:p>
+        </p:txBody>
+      </p:sp>
+      <p:sp>
+        <p:nvSpPr>
+          <p:cNvPr id="21" name="Shape 19"/>
+          <p:cNvSpPr/>
+          <p:nvPr/>
+        </p:nvSpPr>
+        <p:spPr>
+          <a:xfrm>
+            <a:off x="7964424" y="3337560"/>
+            <a:ext cx="164592" cy="0"/>
+          </a:xfrm>
+          <a:prstGeom prst="line">
+            <a:avLst/>
+          </a:prstGeom>
+          <a:noFill/>
+          <a:ln w="20320">
+            <a:solidFill>
+              <a:srgbClr val="D8AE3E"/>
+            </a:solidFill>
+            <a:prstDash val="solid"/>
+            <a:tailEnd type="triangle"/>
+          </a:ln>
+        </p:spPr>
+      </p:sp>
+      <p:sp>
+        <p:nvSpPr>
+          <p:cNvPr id="22" name="Shape 20"/>
+          <p:cNvSpPr/>
+          <p:nvPr/>
+        </p:nvSpPr>
+        <p:spPr>
+          <a:xfrm>
+            <a:off x="8138160" y="2651760"/>
+            <a:ext cx="1463040" cy="1371600"/>
+          </a:xfrm>
+          <a:prstGeom prst="roundRect">
+            <a:avLst>
+              <a:gd name="adj" fmla="val 5333"/>
+            </a:avLst>
+          </a:prstGeom>
+          <a:solidFill>
+            <a:srgbClr val="FFFFFF"/>
+          </a:solidFill>
+          <a:ln w="15240">
+            <a:solidFill>
+              <a:srgbClr val="8A6516"/>
+            </a:solidFill>
+            <a:prstDash val="solid"/>
+          </a:ln>
+        </p:spPr>
+      </p:sp>
+      <p:sp>
+        <p:nvSpPr>
+          <p:cNvPr id="23" name="Text 21"/>
+          <p:cNvSpPr/>
+          <p:nvPr/>
+        </p:nvSpPr>
+        <p:spPr>
+          <a:xfrm>
+            <a:off x="8092440" y="2907792"/>
+            <a:ext cx="1554480" cy="457200"/>
+          </a:xfrm>
+          <a:prstGeom prst="rect">
+            <a:avLst/>
+          </a:prstGeom>
+          <a:noFill/>
+          <a:ln/>
+        </p:spPr>
+        <p:txBody>
+          <a:bodyPr wrap="square" lIns="0" tIns="0" rIns="0" bIns="0" rtlCol="0" anchor="ctr"/>
+          <a:lstStyle/>
+          <a:p>
+            <a:pPr algn="ctr" indent="0" marL="0">
+              <a:buNone/>
+            </a:pPr>
+            <a:r>
+              <a:rPr lang="en-US" sz="1250" b="1" dirty="0">
+                <a:solidFill>
+                  <a:srgbClr val="281F0F"/>
+                </a:solidFill>
+                <a:latin typeface="Calibri" pitchFamily="34" charset="0"/>
+                <a:ea typeface="Calibri" pitchFamily="34" charset="-122"/>
+                <a:cs typeface="Calibri" pitchFamily="34" charset="-120"/>
+              </a:rPr>
+              <a:t>DynamoDB</a:t>
+            </a:r>
+            <a:endParaRPr lang="en-US" sz="1250" dirty="0"/>
+          </a:p>
+        </p:txBody>
+      </p:sp>
+      <p:sp>
+        <p:nvSpPr>
+          <p:cNvPr id="24" name="Text 22"/>
+          <p:cNvSpPr/>
+          <p:nvPr/>
+        </p:nvSpPr>
+        <p:spPr>
+          <a:xfrm>
+            <a:off x="8119872" y="3401568"/>
+            <a:ext cx="1499616" cy="457200"/>
+          </a:xfrm>
+          <a:prstGeom prst="rect">
+            <a:avLst/>
+          </a:prstGeom>
+          <a:noFill/>
+          <a:ln/>
+        </p:spPr>
+        <p:txBody>
+          <a:bodyPr wrap="square" lIns="0" tIns="0" rIns="0" bIns="0" rtlCol="0" anchor="ctr"/>
+          <a:lstStyle/>
+          <a:p>
+            <a:pPr algn="ctr" indent="0" marL="0">
+              <a:buNone/>
+            </a:pPr>
+            <a:r>
+              <a:rPr lang="en-US" sz="900" dirty="0">
+                <a:solidFill>
+                  <a:srgbClr val="6E6144"/>
+                </a:solidFill>
+                <a:latin typeface="Calibri" pitchFamily="34" charset="0"/>
+                <a:ea typeface="Calibri" pitchFamily="34" charset="-122"/>
+                <a:cs typeface="Calibri" pitchFamily="34" charset="-120"/>
+              </a:rPr>
+              <a:t>time-series store</a:t>
+            </a:r>
+            <a:endParaRPr lang="en-US" sz="900" dirty="0"/>
+          </a:p>
+        </p:txBody>
+      </p:sp>
+      <p:sp>
+        <p:nvSpPr>
+          <p:cNvPr id="25" name="Shape 23"/>
+          <p:cNvSpPr/>
+          <p:nvPr/>
+        </p:nvSpPr>
+        <p:spPr>
+          <a:xfrm>
+            <a:off x="9610344" y="3337560"/>
+            <a:ext cx="164592" cy="0"/>
+          </a:xfrm>
+          <a:prstGeom prst="line">
+            <a:avLst/>
+          </a:prstGeom>
+          <a:noFill/>
+          <a:ln w="20320">
+            <a:solidFill>
+              <a:srgbClr val="D8AE3E"/>
+            </a:solidFill>
+            <a:prstDash val="solid"/>
+            <a:tailEnd type="triangle"/>
+          </a:ln>
+        </p:spPr>
+      </p:sp>
+      <p:sp>
+        <p:nvSpPr>
+          <p:cNvPr id="26" name="Shape 24"/>
+          <p:cNvSpPr/>
+          <p:nvPr/>
+        </p:nvSpPr>
+        <p:spPr>
+          <a:xfrm>
+            <a:off x="9784080" y="2651760"/>
+            <a:ext cx="1463040" cy="1371600"/>
+          </a:xfrm>
+          <a:prstGeom prst="roundRect">
+            <a:avLst>
+              <a:gd name="adj" fmla="val 5333"/>
+            </a:avLst>
+          </a:prstGeom>
+          <a:solidFill>
+            <a:srgbClr val="FFFFFF"/>
+          </a:solidFill>
+          <a:ln w="15240">
+            <a:solidFill>
+              <a:srgbClr val="B98A1E"/>
+            </a:solidFill>
+            <a:prstDash val="solid"/>
+          </a:ln>
+        </p:spPr>
+      </p:sp>
+      <p:sp>
+        <p:nvSpPr>
+          <p:cNvPr id="27" name="Text 25"/>
+          <p:cNvSpPr/>
+          <p:nvPr/>
+        </p:nvSpPr>
+        <p:spPr>
+          <a:xfrm>
+            <a:off x="9738360" y="2907792"/>
+            <a:ext cx="1554480" cy="457200"/>
+          </a:xfrm>
+          <a:prstGeom prst="rect">
+            <a:avLst/>
+          </a:prstGeom>
+          <a:noFill/>
+          <a:ln/>
+        </p:spPr>
+        <p:txBody>
+          <a:bodyPr wrap="square" lIns="0" tIns="0" rIns="0" bIns="0" rtlCol="0" anchor="ctr"/>
+          <a:lstStyle/>
+          <a:p>
+            <a:pPr algn="ctr" indent="0" marL="0">
+              <a:buNone/>
+            </a:pPr>
+            <a:r>
+              <a:rPr lang="en-US" sz="1250" b="1" dirty="0">
+                <a:solidFill>
+                  <a:srgbClr val="281F0F"/>
+                </a:solidFill>
+                <a:latin typeface="Calibri" pitchFamily="34" charset="0"/>
+                <a:ea typeface="Calibri" pitchFamily="34" charset="-122"/>
+                <a:cs typeface="Calibri" pitchFamily="34" charset="-120"/>
+              </a:rPr>
+              <a:t>API GW + S3</a:t>
+            </a:r>
+            <a:endParaRPr lang="en-US" sz="1250" dirty="0"/>
+          </a:p>
+        </p:txBody>
+      </p:sp>
+      <p:sp>
+        <p:nvSpPr>
+          <p:cNvPr id="28" name="Text 26"/>
+          <p:cNvSpPr/>
+          <p:nvPr/>
+        </p:nvSpPr>
+        <p:spPr>
+          <a:xfrm>
+            <a:off x="9765792" y="3401568"/>
+            <a:ext cx="1499616" cy="457200"/>
+          </a:xfrm>
+          <a:prstGeom prst="rect">
+            <a:avLst/>
+          </a:prstGeom>
+          <a:noFill/>
+          <a:ln/>
+        </p:spPr>
+        <p:txBody>
+          <a:bodyPr wrap="square" lIns="0" tIns="0" rIns="0" bIns="0" rtlCol="0" anchor="ctr"/>
+          <a:lstStyle/>
+          <a:p>
+            <a:pPr algn="ctr" indent="0" marL="0">
+              <a:buNone/>
+            </a:pPr>
+            <a:r>
+              <a:rPr lang="en-US" sz="900" dirty="0">
+                <a:solidFill>
+                  <a:srgbClr val="6E6144"/>
+                </a:solidFill>
+                <a:latin typeface="Calibri" pitchFamily="34" charset="0"/>
+                <a:ea typeface="Calibri" pitchFamily="34" charset="-122"/>
+                <a:cs typeface="Calibri" pitchFamily="34" charset="-120"/>
+              </a:rPr>
+              <a:t>colony verdict cards</a:t>
+            </a:r>
+            <a:endParaRPr lang="en-US" sz="900" dirty="0"/>
+          </a:p>
+        </p:txBody>
+      </p:sp>
+      <p:sp>
+        <p:nvSpPr>
+          <p:cNvPr id="29" name="Text 27"/>
           <p:cNvSpPr/>
           <p:nvPr/>
         </p:nvSpPr>
@@ -2601,12 +2585,12 @@
         </p:nvSpPr>
         <p:spPr>
           <a:xfrm>
-            <a:off x="640080" y="1874520"/>
-            <a:ext cx="3502152" cy="3657600"/>
+            <a:off x="640080" y="1828800"/>
+            <a:ext cx="10881360" cy="1371600"/>
           </a:xfrm>
           <a:prstGeom prst="roundRect">
             <a:avLst>
-              <a:gd name="adj" fmla="val 2611"/>
+              <a:gd name="adj" fmla="val 6667"/>
             </a:avLst>
           </a:prstGeom>
           <a:solidFill>
@@ -2628,8 +2612,8 @@
         </p:nvSpPr>
         <p:spPr>
           <a:xfrm>
-            <a:off x="914400" y="2194560"/>
-            <a:ext cx="640080" cy="640080"/>
+            <a:off x="960120" y="2203704"/>
+            <a:ext cx="621792" cy="621792"/>
           </a:xfrm>
           <a:prstGeom prst="ellipse">
             <a:avLst/>
@@ -2648,8 +2632,8 @@
         </p:nvSpPr>
         <p:spPr>
           <a:xfrm>
-            <a:off x="914400" y="2194560"/>
-            <a:ext cx="640080" cy="640080"/>
+            <a:off x="960120" y="2203704"/>
+            <a:ext cx="621792" cy="621792"/>
           </a:xfrm>
           <a:prstGeom prst="rect">
             <a:avLst/>
@@ -2665,7 +2649,7 @@
               <a:buNone/>
             </a:pPr>
             <a:r>
-              <a:rPr lang="en-US" sz="2400" b="1" dirty="0">
+              <a:rPr lang="en-US" sz="2200" b="1" dirty="0">
                 <a:solidFill>
                   <a:srgbClr val="FFFFFF"/>
                 </a:solidFill>
@@ -2675,7 +2659,7 @@
               </a:rPr>
               <a:t>1</a:t>
             </a:r>
-            <a:endParaRPr lang="en-US" sz="2400" dirty="0"/>
+            <a:endParaRPr lang="en-US" sz="2200" dirty="0"/>
           </a:p>
         </p:txBody>
       </p:sp>
@@ -2687,8 +2671,8 @@
         </p:nvSpPr>
         <p:spPr>
           <a:xfrm>
-            <a:off x="914400" y="3017520"/>
-            <a:ext cx="2953512" cy="822960"/>
+            <a:off x="1828800" y="2029968"/>
+            <a:ext cx="9418320" cy="411480"/>
           </a:xfrm>
           <a:prstGeom prst="rect">
             <a:avLst/>
@@ -2726,8 +2710,8 @@
         </p:nvSpPr>
         <p:spPr>
           <a:xfrm>
-            <a:off x="914400" y="3794760"/>
-            <a:ext cx="2953512" cy="1554480"/>
+            <a:off x="1828800" y="2450592"/>
+            <a:ext cx="9418320" cy="594360"/>
           </a:xfrm>
           <a:prstGeom prst="rect">
             <a:avLst/>
@@ -2768,12 +2752,12 @@
         </p:nvSpPr>
         <p:spPr>
           <a:xfrm>
-            <a:off x="4416552" y="1874520"/>
-            <a:ext cx="3502152" cy="3657600"/>
+            <a:off x="640080" y="3346704"/>
+            <a:ext cx="10881360" cy="1371600"/>
           </a:xfrm>
           <a:prstGeom prst="roundRect">
             <a:avLst>
-              <a:gd name="adj" fmla="val 2611"/>
+              <a:gd name="adj" fmla="val 6667"/>
             </a:avLst>
           </a:prstGeom>
           <a:solidFill>
@@ -2795,8 +2779,8 @@
         </p:nvSpPr>
         <p:spPr>
           <a:xfrm>
-            <a:off x="4690872" y="2194560"/>
-            <a:ext cx="640080" cy="640080"/>
+            <a:off x="960120" y="3721608"/>
+            <a:ext cx="621792" cy="621792"/>
           </a:xfrm>
           <a:prstGeom prst="ellipse">
             <a:avLst/>
@@ -2815,8 +2799,8 @@
         </p:nvSpPr>
         <p:spPr>
           <a:xfrm>
-            <a:off x="4690872" y="2194560"/>
-            <a:ext cx="640080" cy="640080"/>
+            <a:off x="960120" y="3721608"/>
+            <a:ext cx="621792" cy="621792"/>
           </a:xfrm>
           <a:prstGeom prst="rect">
             <a:avLst/>
@@ -2832,7 +2816,7 @@
               <a:buNone/>
             </a:pPr>
             <a:r>
-              <a:rPr lang="en-US" sz="2400" b="1" dirty="0">
+              <a:rPr lang="en-US" sz="2200" b="1" dirty="0">
                 <a:solidFill>
                   <a:srgbClr val="FFFFFF"/>
                 </a:solidFill>
@@ -2842,7 +2826,7 @@
               </a:rPr>
               <a:t>2</a:t>
             </a:r>
-            <a:endParaRPr lang="en-US" sz="2400" dirty="0"/>
+            <a:endParaRPr lang="en-US" sz="2200" dirty="0"/>
           </a:p>
         </p:txBody>
       </p:sp>
@@ -2854,8 +2838,8 @@
         </p:nvSpPr>
         <p:spPr>
           <a:xfrm>
-            <a:off x="4690872" y="3017520"/>
-            <a:ext cx="2953512" cy="822960"/>
+            <a:off x="1828800" y="3547872"/>
+            <a:ext cx="9418320" cy="411480"/>
           </a:xfrm>
           <a:prstGeom prst="rect">
             <a:avLst/>
@@ -2893,8 +2877,8 @@
         </p:nvSpPr>
         <p:spPr>
           <a:xfrm>
-            <a:off x="4690872" y="3794760"/>
-            <a:ext cx="2953512" cy="1554480"/>
+            <a:off x="1828800" y="3968496"/>
+            <a:ext cx="9418320" cy="594360"/>
           </a:xfrm>
           <a:prstGeom prst="rect">
             <a:avLst/>
@@ -2935,12 +2919,12 @@
         </p:nvSpPr>
         <p:spPr>
           <a:xfrm>
-            <a:off x="8193024" y="1874520"/>
-            <a:ext cx="3502152" cy="3657600"/>
+            <a:off x="640080" y="4864608"/>
+            <a:ext cx="10881360" cy="1371600"/>
           </a:xfrm>
           <a:prstGeom prst="roundRect">
             <a:avLst>
-              <a:gd name="adj" fmla="val 2611"/>
+              <a:gd name="adj" fmla="val 6667"/>
             </a:avLst>
           </a:prstGeom>
           <a:solidFill>
@@ -2962,8 +2946,8 @@
         </p:nvSpPr>
         <p:spPr>
           <a:xfrm>
-            <a:off x="8467344" y="2194560"/>
-            <a:ext cx="640080" cy="640080"/>
+            <a:off x="960120" y="5239512"/>
+            <a:ext cx="621792" cy="621792"/>
           </a:xfrm>
           <a:prstGeom prst="ellipse">
             <a:avLst/>
@@ -2982,8 +2966,8 @@
         </p:nvSpPr>
         <p:spPr>
           <a:xfrm>
-            <a:off x="8467344" y="2194560"/>
-            <a:ext cx="640080" cy="640080"/>
+            <a:off x="960120" y="5239512"/>
+            <a:ext cx="621792" cy="621792"/>
           </a:xfrm>
           <a:prstGeom prst="rect">
             <a:avLst/>
@@ -2999,7 +2983,7 @@
               <a:buNone/>
             </a:pPr>
             <a:r>
-              <a:rPr lang="en-US" sz="2400" b="1" dirty="0">
+              <a:rPr lang="en-US" sz="2200" b="1" dirty="0">
                 <a:solidFill>
                   <a:srgbClr val="FFFFFF"/>
                 </a:solidFill>
@@ -3009,7 +2993,7 @@
               </a:rPr>
               <a:t>3</a:t>
             </a:r>
-            <a:endParaRPr lang="en-US" sz="2400" dirty="0"/>
+            <a:endParaRPr lang="en-US" sz="2200" dirty="0"/>
           </a:p>
         </p:txBody>
       </p:sp>
@@ -3021,8 +3005,8 @@
         </p:nvSpPr>
         <p:spPr>
           <a:xfrm>
-            <a:off x="8467344" y="3017520"/>
-            <a:ext cx="2953512" cy="822960"/>
+            <a:off x="1828800" y="5065776"/>
+            <a:ext cx="9418320" cy="411480"/>
           </a:xfrm>
           <a:prstGeom prst="rect">
             <a:avLst/>
@@ -3060,8 +3044,8 @@
         </p:nvSpPr>
         <p:spPr>
           <a:xfrm>
-            <a:off x="8467344" y="3794760"/>
-            <a:ext cx="2953512" cy="1554480"/>
+            <a:off x="1828800" y="5486400"/>
+            <a:ext cx="9418320" cy="594360"/>
           </a:xfrm>
           <a:prstGeom prst="rect">
             <a:avLst/>
@@ -3089,45 +3073,6 @@
                 <a:cs typeface="Calibri" pitchFamily="34" charset="-120"/>
               </a:rPr>
               <a:t>The acoustic swarming-precursor rule flags a rising hum above 350 Hz before the weight even moves.</a:t>
-            </a:r>
-            <a:endParaRPr lang="en-US" sz="1300" dirty="0"/>
-          </a:p>
-        </p:txBody>
-      </p:sp>
-      <p:sp>
-        <p:nvSpPr>
-          <p:cNvPr id="19" name="Text 17"/>
-          <p:cNvSpPr/>
-          <p:nvPr/>
-        </p:nvSpPr>
-        <p:spPr>
-          <a:xfrm>
-            <a:off x="640080" y="6263640"/>
-            <a:ext cx="10972800" cy="365760"/>
-          </a:xfrm>
-          <a:prstGeom prst="rect">
-            <a:avLst/>
-          </a:prstGeom>
-          <a:noFill/>
-          <a:ln/>
-        </p:spPr>
-        <p:txBody>
-          <a:bodyPr wrap="square" rtlCol="0" anchor="ctr"/>
-          <a:lstStyle/>
-          <a:p>
-            <a:pPr indent="0" marL="0">
-              <a:buNone/>
-            </a:pPr>
-            <a:r>
-              <a:rPr lang="en-US" sz="1300" i="1" dirty="0">
-                <a:solidFill>
-                  <a:srgbClr val="D8AE3E"/>
-                </a:solidFill>
-                <a:latin typeface="Calibri" pitchFamily="34" charset="0"/>
-                <a:ea typeface="Calibri" pitchFamily="34" charset="-122"/>
-                <a:cs typeface="Calibri" pitchFamily="34" charset="-120"/>
-              </a:rPr>
-              <a:t>Switch to the live dashboard here — backup video ready.</a:t>
             </a:r>
             <a:endParaRPr lang="en-US" sz="1300" dirty="0"/>
           </a:p>
@@ -3206,59 +3151,24 @@
       </p:sp>
       <p:sp>
         <p:nvSpPr>
-          <p:cNvPr id="3" name="Text 1"/>
-          <p:cNvSpPr/>
-          <p:nvPr/>
-        </p:nvSpPr>
-        <p:spPr>
-          <a:xfrm>
-            <a:off x="731520" y="1965960"/>
-            <a:ext cx="2377440" cy="548640"/>
-          </a:xfrm>
-          <a:prstGeom prst="rect">
-            <a:avLst/>
-          </a:prstGeom>
-          <a:noFill/>
-          <a:ln/>
-        </p:spPr>
-        <p:txBody>
-          <a:bodyPr wrap="square" lIns="0" tIns="0" rIns="0" bIns="0" rtlCol="0" anchor="ctr"/>
-          <a:lstStyle/>
-          <a:p>
-            <a:pPr indent="0" marL="0">
-              <a:buNone/>
-            </a:pPr>
-            <a:r>
-              <a:rPr lang="en-US" sz="2300" b="1" dirty="0">
-                <a:solidFill>
-                  <a:srgbClr val="E7C24A"/>
-                </a:solidFill>
-                <a:latin typeface="Century Schoolbook" pitchFamily="34" charset="0"/>
-                <a:ea typeface="Century Schoolbook" pitchFamily="34" charset="-122"/>
-                <a:cs typeface="Century Schoolbook" pitchFamily="34" charset="-120"/>
-              </a:rPr>
-              <a:t>Problem</a:t>
-            </a:r>
-            <a:endParaRPr lang="en-US" sz="2300" dirty="0"/>
-          </a:p>
-        </p:txBody>
-      </p:sp>
-      <p:sp>
-        <p:nvSpPr>
-          <p:cNvPr id="4" name="Shape 2"/>
-          <p:cNvSpPr/>
-          <p:nvPr/>
-        </p:nvSpPr>
-        <p:spPr>
-          <a:xfrm>
-            <a:off x="3200400" y="1920240"/>
-            <a:ext cx="0" cy="1783080"/>
-          </a:xfrm>
-          <a:prstGeom prst="line">
-            <a:avLst/>
-          </a:prstGeom>
-          <a:noFill/>
-          <a:ln w="31750">
+          <p:cNvPr id="3" name="Shape 1"/>
+          <p:cNvSpPr/>
+          <p:nvPr/>
+        </p:nvSpPr>
+        <p:spPr>
+          <a:xfrm>
+            <a:off x="640080" y="1874520"/>
+            <a:ext cx="4937760" cy="4160520"/>
+          </a:xfrm>
+          <a:prstGeom prst="roundRect">
+            <a:avLst>
+              <a:gd name="adj" fmla="val 2198"/>
+            </a:avLst>
+          </a:prstGeom>
+          <a:solidFill>
+            <a:srgbClr val="F7F2E3"/>
+          </a:solidFill>
+          <a:ln w="19050">
             <a:solidFill>
               <a:srgbClr val="E7C24A"/>
             </a:solidFill>
@@ -3268,14 +3178,53 @@
       </p:sp>
       <p:sp>
         <p:nvSpPr>
+          <p:cNvPr id="4" name="Text 2"/>
+          <p:cNvSpPr/>
+          <p:nvPr/>
+        </p:nvSpPr>
+        <p:spPr>
+          <a:xfrm>
+            <a:off x="960120" y="2103120"/>
+            <a:ext cx="3657600" cy="457200"/>
+          </a:xfrm>
+          <a:prstGeom prst="rect">
+            <a:avLst/>
+          </a:prstGeom>
+          <a:noFill/>
+          <a:ln/>
+        </p:spPr>
+        <p:txBody>
+          <a:bodyPr wrap="square" lIns="0" tIns="0" rIns="0" bIns="0" rtlCol="0" anchor="ctr"/>
+          <a:lstStyle/>
+          <a:p>
+            <a:pPr indent="0" marL="0">
+              <a:buNone/>
+            </a:pPr>
+            <a:r>
+              <a:rPr lang="en-US" sz="1900" b="1" dirty="0">
+                <a:solidFill>
+                  <a:srgbClr val="E7C24A"/>
+                </a:solidFill>
+                <a:latin typeface="Century Schoolbook" pitchFamily="34" charset="0"/>
+                <a:ea typeface="Century Schoolbook" pitchFamily="34" charset="-122"/>
+                <a:cs typeface="Century Schoolbook" pitchFamily="34" charset="-120"/>
+              </a:rPr>
+              <a:t>Problem</a:t>
+            </a:r>
+            <a:endParaRPr lang="en-US" sz="1900" dirty="0"/>
+          </a:p>
+        </p:txBody>
+      </p:sp>
+      <p:sp>
+        <p:nvSpPr>
           <p:cNvPr id="5" name="Text 3"/>
           <p:cNvSpPr/>
           <p:nvPr/>
         </p:nvSpPr>
         <p:spPr>
           <a:xfrm>
-            <a:off x="3474720" y="1920240"/>
-            <a:ext cx="7955280" cy="1920240"/>
+            <a:off x="960120" y="2651760"/>
+            <a:ext cx="4343400" cy="3200400"/>
           </a:xfrm>
           <a:prstGeom prst="rect">
             <a:avLst/>
@@ -3294,7 +3243,7 @@
               <a:buNone/>
             </a:pPr>
             <a:r>
-              <a:rPr lang="en-US" sz="1450" dirty="0">
+              <a:rPr lang="en-US" sz="1350" dirty="0">
                 <a:solidFill>
                   <a:srgbClr val="281F0F"/>
                 </a:solidFill>
@@ -3304,65 +3253,30 @@
               </a:rPr>
               <a:t>A beekeeper does not want five live graphs per hive; the useful answer is whether a colony is thriving, stressed, or about to swarm. But a single 10-second window is noisy — bees are loud and entrance traffic spikes — so a naive per-reading rule cries wolf, and one reading cannot tell a rising trend from a blip.</a:t>
             </a:r>
-            <a:endParaRPr lang="en-US" sz="1450" dirty="0"/>
-          </a:p>
-        </p:txBody>
-      </p:sp>
-      <p:sp>
-        <p:nvSpPr>
-          <p:cNvPr id="6" name="Text 4"/>
-          <p:cNvSpPr/>
-          <p:nvPr/>
-        </p:nvSpPr>
-        <p:spPr>
-          <a:xfrm>
-            <a:off x="731520" y="4114800"/>
-            <a:ext cx="2377440" cy="548640"/>
-          </a:xfrm>
-          <a:prstGeom prst="rect">
-            <a:avLst/>
-          </a:prstGeom>
-          <a:noFill/>
-          <a:ln/>
-        </p:spPr>
-        <p:txBody>
-          <a:bodyPr wrap="square" lIns="0" tIns="0" rIns="0" bIns="0" rtlCol="0" anchor="ctr"/>
-          <a:lstStyle/>
-          <a:p>
-            <a:pPr indent="0" marL="0">
-              <a:buNone/>
-            </a:pPr>
-            <a:r>
-              <a:rPr lang="en-US" sz="2300" b="1" dirty="0">
-                <a:solidFill>
-                  <a:srgbClr val="B98A1E"/>
-                </a:solidFill>
-                <a:latin typeface="Century Schoolbook" pitchFamily="34" charset="0"/>
-                <a:ea typeface="Century Schoolbook" pitchFamily="34" charset="-122"/>
-                <a:cs typeface="Century Schoolbook" pitchFamily="34" charset="-120"/>
-              </a:rPr>
-              <a:t>Solution</a:t>
-            </a:r>
-            <a:endParaRPr lang="en-US" sz="2300" dirty="0"/>
-          </a:p>
-        </p:txBody>
-      </p:sp>
-      <p:sp>
-        <p:nvSpPr>
-          <p:cNvPr id="7" name="Shape 5"/>
-          <p:cNvSpPr/>
-          <p:nvPr/>
-        </p:nvSpPr>
-        <p:spPr>
-          <a:xfrm>
-            <a:off x="3200400" y="4069080"/>
-            <a:ext cx="0" cy="1783080"/>
-          </a:xfrm>
-          <a:prstGeom prst="line">
-            <a:avLst/>
-          </a:prstGeom>
-          <a:noFill/>
-          <a:ln w="31750">
+            <a:endParaRPr lang="en-US" sz="1350" dirty="0"/>
+          </a:p>
+        </p:txBody>
+      </p:sp>
+      <p:sp>
+        <p:nvSpPr>
+          <p:cNvPr id="6" name="Shape 4"/>
+          <p:cNvSpPr/>
+          <p:nvPr/>
+        </p:nvSpPr>
+        <p:spPr>
+          <a:xfrm>
+            <a:off x="6611112" y="1874520"/>
+            <a:ext cx="4937760" cy="4160520"/>
+          </a:xfrm>
+          <a:prstGeom prst="roundRect">
+            <a:avLst>
+              <a:gd name="adj" fmla="val 2198"/>
+            </a:avLst>
+          </a:prstGeom>
+          <a:solidFill>
+            <a:srgbClr val="F7F2E3"/>
+          </a:solidFill>
+          <a:ln w="19050">
             <a:solidFill>
               <a:srgbClr val="B98A1E"/>
             </a:solidFill>
@@ -3372,14 +3286,53 @@
       </p:sp>
       <p:sp>
         <p:nvSpPr>
+          <p:cNvPr id="7" name="Text 5"/>
+          <p:cNvSpPr/>
+          <p:nvPr/>
+        </p:nvSpPr>
+        <p:spPr>
+          <a:xfrm>
+            <a:off x="6931152" y="2103120"/>
+            <a:ext cx="3657600" cy="457200"/>
+          </a:xfrm>
+          <a:prstGeom prst="rect">
+            <a:avLst/>
+          </a:prstGeom>
+          <a:noFill/>
+          <a:ln/>
+        </p:spPr>
+        <p:txBody>
+          <a:bodyPr wrap="square" lIns="0" tIns="0" rIns="0" bIns="0" rtlCol="0" anchor="ctr"/>
+          <a:lstStyle/>
+          <a:p>
+            <a:pPr indent="0" marL="0">
+              <a:buNone/>
+            </a:pPr>
+            <a:r>
+              <a:rPr lang="en-US" sz="1900" b="1" dirty="0">
+                <a:solidFill>
+                  <a:srgbClr val="B98A1E"/>
+                </a:solidFill>
+                <a:latin typeface="Century Schoolbook" pitchFamily="34" charset="0"/>
+                <a:ea typeface="Century Schoolbook" pitchFamily="34" charset="-122"/>
+                <a:cs typeface="Century Schoolbook" pitchFamily="34" charset="-120"/>
+              </a:rPr>
+              <a:t>Solution</a:t>
+            </a:r>
+            <a:endParaRPr lang="en-US" sz="1900" dirty="0"/>
+          </a:p>
+        </p:txBody>
+      </p:sp>
+      <p:sp>
+        <p:nvSpPr>
           <p:cNvPr id="8" name="Text 6"/>
           <p:cNvSpPr/>
           <p:nvPr/>
         </p:nvSpPr>
         <p:spPr>
           <a:xfrm>
-            <a:off x="3474720" y="4069080"/>
-            <a:ext cx="7955280" cy="1920240"/>
+            <a:off x="6931152" y="2651760"/>
+            <a:ext cx="4343400" cy="3200400"/>
           </a:xfrm>
           <a:prstGeom prst="rect">
             <a:avLst/>
@@ -3398,7 +3351,7 @@
               <a:buNone/>
             </a:pPr>
             <a:r>
-              <a:rPr lang="en-US" sz="1450" dirty="0">
+              <a:rPr lang="en-US" sz="1350" dirty="0">
                 <a:solidFill>
                   <a:srgbClr val="281F0F"/>
                 </a:solidFill>
@@ -3408,9 +3361,29 @@
               </a:rPr>
               <a:t>Rules score the window mean or minimum, never a single sample; then the read tier reads a short history of recent windows and reduces it to a weight trend and a brood-thermal state, composed into one sentence per apiary. The judgement lives in the read tier, where that history is already at hand, so the dashboard says "weight rising, brood temperature has breached a safe threshold" rather than showing a number to interpret.</a:t>
             </a:r>
-            <a:endParaRPr lang="en-US" sz="1450" dirty="0"/>
-          </a:p>
-        </p:txBody>
+            <a:endParaRPr lang="en-US" sz="1350" dirty="0"/>
+          </a:p>
+        </p:txBody>
+      </p:sp>
+      <p:sp>
+        <p:nvSpPr>
+          <p:cNvPr id="9" name="Shape 7"/>
+          <p:cNvSpPr/>
+          <p:nvPr/>
+        </p:nvSpPr>
+        <p:spPr>
+          <a:xfrm>
+            <a:off x="5669280" y="3703320"/>
+            <a:ext cx="841248" cy="512064"/>
+          </a:xfrm>
+          <a:prstGeom prst="rightArrow">
+            <a:avLst/>
+          </a:prstGeom>
+          <a:solidFill>
+            <a:srgbClr val="8A6516"/>
+          </a:solidFill>
+          <a:ln/>
+        </p:spPr>
       </p:sp>
     </p:spTree>
   </p:cSld>

--- a/ppt/YashaswiniPenumarthi_X24262404_beehive-apiary-monitoring.pptx
+++ b/ppt/YashaswiniPenumarthi_X24262404_beehive-apiary-monitoring.pptx
@@ -1279,14 +1279,9 @@
             </a:avLst>
           </a:prstGeom>
           <a:solidFill>
-            <a:srgbClr val="342914"/>
-          </a:solidFill>
-          <a:ln w="12700">
-            <a:solidFill>
-              <a:srgbClr val="E7C24A"/>
-            </a:solidFill>
-            <a:prstDash val="solid"/>
-          </a:ln>
+            <a:srgbClr val="B98A1E"/>
+          </a:solidFill>
+          <a:ln/>
         </p:spPr>
       </p:sp>
       <p:sp>
@@ -1316,7 +1311,7 @@
             <a:r>
               <a:rPr lang="en-US" sz="1350" b="1" dirty="0">
                 <a:solidFill>
-                  <a:srgbClr val="E7C24A"/>
+                  <a:srgbClr val="2A2110"/>
                 </a:solidFill>
                 <a:latin typeface="Calibri" pitchFamily="34" charset="0"/>
                 <a:ea typeface="Calibri" pitchFamily="34" charset="-122"/>
@@ -1345,14 +1340,9 @@
             </a:avLst>
           </a:prstGeom>
           <a:solidFill>
-            <a:srgbClr val="342914"/>
-          </a:solidFill>
-          <a:ln w="12700">
-            <a:solidFill>
-              <a:srgbClr val="E7C24A"/>
-            </a:solidFill>
-            <a:prstDash val="solid"/>
-          </a:ln>
+            <a:srgbClr val="B98A1E"/>
+          </a:solidFill>
+          <a:ln/>
         </p:spPr>
       </p:sp>
       <p:sp>
@@ -1382,7 +1372,7 @@
             <a:r>
               <a:rPr lang="en-US" sz="1350" b="1" dirty="0">
                 <a:solidFill>
-                  <a:srgbClr val="E7C24A"/>
+                  <a:srgbClr val="2A2110"/>
                 </a:solidFill>
                 <a:latin typeface="Calibri" pitchFamily="34" charset="0"/>
                 <a:ea typeface="Calibri" pitchFamily="34" charset="-122"/>
@@ -1411,14 +1401,9 @@
             </a:avLst>
           </a:prstGeom>
           <a:solidFill>
-            <a:srgbClr val="342914"/>
-          </a:solidFill>
-          <a:ln w="12700">
-            <a:solidFill>
-              <a:srgbClr val="E7C24A"/>
-            </a:solidFill>
-            <a:prstDash val="solid"/>
-          </a:ln>
+            <a:srgbClr val="B98A1E"/>
+          </a:solidFill>
+          <a:ln/>
         </p:spPr>
       </p:sp>
       <p:sp>
@@ -1448,7 +1433,7 @@
             <a:r>
               <a:rPr lang="en-US" sz="1350" b="1" dirty="0">
                 <a:solidFill>
-                  <a:srgbClr val="E7C24A"/>
+                  <a:srgbClr val="2A2110"/>
                 </a:solidFill>
                 <a:latin typeface="Calibri" pitchFamily="34" charset="0"/>
                 <a:ea typeface="Calibri" pitchFamily="34" charset="-122"/>
@@ -1484,17 +1469,6 @@
             <a:pPr algn="ctr" indent="0" marL="0">
               <a:buNone/>
             </a:pPr>
-            <a:r>
-              <a:rPr lang="en-US" sz="1300" dirty="0">
-                <a:solidFill>
-                  <a:srgbClr val="6E6144"/>
-                </a:solidFill>
-                <a:latin typeface="Calibri" pitchFamily="34" charset="0"/>
-                <a:ea typeface="Calibri" pitchFamily="34" charset="-122"/>
-                <a:cs typeface="Calibri" pitchFamily="34" charset="-120"/>
-              </a:rPr>
-              <a:t>Fog &amp; Edge Computing (H9FECC)   ·   deployed live on AWS</a:t>
-            </a:r>
             <a:endParaRPr lang="en-US" sz="1300" dirty="0"/>
           </a:p>
         </p:txBody>

--- a/ppt/YashaswiniPenumarthi_X24262404_beehive-apiary-monitoring.pptx
+++ b/ppt/YashaswiniPenumarthi_X24262404_beehive-apiary-monitoring.pptx
@@ -1124,7 +1124,7 @@
     <p:bg>
       <p:bgPr>
         <a:solidFill>
-          <a:srgbClr val="2A2110"/>
+          <a:srgbClr val="F4E8CE"/>
         </a:solidFill>
       </p:bgPr>
     </p:bg>
@@ -1144,14 +1144,96 @@
       </p:grpSpPr>
       <p:sp>
         <p:nvSpPr>
-          <p:cNvPr id="2" name="Text 0"/>
-          <p:cNvSpPr/>
-          <p:nvPr/>
-        </p:nvSpPr>
-        <p:spPr>
-          <a:xfrm>
-            <a:off x="548640" y="1051560"/>
-            <a:ext cx="11064240" cy="1188720"/>
+          <p:cNvPr id="2" name="Shape 0"/>
+          <p:cNvSpPr/>
+          <p:nvPr/>
+        </p:nvSpPr>
+        <p:spPr>
+          <a:xfrm>
+            <a:off x="457200" y="457200"/>
+            <a:ext cx="274320" cy="274320"/>
+          </a:xfrm>
+          <a:prstGeom prst="rect">
+            <a:avLst/>
+          </a:prstGeom>
+          <a:solidFill>
+            <a:srgbClr val="A35A12"/>
+          </a:solidFill>
+          <a:ln/>
+        </p:spPr>
+      </p:sp>
+      <p:sp>
+        <p:nvSpPr>
+          <p:cNvPr id="3" name="Shape 1"/>
+          <p:cNvSpPr/>
+          <p:nvPr/>
+        </p:nvSpPr>
+        <p:spPr>
+          <a:xfrm>
+            <a:off x="11460175" y="6126480"/>
+            <a:ext cx="274320" cy="274320"/>
+          </a:xfrm>
+          <a:prstGeom prst="rect">
+            <a:avLst/>
+          </a:prstGeom>
+          <a:solidFill>
+            <a:srgbClr val="A35A12"/>
+          </a:solidFill>
+          <a:ln/>
+        </p:spPr>
+      </p:sp>
+      <p:sp>
+        <p:nvSpPr>
+          <p:cNvPr id="4" name="Text 2"/>
+          <p:cNvSpPr/>
+          <p:nvPr/>
+        </p:nvSpPr>
+        <p:spPr>
+          <a:xfrm>
+            <a:off x="758952" y="1645920"/>
+            <a:ext cx="10637215" cy="1645920"/>
+          </a:xfrm>
+          <a:prstGeom prst="rect">
+            <a:avLst/>
+          </a:prstGeom>
+          <a:noFill/>
+          <a:ln/>
+        </p:spPr>
+        <p:txBody>
+          <a:bodyPr wrap="square" rtlCol="0" anchor="t"/>
+          <a:lstStyle/>
+          <a:p>
+            <a:pPr indent="0" marL="0">
+              <a:lnSpc>
+                <a:spcPct val="98000"/>
+              </a:lnSpc>
+              <a:buNone/>
+            </a:pPr>
+            <a:r>
+              <a:rPr lang="en-US" sz="3800" b="1" dirty="0">
+                <a:solidFill>
+                  <a:srgbClr val="3B2712"/>
+                </a:solidFill>
+                <a:latin typeface="Century Gothic" pitchFamily="34" charset="0"/>
+                <a:ea typeface="Century Gothic" pitchFamily="34" charset="-122"/>
+                <a:cs typeface="Century Gothic" pitchFamily="34" charset="-120"/>
+              </a:rPr>
+              <a:t>Beehive &amp; Apiary Health Monitoring</a:t>
+            </a:r>
+            <a:endParaRPr lang="en-US" sz="3800" dirty="0"/>
+          </a:p>
+        </p:txBody>
+      </p:sp>
+      <p:sp>
+        <p:nvSpPr>
+          <p:cNvPr id="5" name="Text 3"/>
+          <p:cNvSpPr/>
+          <p:nvPr/>
+        </p:nvSpPr>
+        <p:spPr>
+          <a:xfrm>
+            <a:off x="777240" y="3337560"/>
+            <a:ext cx="10637215" cy="365760"/>
           </a:xfrm>
           <a:prstGeom prst="rect">
             <a:avLst/>
@@ -1163,52 +1245,13 @@
           <a:bodyPr wrap="square" rtlCol="0" anchor="ctr"/>
           <a:lstStyle/>
           <a:p>
-            <a:pPr algn="ctr" indent="0" marL="0">
-              <a:buNone/>
-            </a:pPr>
-            <a:r>
-              <a:rPr lang="en-US" sz="3600" b="1" dirty="0">
-                <a:solidFill>
-                  <a:srgbClr val="FFFFFF"/>
-                </a:solidFill>
-                <a:latin typeface="Century Schoolbook" pitchFamily="34" charset="0"/>
-                <a:ea typeface="Century Schoolbook" pitchFamily="34" charset="-122"/>
-                <a:cs typeface="Century Schoolbook" pitchFamily="34" charset="-120"/>
-              </a:rPr>
-              <a:t>Beehive &amp; Apiary Health Monitoring</a:t>
-            </a:r>
-            <a:endParaRPr lang="en-US" sz="3600" dirty="0"/>
-          </a:p>
-        </p:txBody>
-      </p:sp>
-      <p:sp>
-        <p:nvSpPr>
-          <p:cNvPr id="3" name="Text 1"/>
-          <p:cNvSpPr/>
-          <p:nvPr/>
-        </p:nvSpPr>
-        <p:spPr>
-          <a:xfrm>
-            <a:off x="548640" y="2286000"/>
-            <a:ext cx="11064240" cy="365760"/>
-          </a:xfrm>
-          <a:prstGeom prst="rect">
-            <a:avLst/>
-          </a:prstGeom>
-          <a:noFill/>
-          <a:ln/>
-        </p:spPr>
-        <p:txBody>
-          <a:bodyPr wrap="square" rtlCol="0" anchor="ctr"/>
-          <a:lstStyle/>
-          <a:p>
-            <a:pPr algn="ctr" indent="0" marL="0">
-              <a:buNone/>
-            </a:pPr>
-            <a:r>
-              <a:rPr lang="en-US" sz="1600" dirty="0">
-                <a:solidFill>
-                  <a:srgbClr val="D8AE3E"/>
+            <a:pPr indent="0" marL="0">
+              <a:buNone/>
+            </a:pPr>
+            <a:r>
+              <a:rPr lang="en-US" sz="1450" dirty="0">
+                <a:solidFill>
+                  <a:srgbClr val="5F6B74"/>
                 </a:solidFill>
                 <a:latin typeface="Calibri" pitchFamily="34" charset="0"/>
                 <a:ea typeface="Calibri" pitchFamily="34" charset="-122"/>
@@ -1216,41 +1259,41 @@
               </a:rPr>
               <a:t>Yashaswini Penumarthi   ·   X24262404</a:t>
             </a:r>
-            <a:endParaRPr lang="en-US" sz="1600" dirty="0"/>
-          </a:p>
-        </p:txBody>
-      </p:sp>
-      <p:sp>
-        <p:nvSpPr>
-          <p:cNvPr id="4" name="Text 2"/>
-          <p:cNvSpPr/>
-          <p:nvPr/>
-        </p:nvSpPr>
-        <p:spPr>
-          <a:xfrm>
-            <a:off x="1463040" y="2926080"/>
-            <a:ext cx="9235440" cy="1371600"/>
-          </a:xfrm>
-          <a:prstGeom prst="rect">
-            <a:avLst/>
-          </a:prstGeom>
-          <a:noFill/>
-          <a:ln/>
-        </p:spPr>
-        <p:txBody>
-          <a:bodyPr wrap="square" rtlCol="0" anchor="ctr"/>
-          <a:lstStyle/>
-          <a:p>
-            <a:pPr algn="ctr" indent="0" marL="0">
+            <a:endParaRPr lang="en-US" sz="1450" dirty="0"/>
+          </a:p>
+        </p:txBody>
+      </p:sp>
+      <p:sp>
+        <p:nvSpPr>
+          <p:cNvPr id="6" name="Text 4"/>
+          <p:cNvSpPr/>
+          <p:nvPr/>
+        </p:nvSpPr>
+        <p:spPr>
+          <a:xfrm>
+            <a:off x="777240" y="3931920"/>
+            <a:ext cx="8138160" cy="1325880"/>
+          </a:xfrm>
+          <a:prstGeom prst="rect">
+            <a:avLst/>
+          </a:prstGeom>
+          <a:noFill/>
+          <a:ln/>
+        </p:spPr>
+        <p:txBody>
+          <a:bodyPr wrap="square" rtlCol="0" anchor="t"/>
+          <a:lstStyle/>
+          <a:p>
+            <a:pPr indent="0" marL="0">
               <a:lnSpc>
-                <a:spcPct val="110000"/>
+                <a:spcPct val="130000"/>
               </a:lnSpc>
               <a:buNone/>
             </a:pPr>
             <a:r>
-              <a:rPr lang="en-US" sz="2000" dirty="0">
-                <a:solidFill>
-                  <a:srgbClr val="EBDCB6"/>
+              <a:rPr lang="en-US" sz="1400" dirty="0">
+                <a:solidFill>
+                  <a:srgbClr val="3B2712"/>
                 </a:solidFill>
                 <a:latin typeface="Calibri" pitchFamily="34" charset="0"/>
                 <a:ea typeface="Calibri" pitchFamily="34" charset="-122"/>
@@ -1258,218 +1301,7 @@
               </a:rPr>
               <a:t>A colony can slide into starvation, chilled brood or the run-up to a swarm within days — yet opening a hive is disruptive, so it is done only every week or two.</a:t>
             </a:r>
-            <a:endParaRPr lang="en-US" sz="2000" dirty="0"/>
-          </a:p>
-        </p:txBody>
-      </p:sp>
-      <p:sp>
-        <p:nvSpPr>
-          <p:cNvPr id="5" name="Shape 3"/>
-          <p:cNvSpPr/>
-          <p:nvPr/>
-        </p:nvSpPr>
-        <p:spPr>
-          <a:xfrm>
-            <a:off x="1889608" y="4526280"/>
-            <a:ext cx="2651760" cy="566928"/>
-          </a:xfrm>
-          <a:prstGeom prst="roundRect">
-            <a:avLst>
-              <a:gd name="adj" fmla="val 50000"/>
-            </a:avLst>
-          </a:prstGeom>
-          <a:solidFill>
-            <a:srgbClr val="B98A1E"/>
-          </a:solidFill>
-          <a:ln/>
-        </p:spPr>
-      </p:sp>
-      <p:sp>
-        <p:nvSpPr>
-          <p:cNvPr id="6" name="Text 4"/>
-          <p:cNvSpPr/>
-          <p:nvPr/>
-        </p:nvSpPr>
-        <p:spPr>
-          <a:xfrm>
-            <a:off x="1889608" y="4526280"/>
-            <a:ext cx="2651760" cy="566928"/>
-          </a:xfrm>
-          <a:prstGeom prst="rect">
-            <a:avLst/>
-          </a:prstGeom>
-          <a:noFill/>
-          <a:ln/>
-        </p:spPr>
-        <p:txBody>
-          <a:bodyPr wrap="square" lIns="0" tIns="0" rIns="0" bIns="0" rtlCol="0" anchor="ctr"/>
-          <a:lstStyle/>
-          <a:p>
-            <a:pPr algn="ctr" indent="0" marL="0">
-              <a:buNone/>
-            </a:pPr>
-            <a:r>
-              <a:rPr lang="en-US" sz="1350" b="1" dirty="0">
-                <a:solidFill>
-                  <a:srgbClr val="2A2110"/>
-                </a:solidFill>
-                <a:latin typeface="Calibri" pitchFamily="34" charset="0"/>
-                <a:ea typeface="Calibri" pitchFamily="34" charset="-122"/>
-                <a:cs typeface="Calibri" pitchFamily="34" charset="-120"/>
-              </a:rPr>
-              <a:t>Brood 32–36 °C band</a:t>
-            </a:r>
-            <a:endParaRPr lang="en-US" sz="1350" dirty="0"/>
-          </a:p>
-        </p:txBody>
-      </p:sp>
-      <p:sp>
-        <p:nvSpPr>
-          <p:cNvPr id="7" name="Shape 5"/>
-          <p:cNvSpPr/>
-          <p:nvPr/>
-        </p:nvSpPr>
-        <p:spPr>
-          <a:xfrm>
-            <a:off x="4769968" y="4526280"/>
-            <a:ext cx="2651760" cy="566928"/>
-          </a:xfrm>
-          <a:prstGeom prst="roundRect">
-            <a:avLst>
-              <a:gd name="adj" fmla="val 50000"/>
-            </a:avLst>
-          </a:prstGeom>
-          <a:solidFill>
-            <a:srgbClr val="B98A1E"/>
-          </a:solidFill>
-          <a:ln/>
-        </p:spPr>
-      </p:sp>
-      <p:sp>
-        <p:nvSpPr>
-          <p:cNvPr id="8" name="Text 6"/>
-          <p:cNvSpPr/>
-          <p:nvPr/>
-        </p:nvSpPr>
-        <p:spPr>
-          <a:xfrm>
-            <a:off x="4769968" y="4526280"/>
-            <a:ext cx="2651760" cy="566928"/>
-          </a:xfrm>
-          <a:prstGeom prst="rect">
-            <a:avLst/>
-          </a:prstGeom>
-          <a:noFill/>
-          <a:ln/>
-        </p:spPr>
-        <p:txBody>
-          <a:bodyPr wrap="square" lIns="0" tIns="0" rIns="0" bIns="0" rtlCol="0" anchor="ctr"/>
-          <a:lstStyle/>
-          <a:p>
-            <a:pPr algn="ctr" indent="0" marL="0">
-              <a:buNone/>
-            </a:pPr>
-            <a:r>
-              <a:rPr lang="en-US" sz="1350" b="1" dirty="0">
-                <a:solidFill>
-                  <a:srgbClr val="2A2110"/>
-                </a:solidFill>
-                <a:latin typeface="Calibri" pitchFamily="34" charset="0"/>
-                <a:ea typeface="Calibri" pitchFamily="34" charset="-122"/>
-                <a:cs typeface="Calibri" pitchFamily="34" charset="-120"/>
-              </a:rPr>
-              <a:t>Starvation &lt; 20 kg</a:t>
-            </a:r>
-            <a:endParaRPr lang="en-US" sz="1350" dirty="0"/>
-          </a:p>
-        </p:txBody>
-      </p:sp>
-      <p:sp>
-        <p:nvSpPr>
-          <p:cNvPr id="9" name="Shape 7"/>
-          <p:cNvSpPr/>
-          <p:nvPr/>
-        </p:nvSpPr>
-        <p:spPr>
-          <a:xfrm>
-            <a:off x="7650328" y="4526280"/>
-            <a:ext cx="2651760" cy="566928"/>
-          </a:xfrm>
-          <a:prstGeom prst="roundRect">
-            <a:avLst>
-              <a:gd name="adj" fmla="val 50000"/>
-            </a:avLst>
-          </a:prstGeom>
-          <a:solidFill>
-            <a:srgbClr val="B98A1E"/>
-          </a:solidFill>
-          <a:ln/>
-        </p:spPr>
-      </p:sp>
-      <p:sp>
-        <p:nvSpPr>
-          <p:cNvPr id="10" name="Text 8"/>
-          <p:cNvSpPr/>
-          <p:nvPr/>
-        </p:nvSpPr>
-        <p:spPr>
-          <a:xfrm>
-            <a:off x="7650328" y="4526280"/>
-            <a:ext cx="2651760" cy="566928"/>
-          </a:xfrm>
-          <a:prstGeom prst="rect">
-            <a:avLst/>
-          </a:prstGeom>
-          <a:noFill/>
-          <a:ln/>
-        </p:spPr>
-        <p:txBody>
-          <a:bodyPr wrap="square" lIns="0" tIns="0" rIns="0" bIns="0" rtlCol="0" anchor="ctr"/>
-          <a:lstStyle/>
-          <a:p>
-            <a:pPr algn="ctr" indent="0" marL="0">
-              <a:buNone/>
-            </a:pPr>
-            <a:r>
-              <a:rPr lang="en-US" sz="1350" b="1" dirty="0">
-                <a:solidFill>
-                  <a:srgbClr val="2A2110"/>
-                </a:solidFill>
-                <a:latin typeface="Calibri" pitchFamily="34" charset="0"/>
-                <a:ea typeface="Calibri" pitchFamily="34" charset="-122"/>
-                <a:cs typeface="Calibri" pitchFamily="34" charset="-120"/>
-              </a:rPr>
-              <a:t>Swarm buzz &gt; 350 Hz</a:t>
-            </a:r>
-            <a:endParaRPr lang="en-US" sz="1350" dirty="0"/>
-          </a:p>
-        </p:txBody>
-      </p:sp>
-      <p:sp>
-        <p:nvSpPr>
-          <p:cNvPr id="11" name="Text 9"/>
-          <p:cNvSpPr/>
-          <p:nvPr/>
-        </p:nvSpPr>
-        <p:spPr>
-          <a:xfrm>
-            <a:off x="548640" y="6126480"/>
-            <a:ext cx="11064240" cy="365760"/>
-          </a:xfrm>
-          <a:prstGeom prst="rect">
-            <a:avLst/>
-          </a:prstGeom>
-          <a:noFill/>
-          <a:ln/>
-        </p:spPr>
-        <p:txBody>
-          <a:bodyPr wrap="square" rtlCol="0" anchor="ctr"/>
-          <a:lstStyle/>
-          <a:p>
-            <a:pPr algn="ctr" indent="0" marL="0">
-              <a:buNone/>
-            </a:pPr>
-            <a:endParaRPr lang="en-US" sz="1300" dirty="0"/>
+            <a:endParaRPr lang="en-US" sz="1400" dirty="0"/>
           </a:p>
         </p:txBody>
       </p:sp>
@@ -1487,7 +1319,7 @@
     <p:bg>
       <p:bgPr>
         <a:solidFill>
-          <a:srgbClr val="FFFFFF"/>
+          <a:srgbClr val="F4E8CE"/>
         </a:solidFill>
       </p:bgPr>
     </p:bg>
@@ -1507,23 +1339,63 @@
       </p:grpSpPr>
       <p:sp>
         <p:nvSpPr>
-          <p:cNvPr id="2" name="Text 0"/>
-          <p:cNvSpPr/>
-          <p:nvPr/>
-        </p:nvSpPr>
-        <p:spPr>
-          <a:xfrm>
-            <a:off x="640080" y="457200"/>
-            <a:ext cx="10972800" cy="640080"/>
-          </a:xfrm>
-          <a:prstGeom prst="rect">
-            <a:avLst/>
-          </a:prstGeom>
-          <a:noFill/>
-          <a:ln/>
-        </p:spPr>
-        <p:txBody>
-          <a:bodyPr wrap="square" rtlCol="0" anchor="ctr"/>
+          <p:cNvPr id="2" name="Shape 0"/>
+          <p:cNvSpPr/>
+          <p:nvPr/>
+        </p:nvSpPr>
+        <p:spPr>
+          <a:xfrm>
+            <a:off x="457200" y="457200"/>
+            <a:ext cx="274320" cy="274320"/>
+          </a:xfrm>
+          <a:prstGeom prst="rect">
+            <a:avLst/>
+          </a:prstGeom>
+          <a:solidFill>
+            <a:srgbClr val="A35A12"/>
+          </a:solidFill>
+          <a:ln/>
+        </p:spPr>
+      </p:sp>
+      <p:sp>
+        <p:nvSpPr>
+          <p:cNvPr id="3" name="Shape 1"/>
+          <p:cNvSpPr/>
+          <p:nvPr/>
+        </p:nvSpPr>
+        <p:spPr>
+          <a:xfrm>
+            <a:off x="11460175" y="6126480"/>
+            <a:ext cx="274320" cy="274320"/>
+          </a:xfrm>
+          <a:prstGeom prst="rect">
+            <a:avLst/>
+          </a:prstGeom>
+          <a:solidFill>
+            <a:srgbClr val="A35A12"/>
+          </a:solidFill>
+          <a:ln/>
+        </p:spPr>
+      </p:sp>
+      <p:sp>
+        <p:nvSpPr>
+          <p:cNvPr id="4" name="Text 2"/>
+          <p:cNvSpPr/>
+          <p:nvPr/>
+        </p:nvSpPr>
+        <p:spPr>
+          <a:xfrm>
+            <a:off x="777240" y="731520"/>
+            <a:ext cx="914400" cy="640080"/>
+          </a:xfrm>
+          <a:prstGeom prst="rect">
+            <a:avLst/>
+          </a:prstGeom>
+          <a:noFill/>
+          <a:ln/>
+        </p:spPr>
+        <p:txBody>
+          <a:bodyPr wrap="square" lIns="0" tIns="0" rIns="0" bIns="0" rtlCol="0" anchor="ctr"/>
           <a:lstStyle/>
           <a:p>
             <a:pPr indent="0" marL="0">
@@ -1532,40 +1404,118 @@
             <a:r>
               <a:rPr lang="en-US" sz="3000" b="1" dirty="0">
                 <a:solidFill>
-                  <a:srgbClr val="281F0F"/>
-                </a:solidFill>
-                <a:latin typeface="Century Schoolbook" pitchFamily="34" charset="0"/>
-                <a:ea typeface="Century Schoolbook" pitchFamily="34" charset="-122"/>
-                <a:cs typeface="Century Schoolbook" pitchFamily="34" charset="-120"/>
+                  <a:srgbClr val="A35A12"/>
+                </a:solidFill>
+                <a:latin typeface="Century Gothic" pitchFamily="34" charset="0"/>
+                <a:ea typeface="Century Gothic" pitchFamily="34" charset="-122"/>
+                <a:cs typeface="Century Gothic" pitchFamily="34" charset="-120"/>
+              </a:rPr>
+              <a:t>01</a:t>
+            </a:r>
+            <a:endParaRPr lang="en-US" sz="3000" dirty="0"/>
+          </a:p>
+        </p:txBody>
+      </p:sp>
+      <p:sp>
+        <p:nvSpPr>
+          <p:cNvPr id="5" name="Text 3"/>
+          <p:cNvSpPr/>
+          <p:nvPr/>
+        </p:nvSpPr>
+        <p:spPr>
+          <a:xfrm>
+            <a:off x="1645920" y="905256"/>
+            <a:ext cx="9768535" cy="274320"/>
+          </a:xfrm>
+          <a:prstGeom prst="rect">
+            <a:avLst/>
+          </a:prstGeom>
+          <a:noFill/>
+          <a:ln/>
+        </p:spPr>
+        <p:txBody>
+          <a:bodyPr wrap="square" lIns="0" tIns="0" rIns="0" bIns="0" rtlCol="0" anchor="ctr"/>
+          <a:lstStyle/>
+          <a:p>
+            <a:pPr indent="0" marL="0">
+              <a:buNone/>
+            </a:pPr>
+            <a:r>
+              <a:rPr lang="en-US" sz="1100" b="1" spc="200" kern="0" dirty="0">
+                <a:solidFill>
+                  <a:srgbClr val="5F6B74"/>
+                </a:solidFill>
+                <a:latin typeface="Calibri" pitchFamily="34" charset="0"/>
+                <a:ea typeface="Calibri" pitchFamily="34" charset="-122"/>
+                <a:cs typeface="Calibri" pitchFamily="34" charset="-120"/>
+              </a:rPr>
+              <a:t>ARCHITECTURE</a:t>
+            </a:r>
+            <a:endParaRPr lang="en-US" sz="1100" dirty="0"/>
+          </a:p>
+        </p:txBody>
+      </p:sp>
+      <p:sp>
+        <p:nvSpPr>
+          <p:cNvPr id="6" name="Text 4"/>
+          <p:cNvSpPr/>
+          <p:nvPr/>
+        </p:nvSpPr>
+        <p:spPr>
+          <a:xfrm>
+            <a:off x="777240" y="1380744"/>
+            <a:ext cx="10637215" cy="640080"/>
+          </a:xfrm>
+          <a:prstGeom prst="rect">
+            <a:avLst/>
+          </a:prstGeom>
+          <a:noFill/>
+          <a:ln/>
+        </p:spPr>
+        <p:txBody>
+          <a:bodyPr wrap="square" lIns="0" tIns="0" rIns="0" bIns="0" rtlCol="0" anchor="ctr"/>
+          <a:lstStyle/>
+          <a:p>
+            <a:pPr indent="0" marL="0">
+              <a:buNone/>
+            </a:pPr>
+            <a:r>
+              <a:rPr lang="en-US" sz="2300" b="1" dirty="0">
+                <a:solidFill>
+                  <a:srgbClr val="3B2712"/>
+                </a:solidFill>
+                <a:latin typeface="Century Gothic" pitchFamily="34" charset="0"/>
+                <a:ea typeface="Century Gothic" pitchFamily="34" charset="-122"/>
+                <a:cs typeface="Century Gothic" pitchFamily="34" charset="-120"/>
               </a:rPr>
               <a:t>What I Built — Hive to Dashboard</a:t>
             </a:r>
-            <a:endParaRPr lang="en-US" sz="3000" dirty="0"/>
-          </a:p>
-        </p:txBody>
-      </p:sp>
-      <p:sp>
-        <p:nvSpPr>
-          <p:cNvPr id="3" name="Shape 1"/>
-          <p:cNvSpPr/>
-          <p:nvPr/>
-        </p:nvSpPr>
-        <p:spPr>
-          <a:xfrm>
-            <a:off x="640080" y="1554480"/>
-            <a:ext cx="3200400" cy="3383280"/>
+            <a:endParaRPr lang="en-US" sz="2300" dirty="0"/>
+          </a:p>
+        </p:txBody>
+      </p:sp>
+      <p:sp>
+        <p:nvSpPr>
+          <p:cNvPr id="7" name="Shape 5"/>
+          <p:cNvSpPr/>
+          <p:nvPr/>
+        </p:nvSpPr>
+        <p:spPr>
+          <a:xfrm>
+            <a:off x="777240" y="2971800"/>
+            <a:ext cx="1391869" cy="1965960"/>
           </a:xfrm>
           <a:prstGeom prst="roundRect">
             <a:avLst>
-              <a:gd name="adj" fmla="val 2857"/>
+              <a:gd name="adj" fmla="val 2628"/>
             </a:avLst>
           </a:prstGeom>
           <a:solidFill>
-            <a:srgbClr val="F7F2E3"/>
-          </a:solidFill>
-          <a:ln w="19050">
+            <a:srgbClr val="A35A12"/>
+          </a:solidFill>
+          <a:ln w="12700">
             <a:solidFill>
-              <a:srgbClr val="D8AE3E"/>
+              <a:srgbClr val="A35A12"/>
             </a:solidFill>
             <a:prstDash val="solid"/>
           </a:ln>
@@ -1573,65 +1523,166 @@
       </p:sp>
       <p:sp>
         <p:nvSpPr>
-          <p:cNvPr id="4" name="Text 2"/>
-          <p:cNvSpPr/>
-          <p:nvPr/>
-        </p:nvSpPr>
-        <p:spPr>
-          <a:xfrm>
-            <a:off x="640080" y="1691640"/>
-            <a:ext cx="3200400" cy="365760"/>
-          </a:xfrm>
-          <a:prstGeom prst="rect">
-            <a:avLst/>
-          </a:prstGeom>
-          <a:noFill/>
-          <a:ln/>
-        </p:spPr>
-        <p:txBody>
-          <a:bodyPr wrap="square" rtlCol="0" anchor="ctr"/>
-          <a:lstStyle/>
-          <a:p>
-            <a:pPr algn="ctr" indent="0" marL="0">
-              <a:buNone/>
-            </a:pPr>
-            <a:r>
-              <a:rPr lang="en-US" sz="1200" b="1" spc="300" kern="0" dirty="0">
-                <a:solidFill>
-                  <a:srgbClr val="D8AE3E"/>
+          <p:cNvPr id="8" name="Text 6"/>
+          <p:cNvSpPr/>
+          <p:nvPr/>
+        </p:nvSpPr>
+        <p:spPr>
+          <a:xfrm>
+            <a:off x="923544" y="3154680"/>
+            <a:ext cx="1099261" cy="320040"/>
+          </a:xfrm>
+          <a:prstGeom prst="rect">
+            <a:avLst/>
+          </a:prstGeom>
+          <a:noFill/>
+          <a:ln/>
+        </p:spPr>
+        <p:txBody>
+          <a:bodyPr wrap="square" lIns="0" tIns="0" rIns="0" bIns="0" rtlCol="0" anchor="ctr"/>
+          <a:lstStyle/>
+          <a:p>
+            <a:pPr indent="0" marL="0">
+              <a:buNone/>
+            </a:pPr>
+            <a:r>
+              <a:rPr lang="en-US" sz="1100" dirty="0">
+                <a:solidFill>
+                  <a:srgbClr val="FFFFFF"/>
+                </a:solidFill>
+                <a:latin typeface="Consolas" pitchFamily="34" charset="0"/>
+                <a:ea typeface="Consolas" pitchFamily="34" charset="-122"/>
+                <a:cs typeface="Consolas" pitchFamily="34" charset="-120"/>
+              </a:rPr>
+              <a:t>01</a:t>
+            </a:r>
+            <a:endParaRPr lang="en-US" sz="1100" dirty="0"/>
+          </a:p>
+        </p:txBody>
+      </p:sp>
+      <p:sp>
+        <p:nvSpPr>
+          <p:cNvPr id="9" name="Text 7"/>
+          <p:cNvSpPr/>
+          <p:nvPr/>
+        </p:nvSpPr>
+        <p:spPr>
+          <a:xfrm>
+            <a:off x="923544" y="3593592"/>
+            <a:ext cx="1099261" cy="868680"/>
+          </a:xfrm>
+          <a:prstGeom prst="rect">
+            <a:avLst/>
+          </a:prstGeom>
+          <a:noFill/>
+          <a:ln/>
+        </p:spPr>
+        <p:txBody>
+          <a:bodyPr wrap="square" lIns="0" tIns="0" rIns="0" bIns="0" rtlCol="0" anchor="t"/>
+          <a:lstStyle/>
+          <a:p>
+            <a:pPr indent="0" marL="0">
+              <a:lnSpc>
+                <a:spcPct val="96000"/>
+              </a:lnSpc>
+              <a:buNone/>
+            </a:pPr>
+            <a:r>
+              <a:rPr lang="en-US" sz="1300" b="1" dirty="0">
+                <a:solidFill>
+                  <a:srgbClr val="FFFFFF"/>
+                </a:solidFill>
+                <a:latin typeface="Century Gothic" pitchFamily="34" charset="0"/>
+                <a:ea typeface="Century Gothic" pitchFamily="34" charset="-122"/>
+                <a:cs typeface="Century Gothic" pitchFamily="34" charset="-120"/>
+              </a:rPr>
+              <a:t>Hive sensors</a:t>
+            </a:r>
+            <a:endParaRPr lang="en-US" sz="1300" dirty="0"/>
+          </a:p>
+        </p:txBody>
+      </p:sp>
+      <p:sp>
+        <p:nvSpPr>
+          <p:cNvPr id="10" name="Text 8"/>
+          <p:cNvSpPr/>
+          <p:nvPr/>
+        </p:nvSpPr>
+        <p:spPr>
+          <a:xfrm>
+            <a:off x="923544" y="4453128"/>
+            <a:ext cx="1099261" cy="365760"/>
+          </a:xfrm>
+          <a:prstGeom prst="rect">
+            <a:avLst/>
+          </a:prstGeom>
+          <a:noFill/>
+          <a:ln/>
+        </p:spPr>
+        <p:txBody>
+          <a:bodyPr wrap="square" lIns="0" tIns="0" rIns="0" bIns="0" rtlCol="0" anchor="ctr"/>
+          <a:lstStyle/>
+          <a:p>
+            <a:pPr indent="0" marL="0">
+              <a:buNone/>
+            </a:pPr>
+            <a:r>
+              <a:rPr lang="en-US" sz="900" dirty="0">
+                <a:solidFill>
+                  <a:srgbClr val="FFFFFF"/>
                 </a:solidFill>
                 <a:latin typeface="Calibri" pitchFamily="34" charset="0"/>
                 <a:ea typeface="Calibri" pitchFamily="34" charset="-122"/>
                 <a:cs typeface="Calibri" pitchFamily="34" charset="-120"/>
               </a:rPr>
-              <a:t>EDGE</a:t>
-            </a:r>
-            <a:endParaRPr lang="en-US" sz="1200" dirty="0"/>
-          </a:p>
-        </p:txBody>
-      </p:sp>
-      <p:sp>
-        <p:nvSpPr>
-          <p:cNvPr id="5" name="Shape 3"/>
-          <p:cNvSpPr/>
-          <p:nvPr/>
-        </p:nvSpPr>
-        <p:spPr>
-          <a:xfrm>
-            <a:off x="914400" y="2286000"/>
-            <a:ext cx="2651760" cy="1005840"/>
+              <a:t>10 · 2 apiaries</a:t>
+            </a:r>
+            <a:endParaRPr lang="en-US" sz="900" dirty="0"/>
+          </a:p>
+        </p:txBody>
+      </p:sp>
+      <p:sp>
+        <p:nvSpPr>
+          <p:cNvPr id="11" name="Shape 9"/>
+          <p:cNvSpPr/>
+          <p:nvPr/>
+        </p:nvSpPr>
+        <p:spPr>
+          <a:xfrm>
+            <a:off x="2242261" y="3845052"/>
+            <a:ext cx="310896" cy="219456"/>
+          </a:xfrm>
+          <a:prstGeom prst="rightArrow">
+            <a:avLst/>
+          </a:prstGeom>
+          <a:solidFill>
+            <a:srgbClr val="5F6B74"/>
+          </a:solidFill>
+          <a:ln/>
+        </p:spPr>
+      </p:sp>
+      <p:sp>
+        <p:nvSpPr>
+          <p:cNvPr id="12" name="Shape 10"/>
+          <p:cNvSpPr/>
+          <p:nvPr/>
+        </p:nvSpPr>
+        <p:spPr>
+          <a:xfrm>
+            <a:off x="2626309" y="2971800"/>
+            <a:ext cx="1391869" cy="1965960"/>
           </a:xfrm>
           <a:prstGeom prst="roundRect">
             <a:avLst>
-              <a:gd name="adj" fmla="val 7273"/>
+              <a:gd name="adj" fmla="val 2628"/>
             </a:avLst>
           </a:prstGeom>
           <a:solidFill>
-            <a:srgbClr val="FFFFFF"/>
-          </a:solidFill>
-          <a:ln w="15240">
+            <a:srgbClr val="A35A12"/>
+          </a:solidFill>
+          <a:ln w="12700">
             <a:solidFill>
-              <a:srgbClr val="D8AE3E"/>
+              <a:srgbClr val="A35A12"/>
             </a:solidFill>
             <a:prstDash val="solid"/>
           </a:ln>
@@ -1639,14 +1690,14 @@
       </p:sp>
       <p:sp>
         <p:nvSpPr>
-          <p:cNvPr id="6" name="Text 4"/>
-          <p:cNvSpPr/>
-          <p:nvPr/>
-        </p:nvSpPr>
-        <p:spPr>
-          <a:xfrm>
-            <a:off x="914400" y="2432304"/>
-            <a:ext cx="2651760" cy="365760"/>
+          <p:cNvPr id="13" name="Text 11"/>
+          <p:cNvSpPr/>
+          <p:nvPr/>
+        </p:nvSpPr>
+        <p:spPr>
+          <a:xfrm>
+            <a:off x="2772613" y="3154680"/>
+            <a:ext cx="1099261" cy="320040"/>
           </a:xfrm>
           <a:prstGeom prst="rect">
             <a:avLst/>
@@ -1658,34 +1709,162 @@
           <a:bodyPr wrap="square" lIns="0" tIns="0" rIns="0" bIns="0" rtlCol="0" anchor="ctr"/>
           <a:lstStyle/>
           <a:p>
-            <a:pPr algn="ctr" indent="0" marL="0">
-              <a:buNone/>
-            </a:pPr>
-            <a:r>
-              <a:rPr lang="en-US" sz="1400" b="1" dirty="0">
-                <a:solidFill>
-                  <a:srgbClr val="281F0F"/>
+            <a:pPr indent="0" marL="0">
+              <a:buNone/>
+            </a:pPr>
+            <a:r>
+              <a:rPr lang="en-US" sz="1100" dirty="0">
+                <a:solidFill>
+                  <a:srgbClr val="FFFFFF"/>
+                </a:solidFill>
+                <a:latin typeface="Consolas" pitchFamily="34" charset="0"/>
+                <a:ea typeface="Consolas" pitchFamily="34" charset="-122"/>
+                <a:cs typeface="Consolas" pitchFamily="34" charset="-120"/>
+              </a:rPr>
+              <a:t>02</a:t>
+            </a:r>
+            <a:endParaRPr lang="en-US" sz="1100" dirty="0"/>
+          </a:p>
+        </p:txBody>
+      </p:sp>
+      <p:sp>
+        <p:nvSpPr>
+          <p:cNvPr id="14" name="Text 12"/>
+          <p:cNvSpPr/>
+          <p:nvPr/>
+        </p:nvSpPr>
+        <p:spPr>
+          <a:xfrm>
+            <a:off x="2772613" y="3593592"/>
+            <a:ext cx="1099261" cy="868680"/>
+          </a:xfrm>
+          <a:prstGeom prst="rect">
+            <a:avLst/>
+          </a:prstGeom>
+          <a:noFill/>
+          <a:ln/>
+        </p:spPr>
+        <p:txBody>
+          <a:bodyPr wrap="square" lIns="0" tIns="0" rIns="0" bIns="0" rtlCol="0" anchor="t"/>
+          <a:lstStyle/>
+          <a:p>
+            <a:pPr indent="0" marL="0">
+              <a:lnSpc>
+                <a:spcPct val="96000"/>
+              </a:lnSpc>
+              <a:buNone/>
+            </a:pPr>
+            <a:r>
+              <a:rPr lang="en-US" sz="1300" b="1" dirty="0">
+                <a:solidFill>
+                  <a:srgbClr val="FFFFFF"/>
+                </a:solidFill>
+                <a:latin typeface="Century Gothic" pitchFamily="34" charset="0"/>
+                <a:ea typeface="Century Gothic" pitchFamily="34" charset="-122"/>
+                <a:cs typeface="Century Gothic" pitchFamily="34" charset="-120"/>
+              </a:rPr>
+              <a:t>Fog node</a:t>
+            </a:r>
+            <a:endParaRPr lang="en-US" sz="1300" dirty="0"/>
+          </a:p>
+        </p:txBody>
+      </p:sp>
+      <p:sp>
+        <p:nvSpPr>
+          <p:cNvPr id="15" name="Text 13"/>
+          <p:cNvSpPr/>
+          <p:nvPr/>
+        </p:nvSpPr>
+        <p:spPr>
+          <a:xfrm>
+            <a:off x="2772613" y="4453128"/>
+            <a:ext cx="1099261" cy="365760"/>
+          </a:xfrm>
+          <a:prstGeom prst="rect">
+            <a:avLst/>
+          </a:prstGeom>
+          <a:noFill/>
+          <a:ln/>
+        </p:spPr>
+        <p:txBody>
+          <a:bodyPr wrap="square" lIns="0" tIns="0" rIns="0" bIns="0" rtlCol="0" anchor="ctr"/>
+          <a:lstStyle/>
+          <a:p>
+            <a:pPr indent="0" marL="0">
+              <a:buNone/>
+            </a:pPr>
+            <a:r>
+              <a:rPr lang="en-US" sz="900" dirty="0">
+                <a:solidFill>
+                  <a:srgbClr val="FFFFFF"/>
                 </a:solidFill>
                 <a:latin typeface="Calibri" pitchFamily="34" charset="0"/>
                 <a:ea typeface="Calibri" pitchFamily="34" charset="-122"/>
                 <a:cs typeface="Calibri" pitchFamily="34" charset="-120"/>
               </a:rPr>
-              <a:t>Hive sensors</a:t>
-            </a:r>
-            <a:endParaRPr lang="en-US" sz="1400" dirty="0"/>
-          </a:p>
-        </p:txBody>
-      </p:sp>
-      <p:sp>
-        <p:nvSpPr>
-          <p:cNvPr id="7" name="Text 5"/>
-          <p:cNvSpPr/>
-          <p:nvPr/>
-        </p:nvSpPr>
-        <p:spPr>
-          <a:xfrm>
-            <a:off x="914400" y="2816352"/>
-            <a:ext cx="2651760" cy="365760"/>
+              <a:t>10 s windows · colony rules</a:t>
+            </a:r>
+            <a:endParaRPr lang="en-US" sz="900" dirty="0"/>
+          </a:p>
+        </p:txBody>
+      </p:sp>
+      <p:sp>
+        <p:nvSpPr>
+          <p:cNvPr id="16" name="Shape 14"/>
+          <p:cNvSpPr/>
+          <p:nvPr/>
+        </p:nvSpPr>
+        <p:spPr>
+          <a:xfrm>
+            <a:off x="4091330" y="3845052"/>
+            <a:ext cx="310896" cy="219456"/>
+          </a:xfrm>
+          <a:prstGeom prst="rightArrow">
+            <a:avLst/>
+          </a:prstGeom>
+          <a:solidFill>
+            <a:srgbClr val="5F6B74"/>
+          </a:solidFill>
+          <a:ln/>
+        </p:spPr>
+      </p:sp>
+      <p:sp>
+        <p:nvSpPr>
+          <p:cNvPr id="17" name="Shape 15"/>
+          <p:cNvSpPr/>
+          <p:nvPr/>
+        </p:nvSpPr>
+        <p:spPr>
+          <a:xfrm>
+            <a:off x="4475378" y="2971800"/>
+            <a:ext cx="1391869" cy="1965960"/>
+          </a:xfrm>
+          <a:prstGeom prst="roundRect">
+            <a:avLst>
+              <a:gd name="adj" fmla="val 2628"/>
+            </a:avLst>
+          </a:prstGeom>
+          <a:solidFill>
+            <a:srgbClr val="FFFAF0"/>
+          </a:solidFill>
+          <a:ln w="12700">
+            <a:solidFill>
+              <a:srgbClr val="E4E6E9"/>
+            </a:solidFill>
+            <a:prstDash val="solid"/>
+          </a:ln>
+        </p:spPr>
+      </p:sp>
+      <p:sp>
+        <p:nvSpPr>
+          <p:cNvPr id="18" name="Text 16"/>
+          <p:cNvSpPr/>
+          <p:nvPr/>
+        </p:nvSpPr>
+        <p:spPr>
+          <a:xfrm>
+            <a:off x="4621682" y="3154680"/>
+            <a:ext cx="1099261" cy="320040"/>
           </a:xfrm>
           <a:prstGeom prst="rect">
             <a:avLst/>
@@ -1697,46 +1876,147 @@
           <a:bodyPr wrap="square" lIns="0" tIns="0" rIns="0" bIns="0" rtlCol="0" anchor="ctr"/>
           <a:lstStyle/>
           <a:p>
-            <a:pPr algn="ctr" indent="0" marL="0">
-              <a:buNone/>
-            </a:pPr>
-            <a:r>
-              <a:rPr lang="en-US" sz="1000" dirty="0">
-                <a:solidFill>
-                  <a:srgbClr val="6E6144"/>
+            <a:pPr indent="0" marL="0">
+              <a:buNone/>
+            </a:pPr>
+            <a:r>
+              <a:rPr lang="en-US" sz="1100" dirty="0">
+                <a:solidFill>
+                  <a:srgbClr val="A35A12"/>
+                </a:solidFill>
+                <a:latin typeface="Consolas" pitchFamily="34" charset="0"/>
+                <a:ea typeface="Consolas" pitchFamily="34" charset="-122"/>
+                <a:cs typeface="Consolas" pitchFamily="34" charset="-120"/>
+              </a:rPr>
+              <a:t>03</a:t>
+            </a:r>
+            <a:endParaRPr lang="en-US" sz="1100" dirty="0"/>
+          </a:p>
+        </p:txBody>
+      </p:sp>
+      <p:sp>
+        <p:nvSpPr>
+          <p:cNvPr id="19" name="Text 17"/>
+          <p:cNvSpPr/>
+          <p:nvPr/>
+        </p:nvSpPr>
+        <p:spPr>
+          <a:xfrm>
+            <a:off x="4621682" y="3593592"/>
+            <a:ext cx="1099261" cy="868680"/>
+          </a:xfrm>
+          <a:prstGeom prst="rect">
+            <a:avLst/>
+          </a:prstGeom>
+          <a:noFill/>
+          <a:ln/>
+        </p:spPr>
+        <p:txBody>
+          <a:bodyPr wrap="square" lIns="0" tIns="0" rIns="0" bIns="0" rtlCol="0" anchor="t"/>
+          <a:lstStyle/>
+          <a:p>
+            <a:pPr indent="0" marL="0">
+              <a:lnSpc>
+                <a:spcPct val="96000"/>
+              </a:lnSpc>
+              <a:buNone/>
+            </a:pPr>
+            <a:r>
+              <a:rPr lang="en-US" sz="1300" b="1" dirty="0">
+                <a:solidFill>
+                  <a:srgbClr val="3B2712"/>
+                </a:solidFill>
+                <a:latin typeface="Century Gothic" pitchFamily="34" charset="0"/>
+                <a:ea typeface="Century Gothic" pitchFamily="34" charset="-122"/>
+                <a:cs typeface="Century Gothic" pitchFamily="34" charset="-120"/>
+              </a:rPr>
+              <a:t>Amazon SQS</a:t>
+            </a:r>
+            <a:endParaRPr lang="en-US" sz="1300" dirty="0"/>
+          </a:p>
+        </p:txBody>
+      </p:sp>
+      <p:sp>
+        <p:nvSpPr>
+          <p:cNvPr id="20" name="Text 18"/>
+          <p:cNvSpPr/>
+          <p:nvPr/>
+        </p:nvSpPr>
+        <p:spPr>
+          <a:xfrm>
+            <a:off x="4621682" y="4453128"/>
+            <a:ext cx="1099261" cy="365760"/>
+          </a:xfrm>
+          <a:prstGeom prst="rect">
+            <a:avLst/>
+          </a:prstGeom>
+          <a:noFill/>
+          <a:ln/>
+        </p:spPr>
+        <p:txBody>
+          <a:bodyPr wrap="square" lIns="0" tIns="0" rIns="0" bIns="0" rtlCol="0" anchor="ctr"/>
+          <a:lstStyle/>
+          <a:p>
+            <a:pPr indent="0" marL="0">
+              <a:buNone/>
+            </a:pPr>
+            <a:r>
+              <a:rPr lang="en-US" sz="900" dirty="0">
+                <a:solidFill>
+                  <a:srgbClr val="5F6B74"/>
                 </a:solidFill>
                 <a:latin typeface="Calibri" pitchFamily="34" charset="0"/>
                 <a:ea typeface="Calibri" pitchFamily="34" charset="-122"/>
                 <a:cs typeface="Calibri" pitchFamily="34" charset="-120"/>
               </a:rPr>
-              <a:t>10 · 2 apiaries</a:t>
-            </a:r>
-            <a:endParaRPr lang="en-US" sz="1000" dirty="0"/>
-          </a:p>
-        </p:txBody>
-      </p:sp>
-      <p:sp>
-        <p:nvSpPr>
-          <p:cNvPr id="8" name="Shape 6"/>
-          <p:cNvSpPr/>
-          <p:nvPr/>
-        </p:nvSpPr>
-        <p:spPr>
-          <a:xfrm>
-            <a:off x="914400" y="3520440"/>
-            <a:ext cx="2651760" cy="1005840"/>
+              <a:t>1 summary / window</a:t>
+            </a:r>
+            <a:endParaRPr lang="en-US" sz="900" dirty="0"/>
+          </a:p>
+        </p:txBody>
+      </p:sp>
+      <p:sp>
+        <p:nvSpPr>
+          <p:cNvPr id="21" name="Shape 19"/>
+          <p:cNvSpPr/>
+          <p:nvPr/>
+        </p:nvSpPr>
+        <p:spPr>
+          <a:xfrm>
+            <a:off x="5940400" y="3845052"/>
+            <a:ext cx="310896" cy="219456"/>
+          </a:xfrm>
+          <a:prstGeom prst="rightArrow">
+            <a:avLst/>
+          </a:prstGeom>
+          <a:solidFill>
+            <a:srgbClr val="5F6B74"/>
+          </a:solidFill>
+          <a:ln/>
+        </p:spPr>
+      </p:sp>
+      <p:sp>
+        <p:nvSpPr>
+          <p:cNvPr id="22" name="Shape 20"/>
+          <p:cNvSpPr/>
+          <p:nvPr/>
+        </p:nvSpPr>
+        <p:spPr>
+          <a:xfrm>
+            <a:off x="6324448" y="2971800"/>
+            <a:ext cx="1391869" cy="1965960"/>
           </a:xfrm>
           <a:prstGeom prst="roundRect">
             <a:avLst>
-              <a:gd name="adj" fmla="val 7273"/>
+              <a:gd name="adj" fmla="val 2628"/>
             </a:avLst>
           </a:prstGeom>
           <a:solidFill>
-            <a:srgbClr val="FFFFFF"/>
-          </a:solidFill>
-          <a:ln w="15240">
+            <a:srgbClr val="FFFAF0"/>
+          </a:solidFill>
+          <a:ln w="12700">
             <a:solidFill>
-              <a:srgbClr val="D8AE3E"/>
+              <a:srgbClr val="E4E6E9"/>
             </a:solidFill>
             <a:prstDash val="solid"/>
           </a:ln>
@@ -1744,14 +2024,14 @@
       </p:sp>
       <p:sp>
         <p:nvSpPr>
-          <p:cNvPr id="9" name="Text 7"/>
-          <p:cNvSpPr/>
-          <p:nvPr/>
-        </p:nvSpPr>
-        <p:spPr>
-          <a:xfrm>
-            <a:off x="914400" y="3666744"/>
-            <a:ext cx="2651760" cy="365760"/>
+          <p:cNvPr id="23" name="Text 21"/>
+          <p:cNvSpPr/>
+          <p:nvPr/>
+        </p:nvSpPr>
+        <p:spPr>
+          <a:xfrm>
+            <a:off x="6470752" y="3154680"/>
+            <a:ext cx="1099261" cy="320040"/>
           </a:xfrm>
           <a:prstGeom prst="rect">
             <a:avLst/>
@@ -1763,34 +2043,162 @@
           <a:bodyPr wrap="square" lIns="0" tIns="0" rIns="0" bIns="0" rtlCol="0" anchor="ctr"/>
           <a:lstStyle/>
           <a:p>
-            <a:pPr algn="ctr" indent="0" marL="0">
-              <a:buNone/>
-            </a:pPr>
-            <a:r>
-              <a:rPr lang="en-US" sz="1400" b="1" dirty="0">
-                <a:solidFill>
-                  <a:srgbClr val="281F0F"/>
+            <a:pPr indent="0" marL="0">
+              <a:buNone/>
+            </a:pPr>
+            <a:r>
+              <a:rPr lang="en-US" sz="1100" dirty="0">
+                <a:solidFill>
+                  <a:srgbClr val="A35A12"/>
+                </a:solidFill>
+                <a:latin typeface="Consolas" pitchFamily="34" charset="0"/>
+                <a:ea typeface="Consolas" pitchFamily="34" charset="-122"/>
+                <a:cs typeface="Consolas" pitchFamily="34" charset="-120"/>
+              </a:rPr>
+              <a:t>04</a:t>
+            </a:r>
+            <a:endParaRPr lang="en-US" sz="1100" dirty="0"/>
+          </a:p>
+        </p:txBody>
+      </p:sp>
+      <p:sp>
+        <p:nvSpPr>
+          <p:cNvPr id="24" name="Text 22"/>
+          <p:cNvSpPr/>
+          <p:nvPr/>
+        </p:nvSpPr>
+        <p:spPr>
+          <a:xfrm>
+            <a:off x="6470752" y="3593592"/>
+            <a:ext cx="1099261" cy="868680"/>
+          </a:xfrm>
+          <a:prstGeom prst="rect">
+            <a:avLst/>
+          </a:prstGeom>
+          <a:noFill/>
+          <a:ln/>
+        </p:spPr>
+        <p:txBody>
+          <a:bodyPr wrap="square" lIns="0" tIns="0" rIns="0" bIns="0" rtlCol="0" anchor="t"/>
+          <a:lstStyle/>
+          <a:p>
+            <a:pPr indent="0" marL="0">
+              <a:lnSpc>
+                <a:spcPct val="96000"/>
+              </a:lnSpc>
+              <a:buNone/>
+            </a:pPr>
+            <a:r>
+              <a:rPr lang="en-US" sz="1300" b="1" dirty="0">
+                <a:solidFill>
+                  <a:srgbClr val="3B2712"/>
+                </a:solidFill>
+                <a:latin typeface="Century Gothic" pitchFamily="34" charset="0"/>
+                <a:ea typeface="Century Gothic" pitchFamily="34" charset="-122"/>
+                <a:cs typeface="Century Gothic" pitchFamily="34" charset="-120"/>
+              </a:rPr>
+              <a:t>AWS Lambda</a:t>
+            </a:r>
+            <a:endParaRPr lang="en-US" sz="1300" dirty="0"/>
+          </a:p>
+        </p:txBody>
+      </p:sp>
+      <p:sp>
+        <p:nvSpPr>
+          <p:cNvPr id="25" name="Text 23"/>
+          <p:cNvSpPr/>
+          <p:nvPr/>
+        </p:nvSpPr>
+        <p:spPr>
+          <a:xfrm>
+            <a:off x="6470752" y="4453128"/>
+            <a:ext cx="1099261" cy="365760"/>
+          </a:xfrm>
+          <a:prstGeom prst="rect">
+            <a:avLst/>
+          </a:prstGeom>
+          <a:noFill/>
+          <a:ln/>
+        </p:spPr>
+        <p:txBody>
+          <a:bodyPr wrap="square" lIns="0" tIns="0" rIns="0" bIns="0" rtlCol="0" anchor="ctr"/>
+          <a:lstStyle/>
+          <a:p>
+            <a:pPr indent="0" marL="0">
+              <a:buNone/>
+            </a:pPr>
+            <a:r>
+              <a:rPr lang="en-US" sz="900" dirty="0">
+                <a:solidFill>
+                  <a:srgbClr val="5F6B74"/>
                 </a:solidFill>
                 <a:latin typeface="Calibri" pitchFamily="34" charset="0"/>
                 <a:ea typeface="Calibri" pitchFamily="34" charset="-122"/>
                 <a:cs typeface="Calibri" pitchFamily="34" charset="-120"/>
               </a:rPr>
-              <a:t>Fog node</a:t>
-            </a:r>
-            <a:endParaRPr lang="en-US" sz="1400" dirty="0"/>
-          </a:p>
-        </p:txBody>
-      </p:sp>
-      <p:sp>
-        <p:nvSpPr>
-          <p:cNvPr id="10" name="Text 8"/>
-          <p:cNvSpPr/>
-          <p:nvPr/>
-        </p:nvSpPr>
-        <p:spPr>
-          <a:xfrm>
-            <a:off x="914400" y="4050792"/>
-            <a:ext cx="2651760" cy="365760"/>
+              <a:t>nodejs20 ingest</a:t>
+            </a:r>
+            <a:endParaRPr lang="en-US" sz="900" dirty="0"/>
+          </a:p>
+        </p:txBody>
+      </p:sp>
+      <p:sp>
+        <p:nvSpPr>
+          <p:cNvPr id="26" name="Shape 24"/>
+          <p:cNvSpPr/>
+          <p:nvPr/>
+        </p:nvSpPr>
+        <p:spPr>
+          <a:xfrm>
+            <a:off x="7789469" y="3845052"/>
+            <a:ext cx="310896" cy="219456"/>
+          </a:xfrm>
+          <a:prstGeom prst="rightArrow">
+            <a:avLst/>
+          </a:prstGeom>
+          <a:solidFill>
+            <a:srgbClr val="5F6B74"/>
+          </a:solidFill>
+          <a:ln/>
+        </p:spPr>
+      </p:sp>
+      <p:sp>
+        <p:nvSpPr>
+          <p:cNvPr id="27" name="Shape 25"/>
+          <p:cNvSpPr/>
+          <p:nvPr/>
+        </p:nvSpPr>
+        <p:spPr>
+          <a:xfrm>
+            <a:off x="8173517" y="2971800"/>
+            <a:ext cx="1391869" cy="1965960"/>
+          </a:xfrm>
+          <a:prstGeom prst="roundRect">
+            <a:avLst>
+              <a:gd name="adj" fmla="val 2628"/>
+            </a:avLst>
+          </a:prstGeom>
+          <a:solidFill>
+            <a:srgbClr val="FFFAF0"/>
+          </a:solidFill>
+          <a:ln w="12700">
+            <a:solidFill>
+              <a:srgbClr val="E4E6E9"/>
+            </a:solidFill>
+            <a:prstDash val="solid"/>
+          </a:ln>
+        </p:spPr>
+      </p:sp>
+      <p:sp>
+        <p:nvSpPr>
+          <p:cNvPr id="28" name="Text 26"/>
+          <p:cNvSpPr/>
+          <p:nvPr/>
+        </p:nvSpPr>
+        <p:spPr>
+          <a:xfrm>
+            <a:off x="8319821" y="3154680"/>
+            <a:ext cx="1099261" cy="320040"/>
           </a:xfrm>
           <a:prstGeom prst="rect">
             <a:avLst/>
@@ -1802,70 +2210,147 @@
           <a:bodyPr wrap="square" lIns="0" tIns="0" rIns="0" bIns="0" rtlCol="0" anchor="ctr"/>
           <a:lstStyle/>
           <a:p>
-            <a:pPr algn="ctr" indent="0" marL="0">
-              <a:buNone/>
-            </a:pPr>
-            <a:r>
-              <a:rPr lang="en-US" sz="1000" dirty="0">
-                <a:solidFill>
-                  <a:srgbClr val="6E6144"/>
+            <a:pPr indent="0" marL="0">
+              <a:buNone/>
+            </a:pPr>
+            <a:r>
+              <a:rPr lang="en-US" sz="1100" dirty="0">
+                <a:solidFill>
+                  <a:srgbClr val="A35A12"/>
+                </a:solidFill>
+                <a:latin typeface="Consolas" pitchFamily="34" charset="0"/>
+                <a:ea typeface="Consolas" pitchFamily="34" charset="-122"/>
+                <a:cs typeface="Consolas" pitchFamily="34" charset="-120"/>
+              </a:rPr>
+              <a:t>05</a:t>
+            </a:r>
+            <a:endParaRPr lang="en-US" sz="1100" dirty="0"/>
+          </a:p>
+        </p:txBody>
+      </p:sp>
+      <p:sp>
+        <p:nvSpPr>
+          <p:cNvPr id="29" name="Text 27"/>
+          <p:cNvSpPr/>
+          <p:nvPr/>
+        </p:nvSpPr>
+        <p:spPr>
+          <a:xfrm>
+            <a:off x="8319821" y="3593592"/>
+            <a:ext cx="1099261" cy="868680"/>
+          </a:xfrm>
+          <a:prstGeom prst="rect">
+            <a:avLst/>
+          </a:prstGeom>
+          <a:noFill/>
+          <a:ln/>
+        </p:spPr>
+        <p:txBody>
+          <a:bodyPr wrap="square" lIns="0" tIns="0" rIns="0" bIns="0" rtlCol="0" anchor="t"/>
+          <a:lstStyle/>
+          <a:p>
+            <a:pPr indent="0" marL="0">
+              <a:lnSpc>
+                <a:spcPct val="96000"/>
+              </a:lnSpc>
+              <a:buNone/>
+            </a:pPr>
+            <a:r>
+              <a:rPr lang="en-US" sz="1300" b="1" dirty="0">
+                <a:solidFill>
+                  <a:srgbClr val="3B2712"/>
+                </a:solidFill>
+                <a:latin typeface="Century Gothic" pitchFamily="34" charset="0"/>
+                <a:ea typeface="Century Gothic" pitchFamily="34" charset="-122"/>
+                <a:cs typeface="Century Gothic" pitchFamily="34" charset="-120"/>
+              </a:rPr>
+              <a:t>DynamoDB</a:t>
+            </a:r>
+            <a:endParaRPr lang="en-US" sz="1300" dirty="0"/>
+          </a:p>
+        </p:txBody>
+      </p:sp>
+      <p:sp>
+        <p:nvSpPr>
+          <p:cNvPr id="30" name="Text 28"/>
+          <p:cNvSpPr/>
+          <p:nvPr/>
+        </p:nvSpPr>
+        <p:spPr>
+          <a:xfrm>
+            <a:off x="8319821" y="4453128"/>
+            <a:ext cx="1099261" cy="365760"/>
+          </a:xfrm>
+          <a:prstGeom prst="rect">
+            <a:avLst/>
+          </a:prstGeom>
+          <a:noFill/>
+          <a:ln/>
+        </p:spPr>
+        <p:txBody>
+          <a:bodyPr wrap="square" lIns="0" tIns="0" rIns="0" bIns="0" rtlCol="0" anchor="ctr"/>
+          <a:lstStyle/>
+          <a:p>
+            <a:pPr indent="0" marL="0">
+              <a:buNone/>
+            </a:pPr>
+            <a:r>
+              <a:rPr lang="en-US" sz="900" dirty="0">
+                <a:solidFill>
+                  <a:srgbClr val="5F6B74"/>
                 </a:solidFill>
                 <a:latin typeface="Calibri" pitchFamily="34" charset="0"/>
                 <a:ea typeface="Calibri" pitchFamily="34" charset="-122"/>
                 <a:cs typeface="Calibri" pitchFamily="34" charset="-120"/>
               </a:rPr>
-              <a:t>10 s windows · colony rules</a:t>
-            </a:r>
-            <a:endParaRPr lang="en-US" sz="1000" dirty="0"/>
-          </a:p>
-        </p:txBody>
-      </p:sp>
-      <p:sp>
-        <p:nvSpPr>
-          <p:cNvPr id="11" name="Shape 9"/>
-          <p:cNvSpPr/>
-          <p:nvPr/>
-        </p:nvSpPr>
-        <p:spPr>
-          <a:xfrm>
-            <a:off x="3886200" y="3246120"/>
-            <a:ext cx="502920" cy="0"/>
-          </a:xfrm>
-          <a:prstGeom prst="line">
-            <a:avLst/>
-          </a:prstGeom>
-          <a:noFill/>
-          <a:ln w="31750">
-            <a:solidFill>
-              <a:srgbClr val="8A6516"/>
-            </a:solidFill>
-            <a:prstDash val="solid"/>
-            <a:tailEnd type="triangle"/>
-          </a:ln>
-        </p:spPr>
-      </p:sp>
-      <p:sp>
-        <p:nvSpPr>
-          <p:cNvPr id="12" name="Shape 10"/>
-          <p:cNvSpPr/>
-          <p:nvPr/>
-        </p:nvSpPr>
-        <p:spPr>
-          <a:xfrm>
-            <a:off x="4572000" y="1554480"/>
-            <a:ext cx="6949440" cy="3383280"/>
+              <a:t>time-series store</a:t>
+            </a:r>
+            <a:endParaRPr lang="en-US" sz="900" dirty="0"/>
+          </a:p>
+        </p:txBody>
+      </p:sp>
+      <p:sp>
+        <p:nvSpPr>
+          <p:cNvPr id="31" name="Shape 29"/>
+          <p:cNvSpPr/>
+          <p:nvPr/>
+        </p:nvSpPr>
+        <p:spPr>
+          <a:xfrm>
+            <a:off x="9638538" y="3845052"/>
+            <a:ext cx="310896" cy="219456"/>
+          </a:xfrm>
+          <a:prstGeom prst="rightArrow">
+            <a:avLst/>
+          </a:prstGeom>
+          <a:solidFill>
+            <a:srgbClr val="5F6B74"/>
+          </a:solidFill>
+          <a:ln/>
+        </p:spPr>
+      </p:sp>
+      <p:sp>
+        <p:nvSpPr>
+          <p:cNvPr id="32" name="Shape 30"/>
+          <p:cNvSpPr/>
+          <p:nvPr/>
+        </p:nvSpPr>
+        <p:spPr>
+          <a:xfrm>
+            <a:off x="10022586" y="2971800"/>
+            <a:ext cx="1391869" cy="1965960"/>
           </a:xfrm>
           <a:prstGeom prst="roundRect">
             <a:avLst>
-              <a:gd name="adj" fmla="val 2703"/>
+              <a:gd name="adj" fmla="val 2628"/>
             </a:avLst>
           </a:prstGeom>
           <a:solidFill>
-            <a:srgbClr val="F7F2E3"/>
-          </a:solidFill>
-          <a:ln w="19050">
+            <a:srgbClr val="FFFAF0"/>
+          </a:solidFill>
+          <a:ln w="12700">
             <a:solidFill>
-              <a:srgbClr val="8A6516"/>
+              <a:srgbClr val="E4E6E9"/>
             </a:solidFill>
             <a:prstDash val="solid"/>
           </a:ln>
@@ -1873,571 +2358,121 @@
       </p:sp>
       <p:sp>
         <p:nvSpPr>
-          <p:cNvPr id="13" name="Text 11"/>
-          <p:cNvSpPr/>
-          <p:nvPr/>
-        </p:nvSpPr>
-        <p:spPr>
-          <a:xfrm>
-            <a:off x="4572000" y="1691640"/>
-            <a:ext cx="6949440" cy="365760"/>
-          </a:xfrm>
-          <a:prstGeom prst="rect">
-            <a:avLst/>
-          </a:prstGeom>
-          <a:noFill/>
-          <a:ln/>
-        </p:spPr>
-        <p:txBody>
-          <a:bodyPr wrap="square" rtlCol="0" anchor="ctr"/>
-          <a:lstStyle/>
-          <a:p>
-            <a:pPr algn="ctr" indent="0" marL="0">
-              <a:buNone/>
-            </a:pPr>
-            <a:r>
-              <a:rPr lang="en-US" sz="1200" b="1" spc="200" kern="0" dirty="0">
-                <a:solidFill>
-                  <a:srgbClr val="8A6516"/>
+          <p:cNvPr id="33" name="Text 31"/>
+          <p:cNvSpPr/>
+          <p:nvPr/>
+        </p:nvSpPr>
+        <p:spPr>
+          <a:xfrm>
+            <a:off x="10168890" y="3154680"/>
+            <a:ext cx="1099261" cy="320040"/>
+          </a:xfrm>
+          <a:prstGeom prst="rect">
+            <a:avLst/>
+          </a:prstGeom>
+          <a:noFill/>
+          <a:ln/>
+        </p:spPr>
+        <p:txBody>
+          <a:bodyPr wrap="square" lIns="0" tIns="0" rIns="0" bIns="0" rtlCol="0" anchor="ctr"/>
+          <a:lstStyle/>
+          <a:p>
+            <a:pPr indent="0" marL="0">
+              <a:buNone/>
+            </a:pPr>
+            <a:r>
+              <a:rPr lang="en-US" sz="1100" dirty="0">
+                <a:solidFill>
+                  <a:srgbClr val="A35A12"/>
+                </a:solidFill>
+                <a:latin typeface="Consolas" pitchFamily="34" charset="0"/>
+                <a:ea typeface="Consolas" pitchFamily="34" charset="-122"/>
+                <a:cs typeface="Consolas" pitchFamily="34" charset="-120"/>
+              </a:rPr>
+              <a:t>06</a:t>
+            </a:r>
+            <a:endParaRPr lang="en-US" sz="1100" dirty="0"/>
+          </a:p>
+        </p:txBody>
+      </p:sp>
+      <p:sp>
+        <p:nvSpPr>
+          <p:cNvPr id="34" name="Text 32"/>
+          <p:cNvSpPr/>
+          <p:nvPr/>
+        </p:nvSpPr>
+        <p:spPr>
+          <a:xfrm>
+            <a:off x="10168890" y="3593592"/>
+            <a:ext cx="1099261" cy="868680"/>
+          </a:xfrm>
+          <a:prstGeom prst="rect">
+            <a:avLst/>
+          </a:prstGeom>
+          <a:noFill/>
+          <a:ln/>
+        </p:spPr>
+        <p:txBody>
+          <a:bodyPr wrap="square" lIns="0" tIns="0" rIns="0" bIns="0" rtlCol="0" anchor="t"/>
+          <a:lstStyle/>
+          <a:p>
+            <a:pPr indent="0" marL="0">
+              <a:lnSpc>
+                <a:spcPct val="96000"/>
+              </a:lnSpc>
+              <a:buNone/>
+            </a:pPr>
+            <a:r>
+              <a:rPr lang="en-US" sz="1300" b="1" dirty="0">
+                <a:solidFill>
+                  <a:srgbClr val="3B2712"/>
+                </a:solidFill>
+                <a:latin typeface="Century Gothic" pitchFamily="34" charset="0"/>
+                <a:ea typeface="Century Gothic" pitchFamily="34" charset="-122"/>
+                <a:cs typeface="Century Gothic" pitchFamily="34" charset="-120"/>
+              </a:rPr>
+              <a:t>API GW + S3</a:t>
+            </a:r>
+            <a:endParaRPr lang="en-US" sz="1300" dirty="0"/>
+          </a:p>
+        </p:txBody>
+      </p:sp>
+      <p:sp>
+        <p:nvSpPr>
+          <p:cNvPr id="35" name="Text 33"/>
+          <p:cNvSpPr/>
+          <p:nvPr/>
+        </p:nvSpPr>
+        <p:spPr>
+          <a:xfrm>
+            <a:off x="10168890" y="4453128"/>
+            <a:ext cx="1099261" cy="365760"/>
+          </a:xfrm>
+          <a:prstGeom prst="rect">
+            <a:avLst/>
+          </a:prstGeom>
+          <a:noFill/>
+          <a:ln/>
+        </p:spPr>
+        <p:txBody>
+          <a:bodyPr wrap="square" lIns="0" tIns="0" rIns="0" bIns="0" rtlCol="0" anchor="ctr"/>
+          <a:lstStyle/>
+          <a:p>
+            <a:pPr indent="0" marL="0">
+              <a:buNone/>
+            </a:pPr>
+            <a:r>
+              <a:rPr lang="en-US" sz="900" dirty="0">
+                <a:solidFill>
+                  <a:srgbClr val="5F6B74"/>
                 </a:solidFill>
                 <a:latin typeface="Calibri" pitchFamily="34" charset="0"/>
                 <a:ea typeface="Calibri" pitchFamily="34" charset="-122"/>
                 <a:cs typeface="Calibri" pitchFamily="34" charset="-120"/>
               </a:rPr>
-              <a:t>CLOUD (serverless)</a:t>
-            </a:r>
-            <a:endParaRPr lang="en-US" sz="1200" dirty="0"/>
-          </a:p>
-        </p:txBody>
-      </p:sp>
-      <p:sp>
-        <p:nvSpPr>
-          <p:cNvPr id="14" name="Shape 12"/>
-          <p:cNvSpPr/>
-          <p:nvPr/>
-        </p:nvSpPr>
-        <p:spPr>
-          <a:xfrm>
-            <a:off x="4846320" y="2651760"/>
-            <a:ext cx="1463040" cy="1371600"/>
-          </a:xfrm>
-          <a:prstGeom prst="roundRect">
-            <a:avLst>
-              <a:gd name="adj" fmla="val 5333"/>
-            </a:avLst>
-          </a:prstGeom>
-          <a:solidFill>
-            <a:srgbClr val="FFFFFF"/>
-          </a:solidFill>
-          <a:ln w="15240">
-            <a:solidFill>
-              <a:srgbClr val="8A6516"/>
-            </a:solidFill>
-            <a:prstDash val="solid"/>
-          </a:ln>
-        </p:spPr>
-      </p:sp>
-      <p:sp>
-        <p:nvSpPr>
-          <p:cNvPr id="15" name="Text 13"/>
-          <p:cNvSpPr/>
-          <p:nvPr/>
-        </p:nvSpPr>
-        <p:spPr>
-          <a:xfrm>
-            <a:off x="4800600" y="2907792"/>
-            <a:ext cx="1554480" cy="457200"/>
-          </a:xfrm>
-          <a:prstGeom prst="rect">
-            <a:avLst/>
-          </a:prstGeom>
-          <a:noFill/>
-          <a:ln/>
-        </p:spPr>
-        <p:txBody>
-          <a:bodyPr wrap="square" lIns="0" tIns="0" rIns="0" bIns="0" rtlCol="0" anchor="ctr"/>
-          <a:lstStyle/>
-          <a:p>
-            <a:pPr algn="ctr" indent="0" marL="0">
-              <a:buNone/>
-            </a:pPr>
-            <a:r>
-              <a:rPr lang="en-US" sz="1250" b="1" dirty="0">
-                <a:solidFill>
-                  <a:srgbClr val="281F0F"/>
-                </a:solidFill>
-                <a:latin typeface="Calibri" pitchFamily="34" charset="0"/>
-                <a:ea typeface="Calibri" pitchFamily="34" charset="-122"/>
-                <a:cs typeface="Calibri" pitchFamily="34" charset="-120"/>
-              </a:rPr>
-              <a:t>Amazon SQS</a:t>
-            </a:r>
-            <a:endParaRPr lang="en-US" sz="1250" dirty="0"/>
-          </a:p>
-        </p:txBody>
-      </p:sp>
-      <p:sp>
-        <p:nvSpPr>
-          <p:cNvPr id="16" name="Text 14"/>
-          <p:cNvSpPr/>
-          <p:nvPr/>
-        </p:nvSpPr>
-        <p:spPr>
-          <a:xfrm>
-            <a:off x="4828032" y="3401568"/>
-            <a:ext cx="1499616" cy="457200"/>
-          </a:xfrm>
-          <a:prstGeom prst="rect">
-            <a:avLst/>
-          </a:prstGeom>
-          <a:noFill/>
-          <a:ln/>
-        </p:spPr>
-        <p:txBody>
-          <a:bodyPr wrap="square" lIns="0" tIns="0" rIns="0" bIns="0" rtlCol="0" anchor="ctr"/>
-          <a:lstStyle/>
-          <a:p>
-            <a:pPr algn="ctr" indent="0" marL="0">
-              <a:buNone/>
-            </a:pPr>
-            <a:r>
-              <a:rPr lang="en-US" sz="900" dirty="0">
-                <a:solidFill>
-                  <a:srgbClr val="6E6144"/>
-                </a:solidFill>
-                <a:latin typeface="Calibri" pitchFamily="34" charset="0"/>
-                <a:ea typeface="Calibri" pitchFamily="34" charset="-122"/>
-                <a:cs typeface="Calibri" pitchFamily="34" charset="-120"/>
-              </a:rPr>
-              <a:t>1 summary / window</a:t>
+              <a:t>colony verdict cards</a:t>
             </a:r>
             <a:endParaRPr lang="en-US" sz="900" dirty="0"/>
-          </a:p>
-        </p:txBody>
-      </p:sp>
-      <p:sp>
-        <p:nvSpPr>
-          <p:cNvPr id="17" name="Shape 15"/>
-          <p:cNvSpPr/>
-          <p:nvPr/>
-        </p:nvSpPr>
-        <p:spPr>
-          <a:xfrm>
-            <a:off x="6318504" y="3337560"/>
-            <a:ext cx="164592" cy="0"/>
-          </a:xfrm>
-          <a:prstGeom prst="line">
-            <a:avLst/>
-          </a:prstGeom>
-          <a:noFill/>
-          <a:ln w="20320">
-            <a:solidFill>
-              <a:srgbClr val="D8AE3E"/>
-            </a:solidFill>
-            <a:prstDash val="solid"/>
-            <a:tailEnd type="triangle"/>
-          </a:ln>
-        </p:spPr>
-      </p:sp>
-      <p:sp>
-        <p:nvSpPr>
-          <p:cNvPr id="18" name="Shape 16"/>
-          <p:cNvSpPr/>
-          <p:nvPr/>
-        </p:nvSpPr>
-        <p:spPr>
-          <a:xfrm>
-            <a:off x="6492240" y="2651760"/>
-            <a:ext cx="1463040" cy="1371600"/>
-          </a:xfrm>
-          <a:prstGeom prst="roundRect">
-            <a:avLst>
-              <a:gd name="adj" fmla="val 5333"/>
-            </a:avLst>
-          </a:prstGeom>
-          <a:solidFill>
-            <a:srgbClr val="FFFFFF"/>
-          </a:solidFill>
-          <a:ln w="15240">
-            <a:solidFill>
-              <a:srgbClr val="8A6516"/>
-            </a:solidFill>
-            <a:prstDash val="solid"/>
-          </a:ln>
-        </p:spPr>
-      </p:sp>
-      <p:sp>
-        <p:nvSpPr>
-          <p:cNvPr id="19" name="Text 17"/>
-          <p:cNvSpPr/>
-          <p:nvPr/>
-        </p:nvSpPr>
-        <p:spPr>
-          <a:xfrm>
-            <a:off x="6446520" y="2907792"/>
-            <a:ext cx="1554480" cy="457200"/>
-          </a:xfrm>
-          <a:prstGeom prst="rect">
-            <a:avLst/>
-          </a:prstGeom>
-          <a:noFill/>
-          <a:ln/>
-        </p:spPr>
-        <p:txBody>
-          <a:bodyPr wrap="square" lIns="0" tIns="0" rIns="0" bIns="0" rtlCol="0" anchor="ctr"/>
-          <a:lstStyle/>
-          <a:p>
-            <a:pPr algn="ctr" indent="0" marL="0">
-              <a:buNone/>
-            </a:pPr>
-            <a:r>
-              <a:rPr lang="en-US" sz="1250" b="1" dirty="0">
-                <a:solidFill>
-                  <a:srgbClr val="281F0F"/>
-                </a:solidFill>
-                <a:latin typeface="Calibri" pitchFamily="34" charset="0"/>
-                <a:ea typeface="Calibri" pitchFamily="34" charset="-122"/>
-                <a:cs typeface="Calibri" pitchFamily="34" charset="-120"/>
-              </a:rPr>
-              <a:t>AWS Lambda</a:t>
-            </a:r>
-            <a:endParaRPr lang="en-US" sz="1250" dirty="0"/>
-          </a:p>
-        </p:txBody>
-      </p:sp>
-      <p:sp>
-        <p:nvSpPr>
-          <p:cNvPr id="20" name="Text 18"/>
-          <p:cNvSpPr/>
-          <p:nvPr/>
-        </p:nvSpPr>
-        <p:spPr>
-          <a:xfrm>
-            <a:off x="6473952" y="3401568"/>
-            <a:ext cx="1499616" cy="457200"/>
-          </a:xfrm>
-          <a:prstGeom prst="rect">
-            <a:avLst/>
-          </a:prstGeom>
-          <a:noFill/>
-          <a:ln/>
-        </p:spPr>
-        <p:txBody>
-          <a:bodyPr wrap="square" lIns="0" tIns="0" rIns="0" bIns="0" rtlCol="0" anchor="ctr"/>
-          <a:lstStyle/>
-          <a:p>
-            <a:pPr algn="ctr" indent="0" marL="0">
-              <a:buNone/>
-            </a:pPr>
-            <a:r>
-              <a:rPr lang="en-US" sz="900" dirty="0">
-                <a:solidFill>
-                  <a:srgbClr val="6E6144"/>
-                </a:solidFill>
-                <a:latin typeface="Calibri" pitchFamily="34" charset="0"/>
-                <a:ea typeface="Calibri" pitchFamily="34" charset="-122"/>
-                <a:cs typeface="Calibri" pitchFamily="34" charset="-120"/>
-              </a:rPr>
-              <a:t>nodejs20 ingest</a:t>
-            </a:r>
-            <a:endParaRPr lang="en-US" sz="900" dirty="0"/>
-          </a:p>
-        </p:txBody>
-      </p:sp>
-      <p:sp>
-        <p:nvSpPr>
-          <p:cNvPr id="21" name="Shape 19"/>
-          <p:cNvSpPr/>
-          <p:nvPr/>
-        </p:nvSpPr>
-        <p:spPr>
-          <a:xfrm>
-            <a:off x="7964424" y="3337560"/>
-            <a:ext cx="164592" cy="0"/>
-          </a:xfrm>
-          <a:prstGeom prst="line">
-            <a:avLst/>
-          </a:prstGeom>
-          <a:noFill/>
-          <a:ln w="20320">
-            <a:solidFill>
-              <a:srgbClr val="D8AE3E"/>
-            </a:solidFill>
-            <a:prstDash val="solid"/>
-            <a:tailEnd type="triangle"/>
-          </a:ln>
-        </p:spPr>
-      </p:sp>
-      <p:sp>
-        <p:nvSpPr>
-          <p:cNvPr id="22" name="Shape 20"/>
-          <p:cNvSpPr/>
-          <p:nvPr/>
-        </p:nvSpPr>
-        <p:spPr>
-          <a:xfrm>
-            <a:off x="8138160" y="2651760"/>
-            <a:ext cx="1463040" cy="1371600"/>
-          </a:xfrm>
-          <a:prstGeom prst="roundRect">
-            <a:avLst>
-              <a:gd name="adj" fmla="val 5333"/>
-            </a:avLst>
-          </a:prstGeom>
-          <a:solidFill>
-            <a:srgbClr val="FFFFFF"/>
-          </a:solidFill>
-          <a:ln w="15240">
-            <a:solidFill>
-              <a:srgbClr val="8A6516"/>
-            </a:solidFill>
-            <a:prstDash val="solid"/>
-          </a:ln>
-        </p:spPr>
-      </p:sp>
-      <p:sp>
-        <p:nvSpPr>
-          <p:cNvPr id="23" name="Text 21"/>
-          <p:cNvSpPr/>
-          <p:nvPr/>
-        </p:nvSpPr>
-        <p:spPr>
-          <a:xfrm>
-            <a:off x="8092440" y="2907792"/>
-            <a:ext cx="1554480" cy="457200"/>
-          </a:xfrm>
-          <a:prstGeom prst="rect">
-            <a:avLst/>
-          </a:prstGeom>
-          <a:noFill/>
-          <a:ln/>
-        </p:spPr>
-        <p:txBody>
-          <a:bodyPr wrap="square" lIns="0" tIns="0" rIns="0" bIns="0" rtlCol="0" anchor="ctr"/>
-          <a:lstStyle/>
-          <a:p>
-            <a:pPr algn="ctr" indent="0" marL="0">
-              <a:buNone/>
-            </a:pPr>
-            <a:r>
-              <a:rPr lang="en-US" sz="1250" b="1" dirty="0">
-                <a:solidFill>
-                  <a:srgbClr val="281F0F"/>
-                </a:solidFill>
-                <a:latin typeface="Calibri" pitchFamily="34" charset="0"/>
-                <a:ea typeface="Calibri" pitchFamily="34" charset="-122"/>
-                <a:cs typeface="Calibri" pitchFamily="34" charset="-120"/>
-              </a:rPr>
-              <a:t>DynamoDB</a:t>
-            </a:r>
-            <a:endParaRPr lang="en-US" sz="1250" dirty="0"/>
-          </a:p>
-        </p:txBody>
-      </p:sp>
-      <p:sp>
-        <p:nvSpPr>
-          <p:cNvPr id="24" name="Text 22"/>
-          <p:cNvSpPr/>
-          <p:nvPr/>
-        </p:nvSpPr>
-        <p:spPr>
-          <a:xfrm>
-            <a:off x="8119872" y="3401568"/>
-            <a:ext cx="1499616" cy="457200"/>
-          </a:xfrm>
-          <a:prstGeom prst="rect">
-            <a:avLst/>
-          </a:prstGeom>
-          <a:noFill/>
-          <a:ln/>
-        </p:spPr>
-        <p:txBody>
-          <a:bodyPr wrap="square" lIns="0" tIns="0" rIns="0" bIns="0" rtlCol="0" anchor="ctr"/>
-          <a:lstStyle/>
-          <a:p>
-            <a:pPr algn="ctr" indent="0" marL="0">
-              <a:buNone/>
-            </a:pPr>
-            <a:r>
-              <a:rPr lang="en-US" sz="900" dirty="0">
-                <a:solidFill>
-                  <a:srgbClr val="6E6144"/>
-                </a:solidFill>
-                <a:latin typeface="Calibri" pitchFamily="34" charset="0"/>
-                <a:ea typeface="Calibri" pitchFamily="34" charset="-122"/>
-                <a:cs typeface="Calibri" pitchFamily="34" charset="-120"/>
-              </a:rPr>
-              <a:t>time-series store</a:t>
-            </a:r>
-            <a:endParaRPr lang="en-US" sz="900" dirty="0"/>
-          </a:p>
-        </p:txBody>
-      </p:sp>
-      <p:sp>
-        <p:nvSpPr>
-          <p:cNvPr id="25" name="Shape 23"/>
-          <p:cNvSpPr/>
-          <p:nvPr/>
-        </p:nvSpPr>
-        <p:spPr>
-          <a:xfrm>
-            <a:off x="9610344" y="3337560"/>
-            <a:ext cx="164592" cy="0"/>
-          </a:xfrm>
-          <a:prstGeom prst="line">
-            <a:avLst/>
-          </a:prstGeom>
-          <a:noFill/>
-          <a:ln w="20320">
-            <a:solidFill>
-              <a:srgbClr val="D8AE3E"/>
-            </a:solidFill>
-            <a:prstDash val="solid"/>
-            <a:tailEnd type="triangle"/>
-          </a:ln>
-        </p:spPr>
-      </p:sp>
-      <p:sp>
-        <p:nvSpPr>
-          <p:cNvPr id="26" name="Shape 24"/>
-          <p:cNvSpPr/>
-          <p:nvPr/>
-        </p:nvSpPr>
-        <p:spPr>
-          <a:xfrm>
-            <a:off x="9784080" y="2651760"/>
-            <a:ext cx="1463040" cy="1371600"/>
-          </a:xfrm>
-          <a:prstGeom prst="roundRect">
-            <a:avLst>
-              <a:gd name="adj" fmla="val 5333"/>
-            </a:avLst>
-          </a:prstGeom>
-          <a:solidFill>
-            <a:srgbClr val="FFFFFF"/>
-          </a:solidFill>
-          <a:ln w="15240">
-            <a:solidFill>
-              <a:srgbClr val="B98A1E"/>
-            </a:solidFill>
-            <a:prstDash val="solid"/>
-          </a:ln>
-        </p:spPr>
-      </p:sp>
-      <p:sp>
-        <p:nvSpPr>
-          <p:cNvPr id="27" name="Text 25"/>
-          <p:cNvSpPr/>
-          <p:nvPr/>
-        </p:nvSpPr>
-        <p:spPr>
-          <a:xfrm>
-            <a:off x="9738360" y="2907792"/>
-            <a:ext cx="1554480" cy="457200"/>
-          </a:xfrm>
-          <a:prstGeom prst="rect">
-            <a:avLst/>
-          </a:prstGeom>
-          <a:noFill/>
-          <a:ln/>
-        </p:spPr>
-        <p:txBody>
-          <a:bodyPr wrap="square" lIns="0" tIns="0" rIns="0" bIns="0" rtlCol="0" anchor="ctr"/>
-          <a:lstStyle/>
-          <a:p>
-            <a:pPr algn="ctr" indent="0" marL="0">
-              <a:buNone/>
-            </a:pPr>
-            <a:r>
-              <a:rPr lang="en-US" sz="1250" b="1" dirty="0">
-                <a:solidFill>
-                  <a:srgbClr val="281F0F"/>
-                </a:solidFill>
-                <a:latin typeface="Calibri" pitchFamily="34" charset="0"/>
-                <a:ea typeface="Calibri" pitchFamily="34" charset="-122"/>
-                <a:cs typeface="Calibri" pitchFamily="34" charset="-120"/>
-              </a:rPr>
-              <a:t>API GW + S3</a:t>
-            </a:r>
-            <a:endParaRPr lang="en-US" sz="1250" dirty="0"/>
-          </a:p>
-        </p:txBody>
-      </p:sp>
-      <p:sp>
-        <p:nvSpPr>
-          <p:cNvPr id="28" name="Text 26"/>
-          <p:cNvSpPr/>
-          <p:nvPr/>
-        </p:nvSpPr>
-        <p:spPr>
-          <a:xfrm>
-            <a:off x="9765792" y="3401568"/>
-            <a:ext cx="1499616" cy="457200"/>
-          </a:xfrm>
-          <a:prstGeom prst="rect">
-            <a:avLst/>
-          </a:prstGeom>
-          <a:noFill/>
-          <a:ln/>
-        </p:spPr>
-        <p:txBody>
-          <a:bodyPr wrap="square" lIns="0" tIns="0" rIns="0" bIns="0" rtlCol="0" anchor="ctr"/>
-          <a:lstStyle/>
-          <a:p>
-            <a:pPr algn="ctr" indent="0" marL="0">
-              <a:buNone/>
-            </a:pPr>
-            <a:r>
-              <a:rPr lang="en-US" sz="900" dirty="0">
-                <a:solidFill>
-                  <a:srgbClr val="6E6144"/>
-                </a:solidFill>
-                <a:latin typeface="Calibri" pitchFamily="34" charset="0"/>
-                <a:ea typeface="Calibri" pitchFamily="34" charset="-122"/>
-                <a:cs typeface="Calibri" pitchFamily="34" charset="-120"/>
-              </a:rPr>
-              <a:t>colony verdict cards</a:t>
-            </a:r>
-            <a:endParaRPr lang="en-US" sz="900" dirty="0"/>
-          </a:p>
-        </p:txBody>
-      </p:sp>
-      <p:sp>
-        <p:nvSpPr>
-          <p:cNvPr id="29" name="Text 27"/>
-          <p:cNvSpPr/>
-          <p:nvPr/>
-        </p:nvSpPr>
-        <p:spPr>
-          <a:xfrm>
-            <a:off x="640080" y="5257800"/>
-            <a:ext cx="10972800" cy="731520"/>
-          </a:xfrm>
-          <a:prstGeom prst="rect">
-            <a:avLst/>
-          </a:prstGeom>
-          <a:noFill/>
-          <a:ln/>
-        </p:spPr>
-        <p:txBody>
-          <a:bodyPr wrap="square" rtlCol="0" anchor="ctr"/>
-          <a:lstStyle/>
-          <a:p>
-            <a:pPr algn="ctr" indent="0" marL="0">
-              <a:buNone/>
-            </a:pPr>
-            <a:r>
-              <a:rPr lang="en-US" sz="1500" i="1" dirty="0">
-                <a:solidFill>
-                  <a:srgbClr val="8A6516"/>
-                </a:solidFill>
-                <a:latin typeface="Calibri" pitchFamily="34" charset="0"/>
-                <a:ea typeface="Calibri" pitchFamily="34" charset="-122"/>
-                <a:cs typeface="Calibri" pitchFamily="34" charset="-120"/>
-              </a:rPr>
-              <a:t>Colony rules, including the acoustic swarming precursor, fire the moment a 10-second window closes on site; the read tier composes a plain-language verdict.</a:t>
-            </a:r>
-            <a:endParaRPr lang="en-US" sz="1500" dirty="0"/>
           </a:p>
         </p:txBody>
       </p:sp>
@@ -2455,7 +2490,7 @@
     <p:bg>
       <p:bgPr>
         <a:solidFill>
-          <a:srgbClr val="FFFFFF"/>
+          <a:srgbClr val="F4E8CE"/>
         </a:solidFill>
       </p:bgPr>
     </p:bg>
@@ -2475,14 +2510,171 @@
       </p:grpSpPr>
       <p:sp>
         <p:nvSpPr>
-          <p:cNvPr id="2" name="Text 0"/>
-          <p:cNvSpPr/>
-          <p:nvPr/>
-        </p:nvSpPr>
-        <p:spPr>
-          <a:xfrm>
-            <a:off x="640080" y="457200"/>
-            <a:ext cx="7315200" cy="640080"/>
+          <p:cNvPr id="2" name="Shape 0"/>
+          <p:cNvSpPr/>
+          <p:nvPr/>
+        </p:nvSpPr>
+        <p:spPr>
+          <a:xfrm>
+            <a:off x="457200" y="457200"/>
+            <a:ext cx="274320" cy="274320"/>
+          </a:xfrm>
+          <a:prstGeom prst="rect">
+            <a:avLst/>
+          </a:prstGeom>
+          <a:solidFill>
+            <a:srgbClr val="A35A12"/>
+          </a:solidFill>
+          <a:ln/>
+        </p:spPr>
+      </p:sp>
+      <p:sp>
+        <p:nvSpPr>
+          <p:cNvPr id="3" name="Shape 1"/>
+          <p:cNvSpPr/>
+          <p:nvPr/>
+        </p:nvSpPr>
+        <p:spPr>
+          <a:xfrm>
+            <a:off x="11460175" y="6126480"/>
+            <a:ext cx="274320" cy="274320"/>
+          </a:xfrm>
+          <a:prstGeom prst="rect">
+            <a:avLst/>
+          </a:prstGeom>
+          <a:solidFill>
+            <a:srgbClr val="A35A12"/>
+          </a:solidFill>
+          <a:ln/>
+        </p:spPr>
+      </p:sp>
+      <p:sp>
+        <p:nvSpPr>
+          <p:cNvPr id="4" name="Text 2"/>
+          <p:cNvSpPr/>
+          <p:nvPr/>
+        </p:nvSpPr>
+        <p:spPr>
+          <a:xfrm>
+            <a:off x="777240" y="731520"/>
+            <a:ext cx="914400" cy="640080"/>
+          </a:xfrm>
+          <a:prstGeom prst="rect">
+            <a:avLst/>
+          </a:prstGeom>
+          <a:noFill/>
+          <a:ln/>
+        </p:spPr>
+        <p:txBody>
+          <a:bodyPr wrap="square" lIns="0" tIns="0" rIns="0" bIns="0" rtlCol="0" anchor="ctr"/>
+          <a:lstStyle/>
+          <a:p>
+            <a:pPr indent="0" marL="0">
+              <a:buNone/>
+            </a:pPr>
+            <a:r>
+              <a:rPr lang="en-US" sz="3000" b="1" dirty="0">
+                <a:solidFill>
+                  <a:srgbClr val="A35A12"/>
+                </a:solidFill>
+                <a:latin typeface="Century Gothic" pitchFamily="34" charset="0"/>
+                <a:ea typeface="Century Gothic" pitchFamily="34" charset="-122"/>
+                <a:cs typeface="Century Gothic" pitchFamily="34" charset="-120"/>
+              </a:rPr>
+              <a:t>02</a:t>
+            </a:r>
+            <a:endParaRPr lang="en-US" sz="3000" dirty="0"/>
+          </a:p>
+        </p:txBody>
+      </p:sp>
+      <p:sp>
+        <p:nvSpPr>
+          <p:cNvPr id="5" name="Text 3"/>
+          <p:cNvSpPr/>
+          <p:nvPr/>
+        </p:nvSpPr>
+        <p:spPr>
+          <a:xfrm>
+            <a:off x="1645920" y="905256"/>
+            <a:ext cx="9768535" cy="274320"/>
+          </a:xfrm>
+          <a:prstGeom prst="rect">
+            <a:avLst/>
+          </a:prstGeom>
+          <a:noFill/>
+          <a:ln/>
+        </p:spPr>
+        <p:txBody>
+          <a:bodyPr wrap="square" lIns="0" tIns="0" rIns="0" bIns="0" rtlCol="0" anchor="ctr"/>
+          <a:lstStyle/>
+          <a:p>
+            <a:pPr indent="0" marL="0">
+              <a:buNone/>
+            </a:pPr>
+            <a:r>
+              <a:rPr lang="en-US" sz="1100" b="1" spc="200" kern="0" dirty="0">
+                <a:solidFill>
+                  <a:srgbClr val="5F6B74"/>
+                </a:solidFill>
+                <a:latin typeface="Calibri" pitchFamily="34" charset="0"/>
+                <a:ea typeface="Calibri" pitchFamily="34" charset="-122"/>
+                <a:cs typeface="Calibri" pitchFamily="34" charset="-120"/>
+              </a:rPr>
+              <a:t>LIVE DEMO</a:t>
+            </a:r>
+            <a:endParaRPr lang="en-US" sz="1100" dirty="0"/>
+          </a:p>
+        </p:txBody>
+      </p:sp>
+      <p:sp>
+        <p:nvSpPr>
+          <p:cNvPr id="6" name="Text 4"/>
+          <p:cNvSpPr/>
+          <p:nvPr/>
+        </p:nvSpPr>
+        <p:spPr>
+          <a:xfrm>
+            <a:off x="777240" y="1380744"/>
+            <a:ext cx="10637215" cy="640080"/>
+          </a:xfrm>
+          <a:prstGeom prst="rect">
+            <a:avLst/>
+          </a:prstGeom>
+          <a:noFill/>
+          <a:ln/>
+        </p:spPr>
+        <p:txBody>
+          <a:bodyPr wrap="square" lIns="0" tIns="0" rIns="0" bIns="0" rtlCol="0" anchor="ctr"/>
+          <a:lstStyle/>
+          <a:p>
+            <a:pPr indent="0" marL="0">
+              <a:buNone/>
+            </a:pPr>
+            <a:r>
+              <a:rPr lang="en-US" sz="2300" b="1" dirty="0">
+                <a:solidFill>
+                  <a:srgbClr val="3B2712"/>
+                </a:solidFill>
+                <a:latin typeface="Century Gothic" pitchFamily="34" charset="0"/>
+                <a:ea typeface="Century Gothic" pitchFamily="34" charset="-122"/>
+                <a:cs typeface="Century Gothic" pitchFamily="34" charset="-120"/>
+              </a:rPr>
+              <a:t>See it running on AWS</a:t>
+            </a:r>
+            <a:endParaRPr lang="en-US" sz="2300" dirty="0"/>
+          </a:p>
+        </p:txBody>
+      </p:sp>
+      <p:sp>
+        <p:nvSpPr>
+          <p:cNvPr id="7" name="Text 5"/>
+          <p:cNvSpPr/>
+          <p:nvPr/>
+        </p:nvSpPr>
+        <p:spPr>
+          <a:xfrm>
+            <a:off x="777240" y="1901952"/>
+            <a:ext cx="10637215" cy="274320"/>
           </a:xfrm>
           <a:prstGeom prst="rect">
             <a:avLst/>
@@ -2498,48 +2690,9 @@
               <a:buNone/>
             </a:pPr>
             <a:r>
-              <a:rPr lang="en-US" sz="3000" b="1" dirty="0">
-                <a:solidFill>
-                  <a:srgbClr val="281F0F"/>
-                </a:solidFill>
-                <a:latin typeface="Century Schoolbook" pitchFamily="34" charset="0"/>
-                <a:ea typeface="Century Schoolbook" pitchFamily="34" charset="-122"/>
-                <a:cs typeface="Century Schoolbook" pitchFamily="34" charset="-120"/>
-              </a:rPr>
-              <a:t>Live Demo</a:t>
-            </a:r>
-            <a:endParaRPr lang="en-US" sz="3000" dirty="0"/>
-          </a:p>
-        </p:txBody>
-      </p:sp>
-      <p:sp>
-        <p:nvSpPr>
-          <p:cNvPr id="3" name="Text 1"/>
-          <p:cNvSpPr/>
-          <p:nvPr/>
-        </p:nvSpPr>
-        <p:spPr>
-          <a:xfrm>
-            <a:off x="658368" y="1143000"/>
-            <a:ext cx="10972800" cy="365760"/>
-          </a:xfrm>
-          <a:prstGeom prst="rect">
-            <a:avLst/>
-          </a:prstGeom>
-          <a:noFill/>
-          <a:ln/>
-        </p:spPr>
-        <p:txBody>
-          <a:bodyPr wrap="square" rtlCol="0" anchor="ctr"/>
-          <a:lstStyle/>
-          <a:p>
-            <a:pPr indent="0" marL="0">
-              <a:buNone/>
-            </a:pPr>
-            <a:r>
-              <a:rPr lang="en-US" sz="1400" dirty="0">
-                <a:solidFill>
-                  <a:srgbClr val="B98A1E"/>
+              <a:rPr lang="en-US" sz="1100" dirty="0">
+                <a:solidFill>
+                  <a:srgbClr val="A35A12"/>
                 </a:solidFill>
                 <a:latin typeface="Consolas" pitchFamily="34" charset="0"/>
                 <a:ea typeface="Consolas" pitchFamily="34" charset="-122"/>
@@ -2547,32 +2700,32 @@
               </a:rPr>
               <a:t>bam-frontend-881865707591.s3.us-east-1.amazonaws.com</a:t>
             </a:r>
-            <a:endParaRPr lang="en-US" sz="1400" dirty="0"/>
-          </a:p>
-        </p:txBody>
-      </p:sp>
-      <p:sp>
-        <p:nvSpPr>
-          <p:cNvPr id="4" name="Shape 2"/>
-          <p:cNvSpPr/>
-          <p:nvPr/>
-        </p:nvSpPr>
-        <p:spPr>
-          <a:xfrm>
-            <a:off x="640080" y="1828800"/>
-            <a:ext cx="10881360" cy="1371600"/>
+            <a:endParaRPr lang="en-US" sz="1100" dirty="0"/>
+          </a:p>
+        </p:txBody>
+      </p:sp>
+      <p:sp>
+        <p:nvSpPr>
+          <p:cNvPr id="8" name="Shape 6"/>
+          <p:cNvSpPr/>
+          <p:nvPr/>
+        </p:nvSpPr>
+        <p:spPr>
+          <a:xfrm>
+            <a:off x="777240" y="2514600"/>
+            <a:ext cx="3301898" cy="3566160"/>
           </a:xfrm>
           <a:prstGeom prst="roundRect">
             <a:avLst>
-              <a:gd name="adj" fmla="val 6667"/>
+              <a:gd name="adj" fmla="val 1108"/>
             </a:avLst>
           </a:prstGeom>
           <a:solidFill>
-            <a:srgbClr val="F7F2E3"/>
-          </a:solidFill>
-          <a:ln w="15240">
+            <a:srgbClr val="FFFAF0"/>
+          </a:solidFill>
+          <a:ln w="12700">
             <a:solidFill>
-              <a:srgbClr val="B98A1E"/>
+              <a:srgbClr val="E4E6E9"/>
             </a:solidFill>
             <a:prstDash val="solid"/>
           </a:ln>
@@ -2580,34 +2733,14 @@
       </p:sp>
       <p:sp>
         <p:nvSpPr>
-          <p:cNvPr id="5" name="Shape 3"/>
-          <p:cNvSpPr/>
-          <p:nvPr/>
-        </p:nvSpPr>
-        <p:spPr>
-          <a:xfrm>
-            <a:off x="960120" y="2203704"/>
-            <a:ext cx="621792" cy="621792"/>
-          </a:xfrm>
-          <a:prstGeom prst="ellipse">
-            <a:avLst/>
-          </a:prstGeom>
-          <a:solidFill>
-            <a:srgbClr val="8A6516"/>
-          </a:solidFill>
-          <a:ln/>
-        </p:spPr>
-      </p:sp>
-      <p:sp>
-        <p:nvSpPr>
-          <p:cNvPr id="6" name="Text 4"/>
-          <p:cNvSpPr/>
-          <p:nvPr/>
-        </p:nvSpPr>
-        <p:spPr>
-          <a:xfrm>
-            <a:off x="960120" y="2203704"/>
-            <a:ext cx="621792" cy="621792"/>
+          <p:cNvPr id="9" name="Text 7"/>
+          <p:cNvSpPr/>
+          <p:nvPr/>
+        </p:nvSpPr>
+        <p:spPr>
+          <a:xfrm>
+            <a:off x="1051560" y="2752344"/>
+            <a:ext cx="1828800" cy="777240"/>
           </a:xfrm>
           <a:prstGeom prst="rect">
             <a:avLst/>
@@ -2619,34 +2752,76 @@
           <a:bodyPr wrap="square" lIns="0" tIns="0" rIns="0" bIns="0" rtlCol="0" anchor="ctr"/>
           <a:lstStyle/>
           <a:p>
-            <a:pPr algn="ctr" indent="0" marL="0">
-              <a:buNone/>
-            </a:pPr>
-            <a:r>
-              <a:rPr lang="en-US" sz="2200" b="1" dirty="0">
-                <a:solidFill>
-                  <a:srgbClr val="FFFFFF"/>
-                </a:solidFill>
-                <a:latin typeface="Century Schoolbook" pitchFamily="34" charset="0"/>
-                <a:ea typeface="Century Schoolbook" pitchFamily="34" charset="-122"/>
-                <a:cs typeface="Century Schoolbook" pitchFamily="34" charset="-120"/>
-              </a:rPr>
-              <a:t>1</a:t>
-            </a:r>
-            <a:endParaRPr lang="en-US" sz="2200" dirty="0"/>
-          </a:p>
-        </p:txBody>
-      </p:sp>
-      <p:sp>
-        <p:nvSpPr>
-          <p:cNvPr id="7" name="Text 5"/>
-          <p:cNvSpPr/>
-          <p:nvPr/>
-        </p:nvSpPr>
-        <p:spPr>
-          <a:xfrm>
-            <a:off x="1828800" y="2029968"/>
-            <a:ext cx="9418320" cy="411480"/>
+            <a:pPr indent="0" marL="0">
+              <a:buNone/>
+            </a:pPr>
+            <a:r>
+              <a:rPr lang="en-US" sz="3800" b="1" dirty="0">
+                <a:solidFill>
+                  <a:srgbClr val="A35A12"/>
+                </a:solidFill>
+                <a:latin typeface="Century Gothic" pitchFamily="34" charset="0"/>
+                <a:ea typeface="Century Gothic" pitchFamily="34" charset="-122"/>
+                <a:cs typeface="Century Gothic" pitchFamily="34" charset="-120"/>
+              </a:rPr>
+              <a:t>01</a:t>
+            </a:r>
+            <a:endParaRPr lang="en-US" sz="3800" dirty="0"/>
+          </a:p>
+        </p:txBody>
+      </p:sp>
+      <p:sp>
+        <p:nvSpPr>
+          <p:cNvPr id="10" name="Text 8"/>
+          <p:cNvSpPr/>
+          <p:nvPr/>
+        </p:nvSpPr>
+        <p:spPr>
+          <a:xfrm>
+            <a:off x="1069848" y="3566160"/>
+            <a:ext cx="2753258" cy="868680"/>
+          </a:xfrm>
+          <a:prstGeom prst="rect">
+            <a:avLst/>
+          </a:prstGeom>
+          <a:noFill/>
+          <a:ln/>
+        </p:spPr>
+        <p:txBody>
+          <a:bodyPr wrap="square" lIns="0" tIns="0" rIns="0" bIns="0" rtlCol="0" anchor="t"/>
+          <a:lstStyle/>
+          <a:p>
+            <a:pPr indent="0" marL="0">
+              <a:lnSpc>
+                <a:spcPct val="100000"/>
+              </a:lnSpc>
+              <a:buNone/>
+            </a:pPr>
+            <a:r>
+              <a:rPr lang="en-US" sz="1550" b="1" dirty="0">
+                <a:solidFill>
+                  <a:srgbClr val="3B2712"/>
+                </a:solidFill>
+                <a:latin typeface="Century Gothic" pitchFamily="34" charset="0"/>
+                <a:ea typeface="Century Gothic" pitchFamily="34" charset="-122"/>
+                <a:cs typeface="Century Gothic" pitchFamily="34" charset="-120"/>
+              </a:rPr>
+              <a:t>A plain-language verdict per apiary</a:t>
+            </a:r>
+            <a:endParaRPr lang="en-US" sz="1550" dirty="0"/>
+          </a:p>
+        </p:txBody>
+      </p:sp>
+      <p:sp>
+        <p:nvSpPr>
+          <p:cNvPr id="11" name="Text 9"/>
+          <p:cNvSpPr/>
+          <p:nvPr/>
+        </p:nvSpPr>
+        <p:spPr>
+          <a:xfrm>
+            <a:off x="1069848" y="4434840"/>
+            <a:ext cx="2753258" cy="1463040"/>
           </a:xfrm>
           <a:prstGeom prst="rect">
             <a:avLst/>
@@ -2659,33 +2834,63 @@
           <a:lstStyle/>
           <a:p>
             <a:pPr indent="0" marL="0">
-              <a:buNone/>
-            </a:pPr>
-            <a:r>
-              <a:rPr lang="en-US" sz="1700" b="1" dirty="0">
-                <a:solidFill>
-                  <a:srgbClr val="281F0F"/>
+              <a:lnSpc>
+                <a:spcPct val="120000"/>
+              </a:lnSpc>
+              <a:buNone/>
+            </a:pPr>
+            <a:r>
+              <a:rPr lang="en-US" sz="1200" dirty="0">
+                <a:solidFill>
+                  <a:srgbClr val="5F6B74"/>
                 </a:solidFill>
                 <a:latin typeface="Calibri" pitchFamily="34" charset="0"/>
                 <a:ea typeface="Calibri" pitchFamily="34" charset="-122"/>
                 <a:cs typeface="Calibri" pitchFamily="34" charset="-120"/>
               </a:rPr>
-              <a:t>A plain-language verdict per apiary</a:t>
-            </a:r>
-            <a:endParaRPr lang="en-US" sz="1700" dirty="0"/>
-          </a:p>
-        </p:txBody>
-      </p:sp>
-      <p:sp>
-        <p:nvSpPr>
-          <p:cNvPr id="8" name="Text 6"/>
-          <p:cNvSpPr/>
-          <p:nvPr/>
-        </p:nvSpPr>
-        <p:spPr>
-          <a:xfrm>
-            <a:off x="1828800" y="2450592"/>
-            <a:ext cx="9418320" cy="594360"/>
+              <a:t>Each colony card reads thriving, stressed or about to swarm — a conclusion, not five graphs to interpret.</a:t>
+            </a:r>
+            <a:endParaRPr lang="en-US" sz="1200" dirty="0"/>
+          </a:p>
+        </p:txBody>
+      </p:sp>
+      <p:sp>
+        <p:nvSpPr>
+          <p:cNvPr id="12" name="Shape 10"/>
+          <p:cNvSpPr/>
+          <p:nvPr/>
+        </p:nvSpPr>
+        <p:spPr>
+          <a:xfrm>
+            <a:off x="4444898" y="2514600"/>
+            <a:ext cx="3301898" cy="3566160"/>
+          </a:xfrm>
+          <a:prstGeom prst="roundRect">
+            <a:avLst>
+              <a:gd name="adj" fmla="val 1108"/>
+            </a:avLst>
+          </a:prstGeom>
+          <a:solidFill>
+            <a:srgbClr val="FFFAF0"/>
+          </a:solidFill>
+          <a:ln w="12700">
+            <a:solidFill>
+              <a:srgbClr val="E4E6E9"/>
+            </a:solidFill>
+            <a:prstDash val="solid"/>
+          </a:ln>
+        </p:spPr>
+      </p:sp>
+      <p:sp>
+        <p:nvSpPr>
+          <p:cNvPr id="13" name="Text 11"/>
+          <p:cNvSpPr/>
+          <p:nvPr/>
+        </p:nvSpPr>
+        <p:spPr>
+          <a:xfrm>
+            <a:off x="4719218" y="2752344"/>
+            <a:ext cx="1828800" cy="777240"/>
           </a:xfrm>
           <a:prstGeom prst="rect">
             <a:avLst/>
@@ -2698,48 +2903,129 @@
           <a:lstStyle/>
           <a:p>
             <a:pPr indent="0" marL="0">
+              <a:buNone/>
+            </a:pPr>
+            <a:r>
+              <a:rPr lang="en-US" sz="3800" b="1" dirty="0">
+                <a:solidFill>
+                  <a:srgbClr val="A35A12"/>
+                </a:solidFill>
+                <a:latin typeface="Century Gothic" pitchFamily="34" charset="0"/>
+                <a:ea typeface="Century Gothic" pitchFamily="34" charset="-122"/>
+                <a:cs typeface="Century Gothic" pitchFamily="34" charset="-120"/>
+              </a:rPr>
+              <a:t>02</a:t>
+            </a:r>
+            <a:endParaRPr lang="en-US" sz="3800" dirty="0"/>
+          </a:p>
+        </p:txBody>
+      </p:sp>
+      <p:sp>
+        <p:nvSpPr>
+          <p:cNvPr id="14" name="Text 12"/>
+          <p:cNvSpPr/>
+          <p:nvPr/>
+        </p:nvSpPr>
+        <p:spPr>
+          <a:xfrm>
+            <a:off x="4737506" y="3566160"/>
+            <a:ext cx="2753258" cy="868680"/>
+          </a:xfrm>
+          <a:prstGeom prst="rect">
+            <a:avLst/>
+          </a:prstGeom>
+          <a:noFill/>
+          <a:ln/>
+        </p:spPr>
+        <p:txBody>
+          <a:bodyPr wrap="square" lIns="0" tIns="0" rIns="0" bIns="0" rtlCol="0" anchor="t"/>
+          <a:lstStyle/>
+          <a:p>
+            <a:pPr indent="0" marL="0">
               <a:lnSpc>
-                <a:spcPct val="105000"/>
+                <a:spcPct val="100000"/>
               </a:lnSpc>
               <a:buNone/>
             </a:pPr>
             <a:r>
-              <a:rPr lang="en-US" sz="1300" dirty="0">
-                <a:solidFill>
-                  <a:srgbClr val="6E6144"/>
+              <a:rPr lang="en-US" sz="1550" b="1" dirty="0">
+                <a:solidFill>
+                  <a:srgbClr val="3B2712"/>
+                </a:solidFill>
+                <a:latin typeface="Century Gothic" pitchFamily="34" charset="0"/>
+                <a:ea typeface="Century Gothic" pitchFamily="34" charset="-122"/>
+                <a:cs typeface="Century Gothic" pitchFamily="34" charset="-120"/>
+              </a:rPr>
+              <a:t>A brood-overheat alert with context</a:t>
+            </a:r>
+            <a:endParaRPr lang="en-US" sz="1550" dirty="0"/>
+          </a:p>
+        </p:txBody>
+      </p:sp>
+      <p:sp>
+        <p:nvSpPr>
+          <p:cNvPr id="15" name="Text 13"/>
+          <p:cNvSpPr/>
+          <p:nvPr/>
+        </p:nvSpPr>
+        <p:spPr>
+          <a:xfrm>
+            <a:off x="4737506" y="4434840"/>
+            <a:ext cx="2753258" cy="1463040"/>
+          </a:xfrm>
+          <a:prstGeom prst="rect">
+            <a:avLst/>
+          </a:prstGeom>
+          <a:noFill/>
+          <a:ln/>
+        </p:spPr>
+        <p:txBody>
+          <a:bodyPr wrap="square" lIns="0" tIns="0" rIns="0" bIns="0" rtlCol="0" anchor="ctr"/>
+          <a:lstStyle/>
+          <a:p>
+            <a:pPr indent="0" marL="0">
+              <a:lnSpc>
+                <a:spcPct val="120000"/>
+              </a:lnSpc>
+              <a:buNone/>
+            </a:pPr>
+            <a:r>
+              <a:rPr lang="en-US" sz="1200" dirty="0">
+                <a:solidFill>
+                  <a:srgbClr val="5F6B74"/>
                 </a:solidFill>
                 <a:latin typeface="Calibri" pitchFamily="34" charset="0"/>
                 <a:ea typeface="Calibri" pitchFamily="34" charset="-122"/>
                 <a:cs typeface="Calibri" pitchFamily="34" charset="-120"/>
               </a:rPr>
-              <a:t>Each colony card reads thriving, stressed or about to swarm — a conclusion, not five graphs to interpret.</a:t>
-            </a:r>
-            <a:endParaRPr lang="en-US" sz="1300" dirty="0"/>
-          </a:p>
-        </p:txBody>
-      </p:sp>
-      <p:sp>
-        <p:nvSpPr>
-          <p:cNvPr id="9" name="Shape 7"/>
-          <p:cNvSpPr/>
-          <p:nvPr/>
-        </p:nvSpPr>
-        <p:spPr>
-          <a:xfrm>
-            <a:off x="640080" y="3346704"/>
-            <a:ext cx="10881360" cy="1371600"/>
+              <a:t>The banner names two firing brood-overheat conditions and reports brood temperature breaching a safe threshold while weight is rising.</a:t>
+            </a:r>
+            <a:endParaRPr lang="en-US" sz="1200" dirty="0"/>
+          </a:p>
+        </p:txBody>
+      </p:sp>
+      <p:sp>
+        <p:nvSpPr>
+          <p:cNvPr id="16" name="Shape 14"/>
+          <p:cNvSpPr/>
+          <p:nvPr/>
+        </p:nvSpPr>
+        <p:spPr>
+          <a:xfrm>
+            <a:off x="8112557" y="2514600"/>
+            <a:ext cx="3301898" cy="3566160"/>
           </a:xfrm>
           <a:prstGeom prst="roundRect">
             <a:avLst>
-              <a:gd name="adj" fmla="val 6667"/>
+              <a:gd name="adj" fmla="val 1108"/>
             </a:avLst>
           </a:prstGeom>
           <a:solidFill>
-            <a:srgbClr val="F7F2E3"/>
-          </a:solidFill>
-          <a:ln w="15240">
+            <a:srgbClr val="FFFAF0"/>
+          </a:solidFill>
+          <a:ln w="12700">
             <a:solidFill>
-              <a:srgbClr val="B98A1E"/>
+              <a:srgbClr val="E4E6E9"/>
             </a:solidFill>
             <a:prstDash val="solid"/>
           </a:ln>
@@ -2747,34 +3033,14 @@
       </p:sp>
       <p:sp>
         <p:nvSpPr>
-          <p:cNvPr id="10" name="Shape 8"/>
-          <p:cNvSpPr/>
-          <p:nvPr/>
-        </p:nvSpPr>
-        <p:spPr>
-          <a:xfrm>
-            <a:off x="960120" y="3721608"/>
-            <a:ext cx="621792" cy="621792"/>
-          </a:xfrm>
-          <a:prstGeom prst="ellipse">
-            <a:avLst/>
-          </a:prstGeom>
-          <a:solidFill>
-            <a:srgbClr val="8A6516"/>
-          </a:solidFill>
-          <a:ln/>
-        </p:spPr>
-      </p:sp>
-      <p:sp>
-        <p:nvSpPr>
-          <p:cNvPr id="11" name="Text 9"/>
-          <p:cNvSpPr/>
-          <p:nvPr/>
-        </p:nvSpPr>
-        <p:spPr>
-          <a:xfrm>
-            <a:off x="960120" y="3721608"/>
-            <a:ext cx="621792" cy="621792"/>
+          <p:cNvPr id="17" name="Text 15"/>
+          <p:cNvSpPr/>
+          <p:nvPr/>
+        </p:nvSpPr>
+        <p:spPr>
+          <a:xfrm>
+            <a:off x="8386877" y="2752344"/>
+            <a:ext cx="1828800" cy="777240"/>
           </a:xfrm>
           <a:prstGeom prst="rect">
             <a:avLst/>
@@ -2786,34 +3052,76 @@
           <a:bodyPr wrap="square" lIns="0" tIns="0" rIns="0" bIns="0" rtlCol="0" anchor="ctr"/>
           <a:lstStyle/>
           <a:p>
-            <a:pPr algn="ctr" indent="0" marL="0">
-              <a:buNone/>
-            </a:pPr>
-            <a:r>
-              <a:rPr lang="en-US" sz="2200" b="1" dirty="0">
-                <a:solidFill>
-                  <a:srgbClr val="FFFFFF"/>
-                </a:solidFill>
-                <a:latin typeface="Century Schoolbook" pitchFamily="34" charset="0"/>
-                <a:ea typeface="Century Schoolbook" pitchFamily="34" charset="-122"/>
-                <a:cs typeface="Century Schoolbook" pitchFamily="34" charset="-120"/>
-              </a:rPr>
-              <a:t>2</a:t>
-            </a:r>
-            <a:endParaRPr lang="en-US" sz="2200" dirty="0"/>
-          </a:p>
-        </p:txBody>
-      </p:sp>
-      <p:sp>
-        <p:nvSpPr>
-          <p:cNvPr id="12" name="Text 10"/>
-          <p:cNvSpPr/>
-          <p:nvPr/>
-        </p:nvSpPr>
-        <p:spPr>
-          <a:xfrm>
-            <a:off x="1828800" y="3547872"/>
-            <a:ext cx="9418320" cy="411480"/>
+            <a:pPr indent="0" marL="0">
+              <a:buNone/>
+            </a:pPr>
+            <a:r>
+              <a:rPr lang="en-US" sz="3800" b="1" dirty="0">
+                <a:solidFill>
+                  <a:srgbClr val="A35A12"/>
+                </a:solidFill>
+                <a:latin typeface="Century Gothic" pitchFamily="34" charset="0"/>
+                <a:ea typeface="Century Gothic" pitchFamily="34" charset="-122"/>
+                <a:cs typeface="Century Gothic" pitchFamily="34" charset="-120"/>
+              </a:rPr>
+              <a:t>03</a:t>
+            </a:r>
+            <a:endParaRPr lang="en-US" sz="3800" dirty="0"/>
+          </a:p>
+        </p:txBody>
+      </p:sp>
+      <p:sp>
+        <p:nvSpPr>
+          <p:cNvPr id="18" name="Text 16"/>
+          <p:cNvSpPr/>
+          <p:nvPr/>
+        </p:nvSpPr>
+        <p:spPr>
+          <a:xfrm>
+            <a:off x="8405165" y="3566160"/>
+            <a:ext cx="2753258" cy="868680"/>
+          </a:xfrm>
+          <a:prstGeom prst="rect">
+            <a:avLst/>
+          </a:prstGeom>
+          <a:noFill/>
+          <a:ln/>
+        </p:spPr>
+        <p:txBody>
+          <a:bodyPr wrap="square" lIns="0" tIns="0" rIns="0" bIns="0" rtlCol="0" anchor="t"/>
+          <a:lstStyle/>
+          <a:p>
+            <a:pPr indent="0" marL="0">
+              <a:lnSpc>
+                <a:spcPct val="100000"/>
+              </a:lnSpc>
+              <a:buNone/>
+            </a:pPr>
+            <a:r>
+              <a:rPr lang="en-US" sz="1550" b="1" dirty="0">
+                <a:solidFill>
+                  <a:srgbClr val="3B2712"/>
+                </a:solidFill>
+                <a:latin typeface="Century Gothic" pitchFamily="34" charset="0"/>
+                <a:ea typeface="Century Gothic" pitchFamily="34" charset="-122"/>
+                <a:cs typeface="Century Gothic" pitchFamily="34" charset="-120"/>
+              </a:rPr>
+              <a:t>Sound leads the other signals</a:t>
+            </a:r>
+            <a:endParaRPr lang="en-US" sz="1550" dirty="0"/>
+          </a:p>
+        </p:txBody>
+      </p:sp>
+      <p:sp>
+        <p:nvSpPr>
+          <p:cNvPr id="19" name="Text 17"/>
+          <p:cNvSpPr/>
+          <p:nvPr/>
+        </p:nvSpPr>
+        <p:spPr>
+          <a:xfrm>
+            <a:off x="8405165" y="4434840"/>
+            <a:ext cx="2753258" cy="1463040"/>
           </a:xfrm>
           <a:prstGeom prst="rect">
             <a:avLst/>
@@ -2826,229 +3134,23 @@
           <a:lstStyle/>
           <a:p>
             <a:pPr indent="0" marL="0">
-              <a:buNone/>
-            </a:pPr>
-            <a:r>
-              <a:rPr lang="en-US" sz="1700" b="1" dirty="0">
-                <a:solidFill>
-                  <a:srgbClr val="281F0F"/>
+              <a:lnSpc>
+                <a:spcPct val="120000"/>
+              </a:lnSpc>
+              <a:buNone/>
+            </a:pPr>
+            <a:r>
+              <a:rPr lang="en-US" sz="1200" dirty="0">
+                <a:solidFill>
+                  <a:srgbClr val="5F6B74"/>
                 </a:solidFill>
                 <a:latin typeface="Calibri" pitchFamily="34" charset="0"/>
                 <a:ea typeface="Calibri" pitchFamily="34" charset="-122"/>
                 <a:cs typeface="Calibri" pitchFamily="34" charset="-120"/>
               </a:rPr>
-              <a:t>A brood-overheat alert with context</a:t>
-            </a:r>
-            <a:endParaRPr lang="en-US" sz="1700" dirty="0"/>
-          </a:p>
-        </p:txBody>
-      </p:sp>
-      <p:sp>
-        <p:nvSpPr>
-          <p:cNvPr id="13" name="Text 11"/>
-          <p:cNvSpPr/>
-          <p:nvPr/>
-        </p:nvSpPr>
-        <p:spPr>
-          <a:xfrm>
-            <a:off x="1828800" y="3968496"/>
-            <a:ext cx="9418320" cy="594360"/>
-          </a:xfrm>
-          <a:prstGeom prst="rect">
-            <a:avLst/>
-          </a:prstGeom>
-          <a:noFill/>
-          <a:ln/>
-        </p:spPr>
-        <p:txBody>
-          <a:bodyPr wrap="square" lIns="0" tIns="0" rIns="0" bIns="0" rtlCol="0" anchor="ctr"/>
-          <a:lstStyle/>
-          <a:p>
-            <a:pPr indent="0" marL="0">
-              <a:lnSpc>
-                <a:spcPct val="105000"/>
-              </a:lnSpc>
-              <a:buNone/>
-            </a:pPr>
-            <a:r>
-              <a:rPr lang="en-US" sz="1300" dirty="0">
-                <a:solidFill>
-                  <a:srgbClr val="6E6144"/>
-                </a:solidFill>
-                <a:latin typeface="Calibri" pitchFamily="34" charset="0"/>
-                <a:ea typeface="Calibri" pitchFamily="34" charset="-122"/>
-                <a:cs typeface="Calibri" pitchFamily="34" charset="-120"/>
-              </a:rPr>
-              <a:t>The banner names two firing brood-overheat conditions and reports brood temperature breaching a safe threshold while weight is rising.</a:t>
-            </a:r>
-            <a:endParaRPr lang="en-US" sz="1300" dirty="0"/>
-          </a:p>
-        </p:txBody>
-      </p:sp>
-      <p:sp>
-        <p:nvSpPr>
-          <p:cNvPr id="14" name="Shape 12"/>
-          <p:cNvSpPr/>
-          <p:nvPr/>
-        </p:nvSpPr>
-        <p:spPr>
-          <a:xfrm>
-            <a:off x="640080" y="4864608"/>
-            <a:ext cx="10881360" cy="1371600"/>
-          </a:xfrm>
-          <a:prstGeom prst="roundRect">
-            <a:avLst>
-              <a:gd name="adj" fmla="val 6667"/>
-            </a:avLst>
-          </a:prstGeom>
-          <a:solidFill>
-            <a:srgbClr val="F7F2E3"/>
-          </a:solidFill>
-          <a:ln w="15240">
-            <a:solidFill>
-              <a:srgbClr val="B98A1E"/>
-            </a:solidFill>
-            <a:prstDash val="solid"/>
-          </a:ln>
-        </p:spPr>
-      </p:sp>
-      <p:sp>
-        <p:nvSpPr>
-          <p:cNvPr id="15" name="Shape 13"/>
-          <p:cNvSpPr/>
-          <p:nvPr/>
-        </p:nvSpPr>
-        <p:spPr>
-          <a:xfrm>
-            <a:off x="960120" y="5239512"/>
-            <a:ext cx="621792" cy="621792"/>
-          </a:xfrm>
-          <a:prstGeom prst="ellipse">
-            <a:avLst/>
-          </a:prstGeom>
-          <a:solidFill>
-            <a:srgbClr val="8A6516"/>
-          </a:solidFill>
-          <a:ln/>
-        </p:spPr>
-      </p:sp>
-      <p:sp>
-        <p:nvSpPr>
-          <p:cNvPr id="16" name="Text 14"/>
-          <p:cNvSpPr/>
-          <p:nvPr/>
-        </p:nvSpPr>
-        <p:spPr>
-          <a:xfrm>
-            <a:off x="960120" y="5239512"/>
-            <a:ext cx="621792" cy="621792"/>
-          </a:xfrm>
-          <a:prstGeom prst="rect">
-            <a:avLst/>
-          </a:prstGeom>
-          <a:noFill/>
-          <a:ln/>
-        </p:spPr>
-        <p:txBody>
-          <a:bodyPr wrap="square" lIns="0" tIns="0" rIns="0" bIns="0" rtlCol="0" anchor="ctr"/>
-          <a:lstStyle/>
-          <a:p>
-            <a:pPr algn="ctr" indent="0" marL="0">
-              <a:buNone/>
-            </a:pPr>
-            <a:r>
-              <a:rPr lang="en-US" sz="2200" b="1" dirty="0">
-                <a:solidFill>
-                  <a:srgbClr val="FFFFFF"/>
-                </a:solidFill>
-                <a:latin typeface="Century Schoolbook" pitchFamily="34" charset="0"/>
-                <a:ea typeface="Century Schoolbook" pitchFamily="34" charset="-122"/>
-                <a:cs typeface="Century Schoolbook" pitchFamily="34" charset="-120"/>
-              </a:rPr>
-              <a:t>3</a:t>
-            </a:r>
-            <a:endParaRPr lang="en-US" sz="2200" dirty="0"/>
-          </a:p>
-        </p:txBody>
-      </p:sp>
-      <p:sp>
-        <p:nvSpPr>
-          <p:cNvPr id="17" name="Text 15"/>
-          <p:cNvSpPr/>
-          <p:nvPr/>
-        </p:nvSpPr>
-        <p:spPr>
-          <a:xfrm>
-            <a:off x="1828800" y="5065776"/>
-            <a:ext cx="9418320" cy="411480"/>
-          </a:xfrm>
-          <a:prstGeom prst="rect">
-            <a:avLst/>
-          </a:prstGeom>
-          <a:noFill/>
-          <a:ln/>
-        </p:spPr>
-        <p:txBody>
-          <a:bodyPr wrap="square" lIns="0" tIns="0" rIns="0" bIns="0" rtlCol="0" anchor="ctr"/>
-          <a:lstStyle/>
-          <a:p>
-            <a:pPr indent="0" marL="0">
-              <a:buNone/>
-            </a:pPr>
-            <a:r>
-              <a:rPr lang="en-US" sz="1700" b="1" dirty="0">
-                <a:solidFill>
-                  <a:srgbClr val="281F0F"/>
-                </a:solidFill>
-                <a:latin typeface="Calibri" pitchFamily="34" charset="0"/>
-                <a:ea typeface="Calibri" pitchFamily="34" charset="-122"/>
-                <a:cs typeface="Calibri" pitchFamily="34" charset="-120"/>
-              </a:rPr>
-              <a:t>Sound leads the other signals</a:t>
-            </a:r>
-            <a:endParaRPr lang="en-US" sz="1700" dirty="0"/>
-          </a:p>
-        </p:txBody>
-      </p:sp>
-      <p:sp>
-        <p:nvSpPr>
-          <p:cNvPr id="18" name="Text 16"/>
-          <p:cNvSpPr/>
-          <p:nvPr/>
-        </p:nvSpPr>
-        <p:spPr>
-          <a:xfrm>
-            <a:off x="1828800" y="5486400"/>
-            <a:ext cx="9418320" cy="594360"/>
-          </a:xfrm>
-          <a:prstGeom prst="rect">
-            <a:avLst/>
-          </a:prstGeom>
-          <a:noFill/>
-          <a:ln/>
-        </p:spPr>
-        <p:txBody>
-          <a:bodyPr wrap="square" lIns="0" tIns="0" rIns="0" bIns="0" rtlCol="0" anchor="ctr"/>
-          <a:lstStyle/>
-          <a:p>
-            <a:pPr indent="0" marL="0">
-              <a:lnSpc>
-                <a:spcPct val="105000"/>
-              </a:lnSpc>
-              <a:buNone/>
-            </a:pPr>
-            <a:r>
-              <a:rPr lang="en-US" sz="1300" dirty="0">
-                <a:solidFill>
-                  <a:srgbClr val="6E6144"/>
-                </a:solidFill>
-                <a:latin typeface="Calibri" pitchFamily="34" charset="0"/>
-                <a:ea typeface="Calibri" pitchFamily="34" charset="-122"/>
-                <a:cs typeface="Calibri" pitchFamily="34" charset="-120"/>
-              </a:rPr>
               <a:t>The acoustic swarming-precursor rule flags a rising hum above 350 Hz before the weight even moves.</a:t>
             </a:r>
-            <a:endParaRPr lang="en-US" sz="1300" dirty="0"/>
+            <a:endParaRPr lang="en-US" sz="1200" dirty="0"/>
           </a:p>
         </p:txBody>
       </p:sp>
@@ -3066,7 +3168,7 @@
     <p:bg>
       <p:bgPr>
         <a:solidFill>
-          <a:srgbClr val="FFFFFF"/>
+          <a:srgbClr val="F4E8CE"/>
         </a:solidFill>
       </p:bgPr>
     </p:bg>
@@ -3086,42 +3188,23 @@
       </p:grpSpPr>
       <p:sp>
         <p:nvSpPr>
-          <p:cNvPr id="2" name="Text 0"/>
-          <p:cNvSpPr/>
-          <p:nvPr/>
-        </p:nvSpPr>
-        <p:spPr>
-          <a:xfrm>
-            <a:off x="640080" y="502920"/>
-            <a:ext cx="10972800" cy="822960"/>
-          </a:xfrm>
-          <a:prstGeom prst="rect">
-            <a:avLst/>
-          </a:prstGeom>
-          <a:noFill/>
-          <a:ln/>
-        </p:spPr>
-        <p:txBody>
-          <a:bodyPr wrap="square" rtlCol="0" anchor="t"/>
-          <a:lstStyle/>
-          <a:p>
-            <a:pPr indent="0" marL="0">
-              <a:buNone/>
-            </a:pPr>
-            <a:r>
-              <a:rPr lang="en-US" sz="2800" b="1" dirty="0">
-                <a:solidFill>
-                  <a:srgbClr val="281F0F"/>
-                </a:solidFill>
-                <a:latin typeface="Century Schoolbook" pitchFamily="34" charset="0"/>
-                <a:ea typeface="Century Schoolbook" pitchFamily="34" charset="-122"/>
-                <a:cs typeface="Century Schoolbook" pitchFamily="34" charset="-120"/>
-              </a:rPr>
-              <a:t>Hardest Part — a verdict, not a jittery number</a:t>
-            </a:r>
-            <a:endParaRPr lang="en-US" sz="2800" dirty="0"/>
-          </a:p>
-        </p:txBody>
+          <p:cNvPr id="2" name="Shape 0"/>
+          <p:cNvSpPr/>
+          <p:nvPr/>
+        </p:nvSpPr>
+        <p:spPr>
+          <a:xfrm>
+            <a:off x="457200" y="457200"/>
+            <a:ext cx="274320" cy="274320"/>
+          </a:xfrm>
+          <a:prstGeom prst="rect">
+            <a:avLst/>
+          </a:prstGeom>
+          <a:solidFill>
+            <a:srgbClr val="A35A12"/>
+          </a:solidFill>
+          <a:ln/>
+        </p:spPr>
       </p:sp>
       <p:sp>
         <p:nvSpPr>
@@ -3131,20 +3214,157 @@
         </p:nvSpPr>
         <p:spPr>
           <a:xfrm>
-            <a:off x="640080" y="1874520"/>
-            <a:ext cx="4937760" cy="4160520"/>
+            <a:off x="11460175" y="6126480"/>
+            <a:ext cx="274320" cy="274320"/>
+          </a:xfrm>
+          <a:prstGeom prst="rect">
+            <a:avLst/>
+          </a:prstGeom>
+          <a:solidFill>
+            <a:srgbClr val="A35A12"/>
+          </a:solidFill>
+          <a:ln/>
+        </p:spPr>
+      </p:sp>
+      <p:sp>
+        <p:nvSpPr>
+          <p:cNvPr id="4" name="Text 2"/>
+          <p:cNvSpPr/>
+          <p:nvPr/>
+        </p:nvSpPr>
+        <p:spPr>
+          <a:xfrm>
+            <a:off x="777240" y="731520"/>
+            <a:ext cx="914400" cy="640080"/>
+          </a:xfrm>
+          <a:prstGeom prst="rect">
+            <a:avLst/>
+          </a:prstGeom>
+          <a:noFill/>
+          <a:ln/>
+        </p:spPr>
+        <p:txBody>
+          <a:bodyPr wrap="square" lIns="0" tIns="0" rIns="0" bIns="0" rtlCol="0" anchor="ctr"/>
+          <a:lstStyle/>
+          <a:p>
+            <a:pPr indent="0" marL="0">
+              <a:buNone/>
+            </a:pPr>
+            <a:r>
+              <a:rPr lang="en-US" sz="3000" b="1" dirty="0">
+                <a:solidFill>
+                  <a:srgbClr val="A35A12"/>
+                </a:solidFill>
+                <a:latin typeface="Century Gothic" pitchFamily="34" charset="0"/>
+                <a:ea typeface="Century Gothic" pitchFamily="34" charset="-122"/>
+                <a:cs typeface="Century Gothic" pitchFamily="34" charset="-120"/>
+              </a:rPr>
+              <a:t>03</a:t>
+            </a:r>
+            <a:endParaRPr lang="en-US" sz="3000" dirty="0"/>
+          </a:p>
+        </p:txBody>
+      </p:sp>
+      <p:sp>
+        <p:nvSpPr>
+          <p:cNvPr id="5" name="Text 3"/>
+          <p:cNvSpPr/>
+          <p:nvPr/>
+        </p:nvSpPr>
+        <p:spPr>
+          <a:xfrm>
+            <a:off x="1645920" y="905256"/>
+            <a:ext cx="9768535" cy="274320"/>
+          </a:xfrm>
+          <a:prstGeom prst="rect">
+            <a:avLst/>
+          </a:prstGeom>
+          <a:noFill/>
+          <a:ln/>
+        </p:spPr>
+        <p:txBody>
+          <a:bodyPr wrap="square" lIns="0" tIns="0" rIns="0" bIns="0" rtlCol="0" anchor="ctr"/>
+          <a:lstStyle/>
+          <a:p>
+            <a:pPr indent="0" marL="0">
+              <a:buNone/>
+            </a:pPr>
+            <a:r>
+              <a:rPr lang="en-US" sz="1100" b="1" spc="200" kern="0" dirty="0">
+                <a:solidFill>
+                  <a:srgbClr val="5F6B74"/>
+                </a:solidFill>
+                <a:latin typeface="Calibri" pitchFamily="34" charset="0"/>
+                <a:ea typeface="Calibri" pitchFamily="34" charset="-122"/>
+                <a:cs typeface="Calibri" pitchFamily="34" charset="-120"/>
+              </a:rPr>
+              <a:t>CHALLENGE</a:t>
+            </a:r>
+            <a:endParaRPr lang="en-US" sz="1100" dirty="0"/>
+          </a:p>
+        </p:txBody>
+      </p:sp>
+      <p:sp>
+        <p:nvSpPr>
+          <p:cNvPr id="6" name="Text 4"/>
+          <p:cNvSpPr/>
+          <p:nvPr/>
+        </p:nvSpPr>
+        <p:spPr>
+          <a:xfrm>
+            <a:off x="777240" y="1380744"/>
+            <a:ext cx="10637215" cy="640080"/>
+          </a:xfrm>
+          <a:prstGeom prst="rect">
+            <a:avLst/>
+          </a:prstGeom>
+          <a:noFill/>
+          <a:ln/>
+        </p:spPr>
+        <p:txBody>
+          <a:bodyPr wrap="square" lIns="0" tIns="0" rIns="0" bIns="0" rtlCol="0" anchor="ctr"/>
+          <a:lstStyle/>
+          <a:p>
+            <a:pPr indent="0" marL="0">
+              <a:buNone/>
+            </a:pPr>
+            <a:r>
+              <a:rPr lang="en-US" sz="2300" b="1" dirty="0">
+                <a:solidFill>
+                  <a:srgbClr val="3B2712"/>
+                </a:solidFill>
+                <a:latin typeface="Century Gothic" pitchFamily="34" charset="0"/>
+                <a:ea typeface="Century Gothic" pitchFamily="34" charset="-122"/>
+                <a:cs typeface="Century Gothic" pitchFamily="34" charset="-120"/>
+              </a:rPr>
+              <a:t>a verdict, not a jittery number</a:t>
+            </a:r>
+            <a:endParaRPr lang="en-US" sz="2300" dirty="0"/>
+          </a:p>
+        </p:txBody>
+      </p:sp>
+      <p:sp>
+        <p:nvSpPr>
+          <p:cNvPr id="7" name="Shape 5"/>
+          <p:cNvSpPr/>
+          <p:nvPr/>
+        </p:nvSpPr>
+        <p:spPr>
+          <a:xfrm>
+            <a:off x="777240" y="2423160"/>
+            <a:ext cx="5090008" cy="3657600"/>
           </a:xfrm>
           <a:prstGeom prst="roundRect">
             <a:avLst>
-              <a:gd name="adj" fmla="val 2198"/>
+              <a:gd name="adj" fmla="val 1000"/>
             </a:avLst>
           </a:prstGeom>
           <a:solidFill>
-            <a:srgbClr val="F7F2E3"/>
-          </a:solidFill>
-          <a:ln w="19050">
+            <a:srgbClr val="FFFAF0"/>
+          </a:solidFill>
+          <a:ln w="12700">
             <a:solidFill>
-              <a:srgbClr val="E7C24A"/>
+              <a:srgbClr val="E4E6E9"/>
             </a:solidFill>
             <a:prstDash val="solid"/>
           </a:ln>
@@ -3152,14 +3372,14 @@
       </p:sp>
       <p:sp>
         <p:nvSpPr>
-          <p:cNvPr id="4" name="Text 2"/>
-          <p:cNvSpPr/>
-          <p:nvPr/>
-        </p:nvSpPr>
-        <p:spPr>
-          <a:xfrm>
-            <a:off x="960120" y="2103120"/>
-            <a:ext cx="3657600" cy="457200"/>
+          <p:cNvPr id="8" name="Text 6"/>
+          <p:cNvSpPr/>
+          <p:nvPr/>
+        </p:nvSpPr>
+        <p:spPr>
+          <a:xfrm>
+            <a:off x="1097280" y="2697480"/>
+            <a:ext cx="4449928" cy="320040"/>
           </a:xfrm>
           <a:prstGeom prst="rect">
             <a:avLst/>
@@ -3175,84 +3395,38 @@
               <a:buNone/>
             </a:pPr>
             <a:r>
-              <a:rPr lang="en-US" sz="1900" b="1" dirty="0">
-                <a:solidFill>
-                  <a:srgbClr val="E7C24A"/>
-                </a:solidFill>
-                <a:latin typeface="Century Schoolbook" pitchFamily="34" charset="0"/>
-                <a:ea typeface="Century Schoolbook" pitchFamily="34" charset="-122"/>
-                <a:cs typeface="Century Schoolbook" pitchFamily="34" charset="-120"/>
-              </a:rPr>
-              <a:t>Problem</a:t>
-            </a:r>
-            <a:endParaRPr lang="en-US" sz="1900" dirty="0"/>
-          </a:p>
-        </p:txBody>
-      </p:sp>
-      <p:sp>
-        <p:nvSpPr>
-          <p:cNvPr id="5" name="Text 3"/>
-          <p:cNvSpPr/>
-          <p:nvPr/>
-        </p:nvSpPr>
-        <p:spPr>
-          <a:xfrm>
-            <a:off x="960120" y="2651760"/>
-            <a:ext cx="4343400" cy="3200400"/>
-          </a:xfrm>
-          <a:prstGeom prst="rect">
-            <a:avLst/>
-          </a:prstGeom>
-          <a:noFill/>
-          <a:ln/>
-        </p:spPr>
-        <p:txBody>
-          <a:bodyPr wrap="square" lIns="0" tIns="0" rIns="0" bIns="0" rtlCol="0" anchor="ctr"/>
-          <a:lstStyle/>
-          <a:p>
-            <a:pPr indent="0" marL="0">
-              <a:lnSpc>
-                <a:spcPct val="112000"/>
-              </a:lnSpc>
-              <a:buNone/>
-            </a:pPr>
-            <a:r>
-              <a:rPr lang="en-US" sz="1350" dirty="0">
-                <a:solidFill>
-                  <a:srgbClr val="281F0F"/>
+              <a:rPr lang="en-US" sz="1200" b="1" spc="200" kern="0" dirty="0">
+                <a:solidFill>
+                  <a:srgbClr val="D1584E"/>
                 </a:solidFill>
                 <a:latin typeface="Calibri" pitchFamily="34" charset="0"/>
                 <a:ea typeface="Calibri" pitchFamily="34" charset="-122"/>
                 <a:cs typeface="Calibri" pitchFamily="34" charset="-120"/>
               </a:rPr>
-              <a:t>A beekeeper does not want five live graphs per hive; the useful answer is whether a colony is thriving, stressed, or about to swarm. But a single 10-second window is noisy — bees are loud and entrance traffic spikes — so a naive per-reading rule cries wolf, and one reading cannot tell a rising trend from a blip.</a:t>
-            </a:r>
-            <a:endParaRPr lang="en-US" sz="1350" dirty="0"/>
-          </a:p>
-        </p:txBody>
-      </p:sp>
-      <p:sp>
-        <p:nvSpPr>
-          <p:cNvPr id="6" name="Shape 4"/>
-          <p:cNvSpPr/>
-          <p:nvPr/>
-        </p:nvSpPr>
-        <p:spPr>
-          <a:xfrm>
-            <a:off x="6611112" y="1874520"/>
-            <a:ext cx="4937760" cy="4160520"/>
-          </a:xfrm>
-          <a:prstGeom prst="roundRect">
-            <a:avLst>
-              <a:gd name="adj" fmla="val 2198"/>
-            </a:avLst>
-          </a:prstGeom>
-          <a:solidFill>
-            <a:srgbClr val="F7F2E3"/>
-          </a:solidFill>
+              <a:t>PROBLEM</a:t>
+            </a:r>
+            <a:endParaRPr lang="en-US" sz="1200" dirty="0"/>
+          </a:p>
+        </p:txBody>
+      </p:sp>
+      <p:sp>
+        <p:nvSpPr>
+          <p:cNvPr id="9" name="Shape 7"/>
+          <p:cNvSpPr/>
+          <p:nvPr/>
+        </p:nvSpPr>
+        <p:spPr>
+          <a:xfrm>
+            <a:off x="1097280" y="3081528"/>
+            <a:ext cx="4449928" cy="0"/>
+          </a:xfrm>
+          <a:prstGeom prst="line">
+            <a:avLst/>
+          </a:prstGeom>
+          <a:noFill/>
           <a:ln w="19050">
             <a:solidFill>
-              <a:srgbClr val="B98A1E"/>
+              <a:srgbClr val="D1584E"/>
             </a:solidFill>
             <a:prstDash val="solid"/>
           </a:ln>
@@ -3260,104 +3434,176 @@
       </p:sp>
       <p:sp>
         <p:nvSpPr>
-          <p:cNvPr id="7" name="Text 5"/>
-          <p:cNvSpPr/>
-          <p:nvPr/>
-        </p:nvSpPr>
-        <p:spPr>
-          <a:xfrm>
-            <a:off x="6931152" y="2103120"/>
-            <a:ext cx="3657600" cy="457200"/>
-          </a:xfrm>
-          <a:prstGeom prst="rect">
-            <a:avLst/>
-          </a:prstGeom>
-          <a:noFill/>
-          <a:ln/>
-        </p:spPr>
-        <p:txBody>
-          <a:bodyPr wrap="square" lIns="0" tIns="0" rIns="0" bIns="0" rtlCol="0" anchor="ctr"/>
-          <a:lstStyle/>
-          <a:p>
-            <a:pPr indent="0" marL="0">
-              <a:buNone/>
-            </a:pPr>
-            <a:r>
-              <a:rPr lang="en-US" sz="1900" b="1" dirty="0">
-                <a:solidFill>
-                  <a:srgbClr val="B98A1E"/>
-                </a:solidFill>
-                <a:latin typeface="Century Schoolbook" pitchFamily="34" charset="0"/>
-                <a:ea typeface="Century Schoolbook" pitchFamily="34" charset="-122"/>
-                <a:cs typeface="Century Schoolbook" pitchFamily="34" charset="-120"/>
-              </a:rPr>
-              <a:t>Solution</a:t>
-            </a:r>
-            <a:endParaRPr lang="en-US" sz="1900" dirty="0"/>
-          </a:p>
-        </p:txBody>
-      </p:sp>
-      <p:sp>
-        <p:nvSpPr>
-          <p:cNvPr id="8" name="Text 6"/>
-          <p:cNvSpPr/>
-          <p:nvPr/>
-        </p:nvSpPr>
-        <p:spPr>
-          <a:xfrm>
-            <a:off x="6931152" y="2651760"/>
-            <a:ext cx="4343400" cy="3200400"/>
-          </a:xfrm>
-          <a:prstGeom prst="rect">
-            <a:avLst/>
-          </a:prstGeom>
-          <a:noFill/>
-          <a:ln/>
-        </p:spPr>
-        <p:txBody>
-          <a:bodyPr wrap="square" lIns="0" tIns="0" rIns="0" bIns="0" rtlCol="0" anchor="ctr"/>
+          <p:cNvPr id="10" name="Text 8"/>
+          <p:cNvSpPr/>
+          <p:nvPr/>
+        </p:nvSpPr>
+        <p:spPr>
+          <a:xfrm>
+            <a:off x="1097280" y="3246120"/>
+            <a:ext cx="4449928" cy="2651760"/>
+          </a:xfrm>
+          <a:prstGeom prst="rect">
+            <a:avLst/>
+          </a:prstGeom>
+          <a:noFill/>
+          <a:ln/>
+        </p:spPr>
+        <p:txBody>
+          <a:bodyPr wrap="square" lIns="0" tIns="0" rIns="0" bIns="0" rtlCol="0" anchor="t"/>
           <a:lstStyle/>
           <a:p>
             <a:pPr indent="0" marL="0">
               <a:lnSpc>
-                <a:spcPct val="112000"/>
+                <a:spcPct val="128000"/>
               </a:lnSpc>
               <a:buNone/>
             </a:pPr>
             <a:r>
               <a:rPr lang="en-US" sz="1350" dirty="0">
                 <a:solidFill>
-                  <a:srgbClr val="281F0F"/>
+                  <a:srgbClr val="3B2712"/>
                 </a:solidFill>
                 <a:latin typeface="Calibri" pitchFamily="34" charset="0"/>
                 <a:ea typeface="Calibri" pitchFamily="34" charset="-122"/>
                 <a:cs typeface="Calibri" pitchFamily="34" charset="-120"/>
               </a:rPr>
+              <a:t>A beekeeper does not want five live graphs per hive; the useful answer is whether a colony is thriving, stressed, or about to swarm. But a single 10-second window is noisy — bees are loud and entrance traffic spikes — so a naive per-reading rule cries wolf, and one reading cannot tell a rising trend from a blip.</a:t>
+            </a:r>
+            <a:endParaRPr lang="en-US" sz="1350" dirty="0"/>
+          </a:p>
+        </p:txBody>
+      </p:sp>
+      <p:sp>
+        <p:nvSpPr>
+          <p:cNvPr id="11" name="Shape 9"/>
+          <p:cNvSpPr/>
+          <p:nvPr/>
+        </p:nvSpPr>
+        <p:spPr>
+          <a:xfrm>
+            <a:off x="6324448" y="2423160"/>
+            <a:ext cx="5090008" cy="3657600"/>
+          </a:xfrm>
+          <a:prstGeom prst="roundRect">
+            <a:avLst>
+              <a:gd name="adj" fmla="val 1000"/>
+            </a:avLst>
+          </a:prstGeom>
+          <a:solidFill>
+            <a:srgbClr val="FFFAF0"/>
+          </a:solidFill>
+          <a:ln w="12700">
+            <a:solidFill>
+              <a:srgbClr val="E4E6E9"/>
+            </a:solidFill>
+            <a:prstDash val="solid"/>
+          </a:ln>
+        </p:spPr>
+      </p:sp>
+      <p:sp>
+        <p:nvSpPr>
+          <p:cNvPr id="12" name="Text 10"/>
+          <p:cNvSpPr/>
+          <p:nvPr/>
+        </p:nvSpPr>
+        <p:spPr>
+          <a:xfrm>
+            <a:off x="6644488" y="2697480"/>
+            <a:ext cx="4449928" cy="320040"/>
+          </a:xfrm>
+          <a:prstGeom prst="rect">
+            <a:avLst/>
+          </a:prstGeom>
+          <a:noFill/>
+          <a:ln/>
+        </p:spPr>
+        <p:txBody>
+          <a:bodyPr wrap="square" lIns="0" tIns="0" rIns="0" bIns="0" rtlCol="0" anchor="ctr"/>
+          <a:lstStyle/>
+          <a:p>
+            <a:pPr indent="0" marL="0">
+              <a:buNone/>
+            </a:pPr>
+            <a:r>
+              <a:rPr lang="en-US" sz="1200" b="1" spc="200" kern="0" dirty="0">
+                <a:solidFill>
+                  <a:srgbClr val="5F7A33"/>
+                </a:solidFill>
+                <a:latin typeface="Calibri" pitchFamily="34" charset="0"/>
+                <a:ea typeface="Calibri" pitchFamily="34" charset="-122"/>
+                <a:cs typeface="Calibri" pitchFamily="34" charset="-120"/>
+              </a:rPr>
+              <a:t>SOLUTION</a:t>
+            </a:r>
+            <a:endParaRPr lang="en-US" sz="1200" dirty="0"/>
+          </a:p>
+        </p:txBody>
+      </p:sp>
+      <p:sp>
+        <p:nvSpPr>
+          <p:cNvPr id="13" name="Shape 11"/>
+          <p:cNvSpPr/>
+          <p:nvPr/>
+        </p:nvSpPr>
+        <p:spPr>
+          <a:xfrm>
+            <a:off x="6644488" y="3081528"/>
+            <a:ext cx="4449928" cy="0"/>
+          </a:xfrm>
+          <a:prstGeom prst="line">
+            <a:avLst/>
+          </a:prstGeom>
+          <a:noFill/>
+          <a:ln w="19050">
+            <a:solidFill>
+              <a:srgbClr val="5F7A33"/>
+            </a:solidFill>
+            <a:prstDash val="solid"/>
+          </a:ln>
+        </p:spPr>
+      </p:sp>
+      <p:sp>
+        <p:nvSpPr>
+          <p:cNvPr id="14" name="Text 12"/>
+          <p:cNvSpPr/>
+          <p:nvPr/>
+        </p:nvSpPr>
+        <p:spPr>
+          <a:xfrm>
+            <a:off x="6644488" y="3246120"/>
+            <a:ext cx="4449928" cy="2651760"/>
+          </a:xfrm>
+          <a:prstGeom prst="rect">
+            <a:avLst/>
+          </a:prstGeom>
+          <a:noFill/>
+          <a:ln/>
+        </p:spPr>
+        <p:txBody>
+          <a:bodyPr wrap="square" lIns="0" tIns="0" rIns="0" bIns="0" rtlCol="0" anchor="t"/>
+          <a:lstStyle/>
+          <a:p>
+            <a:pPr indent="0" marL="0">
+              <a:lnSpc>
+                <a:spcPct val="128000"/>
+              </a:lnSpc>
+              <a:buNone/>
+            </a:pPr>
+            <a:r>
+              <a:rPr lang="en-US" sz="1350" dirty="0">
+                <a:solidFill>
+                  <a:srgbClr val="3B2712"/>
+                </a:solidFill>
+                <a:latin typeface="Calibri" pitchFamily="34" charset="0"/>
+                <a:ea typeface="Calibri" pitchFamily="34" charset="-122"/>
+                <a:cs typeface="Calibri" pitchFamily="34" charset="-120"/>
+              </a:rPr>
               <a:t>Rules score the window mean or minimum, never a single sample; then the read tier reads a short history of recent windows and reduces it to a weight trend and a brood-thermal state, composed into one sentence per apiary. The judgement lives in the read tier, where that history is already at hand, so the dashboard says "weight rising, brood temperature has breached a safe threshold" rather than showing a number to interpret.</a:t>
             </a:r>
             <a:endParaRPr lang="en-US" sz="1350" dirty="0"/>
           </a:p>
         </p:txBody>
-      </p:sp>
-      <p:sp>
-        <p:nvSpPr>
-          <p:cNvPr id="9" name="Shape 7"/>
-          <p:cNvSpPr/>
-          <p:nvPr/>
-        </p:nvSpPr>
-        <p:spPr>
-          <a:xfrm>
-            <a:off x="5669280" y="3703320"/>
-            <a:ext cx="841248" cy="512064"/>
-          </a:xfrm>
-          <a:prstGeom prst="rightArrow">
-            <a:avLst/>
-          </a:prstGeom>
-          <a:solidFill>
-            <a:srgbClr val="8A6516"/>
-          </a:solidFill>
-          <a:ln/>
-        </p:spPr>
       </p:sp>
     </p:spTree>
   </p:cSld>
